--- a/jinjib-proposal/output/jinjib_marketing_proposal.pptx
+++ b/jinjib-proposal/output/jinjib_marketing_proposal.pptx
@@ -409,8 +409,8 @@
         </p:nvCxnSpPr>
         <p:spPr>
           <a:xfrm>
-            <a:off x="5705856" y="5495544"/>
-            <a:ext cx="5790895" cy="914"/>
+            <a:off x="5724144" y="5468620"/>
+            <a:ext cx="5754319" cy="914"/>
           </a:xfrm>
           <a:prstGeom prst="line">
             <a:avLst/>
@@ -432,8 +432,8 @@
         </p:nvSpPr>
         <p:spPr>
           <a:xfrm>
-            <a:off x="5705856" y="2313432"/>
-            <a:ext cx="5790895" cy="1843430"/>
+            <a:off x="5724144" y="2313432"/>
+            <a:ext cx="5754319" cy="2387092"/>
           </a:xfrm>
           <a:prstGeom prst="rect">
             <a:avLst/>
@@ -449,7 +449,7 @@
           <a:p>
             <a:pPr algn="ctr"/>
             <a:r>
-              <a:rPr lang="ja-JP" sz="2000" b="1" spc="40" dirty="0">
+              <a:rPr lang="ja-JP" sz="4000" b="1" spc="40" dirty="0">
                 <a:solidFill>
                   <a:srgbClr val="1A1A1A"/>
                 </a:solidFill>
@@ -470,8 +470,8 @@
         </p:nvSpPr>
         <p:spPr>
           <a:xfrm>
-            <a:off x="5705856" y="5532120"/>
-            <a:ext cx="5790895" cy="292608"/>
+            <a:off x="5724144" y="5486908"/>
+            <a:ext cx="5754319" cy="374396"/>
           </a:xfrm>
           <a:prstGeom prst="rect">
             <a:avLst/>
@@ -487,7 +487,7 @@
           <a:p>
             <a:pPr algn="ctr"/>
             <a:r>
-              <a:rPr lang="ja-JP" sz="950" dirty="0">
+              <a:rPr lang="ja-JP" sz="1300" dirty="0">
                 <a:solidFill>
                   <a:srgbClr val="1A1A1A"/>
                 </a:solidFill>
@@ -765,7 +765,7 @@
         <p:spPr>
           <a:xfrm>
             <a:off x="969264" y="365760"/>
-            <a:ext cx="7315200" cy="310896"/>
+            <a:ext cx="8229600" cy="310896"/>
           </a:xfrm>
           <a:prstGeom prst="rect">
             <a:avLst/>
@@ -781,7 +781,7 @@
           <a:p>
             <a:pPr algn="l"/>
             <a:r>
-              <a:rPr lang="ja-JP" sz="1250" b="1" spc="60" dirty="0">
+              <a:rPr lang="ja-JP" sz="1200" b="1" spc="60" dirty="0">
                 <a:solidFill>
                   <a:srgbClr val="8A2BE2"/>
                 </a:solidFill>
@@ -792,7 +792,7 @@
               <a:t>TIKTOK CASE 03  </a:t>
             </a:r>
             <a:r>
-              <a:rPr lang="ja-JP" sz="1100" b="1" spc="20" dirty="0">
+              <a:rPr lang="ja-JP" sz="1050" b="1" spc="20" dirty="0">
                 <a:solidFill>
                   <a:srgbClr val="1A1A1A"/>
                 </a:solidFill>
@@ -813,8 +813,8 @@
         </p:nvSpPr>
         <p:spPr>
           <a:xfrm>
-            <a:off x="585216" y="896112"/>
-            <a:ext cx="146304" cy="146304"/>
+            <a:off x="585216" y="868680"/>
+            <a:ext cx="182880" cy="182880"/>
           </a:xfrm>
           <a:prstGeom prst="rect">
             <a:avLst/>
@@ -840,8 +840,8 @@
         </p:nvSpPr>
         <p:spPr>
           <a:xfrm>
-            <a:off x="804672" y="850392"/>
-            <a:ext cx="10801807" cy="256032"/>
+            <a:off x="877824" y="768096"/>
+            <a:ext cx="10728655" cy="365760"/>
           </a:xfrm>
           <a:prstGeom prst="rect">
             <a:avLst/>
@@ -857,7 +857,7 @@
           <a:p>
             <a:pPr algn="l"/>
             <a:r>
-              <a:rPr lang="ja-JP" sz="1100" b="1" spc="30" dirty="0">
+              <a:rPr lang="ja-JP" sz="1000" b="1" spc="40" dirty="0">
                 <a:solidFill>
                   <a:srgbClr val="8A2BE2"/>
                 </a:solidFill>
@@ -865,10 +865,10 @@
                 <a:ea typeface="Montserrat"/>
                 <a:cs typeface="Montserrat"/>
               </a:rPr>
-              <a:t>WORLDVIEW  </a:t>
-            </a:r>
-            <a:r>
-              <a:rPr lang="ja-JP" sz="1300" b="1" dirty="0">
+              <a:t>WORLDVIEW   </a:t>
+            </a:r>
+            <a:r>
+              <a:rPr lang="ja-JP" sz="1650" b="1" dirty="0">
                 <a:solidFill>
                   <a:srgbClr val="1A1A1A"/>
                 </a:solidFill>
@@ -889,8 +889,8 @@
         </p:nvSpPr>
         <p:spPr>
           <a:xfrm>
-            <a:off x="585216" y="1188720"/>
-            <a:ext cx="11021263" cy="777240"/>
+            <a:off x="585216" y="1133856"/>
+            <a:ext cx="11021263" cy="548640"/>
           </a:xfrm>
           <a:prstGeom prst="rect">
             <a:avLst/>
@@ -910,7 +910,7 @@
               </a:lnSpc>
             </a:pPr>
             <a:r>
-              <a:rPr lang="ja-JP" sz="1150" dirty="0">
+              <a:rPr lang="ja-JP" sz="1200" dirty="0">
                 <a:solidFill>
                   <a:srgbClr val="1A1A1A"/>
                 </a:solidFill>
@@ -931,8 +931,8 @@
         </p:nvSpPr>
         <p:spPr>
           <a:xfrm>
-            <a:off x="585216" y="2148840"/>
-            <a:ext cx="3564026" cy="2331720"/>
+            <a:off x="585216" y="1755648"/>
+            <a:ext cx="6300893" cy="3364992"/>
           </a:xfrm>
           <a:prstGeom prst="rect">
             <a:avLst/>
@@ -961,8 +961,8 @@
         </p:nvCxnSpPr>
         <p:spPr>
           <a:xfrm>
-            <a:off x="713232" y="4078224"/>
-            <a:ext cx="3307994" cy="914"/>
+            <a:off x="731520" y="4737872"/>
+            <a:ext cx="6008285" cy="914"/>
           </a:xfrm>
           <a:prstGeom prst="line">
             <a:avLst/>
@@ -984,8 +984,8 @@
         </p:nvSpPr>
         <p:spPr>
           <a:xfrm>
-            <a:off x="713232" y="2848356"/>
-            <a:ext cx="3307994" cy="839419"/>
+            <a:off x="731520" y="2765146"/>
+            <a:ext cx="6008285" cy="1467978"/>
           </a:xfrm>
           <a:prstGeom prst="rect">
             <a:avLst/>
@@ -1001,7 +1001,7 @@
           <a:p>
             <a:pPr algn="ctr"/>
             <a:r>
-              <a:rPr lang="ja-JP" sz="2000" b="1" spc="40" dirty="0">
+              <a:rPr lang="ja-JP" sz="2760" b="1" spc="40" dirty="0">
                 <a:solidFill>
                   <a:srgbClr val="8A2BE2"/>
                 </a:solidFill>
@@ -1022,8 +1022,8 @@
         </p:nvSpPr>
         <p:spPr>
           <a:xfrm>
-            <a:off x="713232" y="4114800"/>
-            <a:ext cx="3307994" cy="292608"/>
+            <a:off x="731520" y="4756160"/>
+            <a:ext cx="6008285" cy="327904"/>
           </a:xfrm>
           <a:prstGeom prst="rect">
             <a:avLst/>
@@ -1039,7 +1039,7 @@
           <a:p>
             <a:pPr algn="ctr"/>
             <a:r>
-              <a:rPr lang="ja-JP" sz="950" dirty="0">
+              <a:rPr lang="ja-JP" sz="1159" dirty="0">
                 <a:solidFill>
                   <a:srgbClr val="1A1A1A"/>
                 </a:solidFill>
@@ -1060,8 +1060,8 @@
         </p:nvSpPr>
         <p:spPr>
           <a:xfrm>
-            <a:off x="4313834" y="2148840"/>
-            <a:ext cx="3564026" cy="2331720"/>
+            <a:off x="7068989" y="1755648"/>
+            <a:ext cx="4537491" cy="1591056"/>
           </a:xfrm>
           <a:prstGeom prst="rect">
             <a:avLst/>
@@ -1090,8 +1090,8 @@
         </p:nvCxnSpPr>
         <p:spPr>
           <a:xfrm>
-            <a:off x="4441850" y="4078224"/>
-            <a:ext cx="3307994" cy="914"/>
+            <a:off x="7215293" y="3035808"/>
+            <a:ext cx="4244883" cy="914"/>
           </a:xfrm>
           <a:prstGeom prst="line">
             <a:avLst/>
@@ -1113,8 +1113,8 @@
         </p:nvSpPr>
         <p:spPr>
           <a:xfrm>
-            <a:off x="4441850" y="2848356"/>
-            <a:ext cx="3307994" cy="839419"/>
+            <a:off x="7215293" y="2232965"/>
+            <a:ext cx="4244883" cy="564185"/>
           </a:xfrm>
           <a:prstGeom prst="rect">
             <a:avLst/>
@@ -1130,7 +1130,7 @@
           <a:p>
             <a:pPr algn="ctr"/>
             <a:r>
-              <a:rPr lang="ja-JP" sz="2000" b="1" spc="40" dirty="0">
+              <a:rPr lang="ja-JP" sz="1566" b="1" spc="40" dirty="0">
                 <a:solidFill>
                   <a:srgbClr val="8A2BE2"/>
                 </a:solidFill>
@@ -1151,8 +1151,8 @@
         </p:nvSpPr>
         <p:spPr>
           <a:xfrm>
-            <a:off x="4441850" y="4114800"/>
-            <a:ext cx="3307994" cy="292608"/>
+            <a:off x="7215293" y="3054096"/>
+            <a:ext cx="4244883" cy="256032"/>
           </a:xfrm>
           <a:prstGeom prst="rect">
             <a:avLst/>
@@ -1168,7 +1168,7 @@
           <a:p>
             <a:pPr algn="ctr"/>
             <a:r>
-              <a:rPr lang="ja-JP" sz="950" dirty="0">
+              <a:rPr lang="ja-JP" sz="658" dirty="0">
                 <a:solidFill>
                   <a:srgbClr val="1A1A1A"/>
                 </a:solidFill>
@@ -1189,8 +1189,8 @@
         </p:nvSpPr>
         <p:spPr>
           <a:xfrm>
-            <a:off x="8042453" y="2148840"/>
-            <a:ext cx="3564026" cy="2331720"/>
+            <a:off x="7068989" y="3529584"/>
+            <a:ext cx="4537491" cy="1591056"/>
           </a:xfrm>
           <a:prstGeom prst="rect">
             <a:avLst/>
@@ -1219,8 +1219,8 @@
         </p:nvCxnSpPr>
         <p:spPr>
           <a:xfrm>
-            <a:off x="8170469" y="4078224"/>
-            <a:ext cx="3307994" cy="914"/>
+            <a:off x="7215293" y="4809744"/>
+            <a:ext cx="4244883" cy="914"/>
           </a:xfrm>
           <a:prstGeom prst="line">
             <a:avLst/>
@@ -1242,8 +1242,8 @@
         </p:nvSpPr>
         <p:spPr>
           <a:xfrm>
-            <a:off x="8170469" y="2848356"/>
-            <a:ext cx="3307994" cy="839419"/>
+            <a:off x="7215293" y="4006901"/>
+            <a:ext cx="4244883" cy="564185"/>
           </a:xfrm>
           <a:prstGeom prst="rect">
             <a:avLst/>
@@ -1259,7 +1259,7 @@
           <a:p>
             <a:pPr algn="ctr"/>
             <a:r>
-              <a:rPr lang="ja-JP" sz="2000" b="1" spc="40" dirty="0">
+              <a:rPr lang="ja-JP" sz="1566" b="1" spc="40" dirty="0">
                 <a:solidFill>
                   <a:srgbClr val="8A2BE2"/>
                 </a:solidFill>
@@ -1280,8 +1280,8 @@
         </p:nvSpPr>
         <p:spPr>
           <a:xfrm>
-            <a:off x="8170469" y="4114800"/>
-            <a:ext cx="3307994" cy="292608"/>
+            <a:off x="7215293" y="4828032"/>
+            <a:ext cx="4244883" cy="256032"/>
           </a:xfrm>
           <a:prstGeom prst="rect">
             <a:avLst/>
@@ -1297,7 +1297,7 @@
           <a:p>
             <a:pPr algn="ctr"/>
             <a:r>
-              <a:rPr lang="ja-JP" sz="950" dirty="0">
+              <a:rPr lang="ja-JP" sz="658" dirty="0">
                 <a:solidFill>
                   <a:srgbClr val="1A1A1A"/>
                 </a:solidFill>
@@ -1318,8 +1318,8 @@
         </p:nvSpPr>
         <p:spPr>
           <a:xfrm>
-            <a:off x="585216" y="4828032"/>
-            <a:ext cx="146304" cy="146304"/>
+            <a:off x="585216" y="5349240"/>
+            <a:ext cx="182880" cy="182880"/>
           </a:xfrm>
           <a:prstGeom prst="rect">
             <a:avLst/>
@@ -1345,8 +1345,8 @@
         </p:nvSpPr>
         <p:spPr>
           <a:xfrm>
-            <a:off x="804672" y="4782312"/>
-            <a:ext cx="10801807" cy="256032"/>
+            <a:off x="877824" y="5248656"/>
+            <a:ext cx="10728655" cy="365760"/>
           </a:xfrm>
           <a:prstGeom prst="rect">
             <a:avLst/>
@@ -1362,7 +1362,7 @@
           <a:p>
             <a:pPr algn="l"/>
             <a:r>
-              <a:rPr lang="ja-JP" sz="1100" b="1" spc="30" dirty="0">
+              <a:rPr lang="ja-JP" sz="1000" b="1" spc="40" dirty="0">
                 <a:solidFill>
                   <a:srgbClr val="8A2BE2"/>
                 </a:solidFill>
@@ -1370,10 +1370,10 @@
                 <a:ea typeface="Montserrat"/>
                 <a:cs typeface="Montserrat"/>
               </a:rPr>
-              <a:t>VALUE POINT  </a:t>
-            </a:r>
-            <a:r>
-              <a:rPr lang="ja-JP" sz="1300" b="1" dirty="0">
+              <a:t>VALUE POINT   </a:t>
+            </a:r>
+            <a:r>
+              <a:rPr lang="ja-JP" sz="1650" b="1" dirty="0">
                 <a:solidFill>
                   <a:srgbClr val="1A1A1A"/>
                 </a:solidFill>
@@ -1394,8 +1394,8 @@
         </p:nvSpPr>
         <p:spPr>
           <a:xfrm>
-            <a:off x="585216" y="5138928"/>
-            <a:ext cx="3142272" cy="420624"/>
+            <a:off x="585216" y="5614416"/>
+            <a:ext cx="2811634" cy="457200"/>
           </a:xfrm>
           <a:prstGeom prst="roundRect">
             <a:avLst>
@@ -1426,8 +1426,8 @@
         </p:nvSpPr>
         <p:spPr>
           <a:xfrm>
-            <a:off x="585216" y="5138928"/>
-            <a:ext cx="3142272" cy="420624"/>
+            <a:off x="585216" y="5614416"/>
+            <a:ext cx="2811634" cy="457200"/>
           </a:xfrm>
           <a:prstGeom prst="rect">
             <a:avLst/>
@@ -1464,7 +1464,7 @@
         </p:nvCxnSpPr>
         <p:spPr>
           <a:xfrm>
-            <a:off x="3800640" y="5349240"/>
+            <a:off x="3470002" y="5843016"/>
             <a:ext cx="384048" cy="914"/>
           </a:xfrm>
           <a:prstGeom prst="line">
@@ -1487,8 +1487,8 @@
         </p:nvSpPr>
         <p:spPr>
           <a:xfrm>
-            <a:off x="4276128" y="5138928"/>
-            <a:ext cx="3142272" cy="420624"/>
+            <a:off x="3945490" y="5614416"/>
+            <a:ext cx="2811634" cy="457200"/>
           </a:xfrm>
           <a:prstGeom prst="roundRect">
             <a:avLst>
@@ -1516,8 +1516,8 @@
         </p:nvSpPr>
         <p:spPr>
           <a:xfrm>
-            <a:off x="4276128" y="5138928"/>
-            <a:ext cx="3142272" cy="420624"/>
+            <a:off x="3945490" y="5614416"/>
+            <a:ext cx="2811634" cy="457200"/>
           </a:xfrm>
           <a:prstGeom prst="rect">
             <a:avLst/>
@@ -1554,19 +1554,19 @@
         </p:nvSpPr>
         <p:spPr>
           <a:xfrm>
-            <a:off x="8079675" y="5111496"/>
-            <a:ext cx="3526804" cy="548640"/>
-          </a:xfrm>
-          <a:prstGeom prst="rect">
-            <a:avLst/>
-          </a:prstGeom>
-          <a:noFill/>
-          <a:ln>
-            <a:noFill/>
-          </a:ln>
-        </p:spPr>
-        <p:txBody>
-          <a:bodyPr wrap="square" anchor="t" lIns="45720" rIns="45720" tIns="27432" bIns="27432"/>
+            <a:off x="7031443" y="5632704"/>
+            <a:ext cx="4575036" cy="457200"/>
+          </a:xfrm>
+          <a:prstGeom prst="rect">
+            <a:avLst/>
+          </a:prstGeom>
+          <a:noFill/>
+          <a:ln>
+            <a:noFill/>
+          </a:ln>
+        </p:spPr>
+        <p:txBody>
+          <a:bodyPr wrap="square" anchor="ctr" lIns="45720" rIns="45720" tIns="27432" bIns="27432"/>
           <a:lstStyle/>
           <a:p>
             <a:pPr algn="l">
@@ -1575,7 +1575,7 @@
               </a:lnSpc>
             </a:pPr>
             <a:r>
-              <a:rPr lang="ja-JP" sz="1000" dirty="0">
+              <a:rPr lang="ja-JP" sz="1050" dirty="0">
                 <a:solidFill>
                   <a:srgbClr val="1A1A1A"/>
                 </a:solidFill>
@@ -1786,7 +1786,7 @@
         <p:spPr>
           <a:xfrm>
             <a:off x="969264" y="365760"/>
-            <a:ext cx="7315200" cy="310896"/>
+            <a:ext cx="8229600" cy="310896"/>
           </a:xfrm>
           <a:prstGeom prst="rect">
             <a:avLst/>
@@ -1802,7 +1802,7 @@
           <a:p>
             <a:pPr algn="l"/>
             <a:r>
-              <a:rPr lang="ja-JP" sz="1250" b="1" spc="60" dirty="0">
+              <a:rPr lang="ja-JP" sz="1200" b="1" spc="60" dirty="0">
                 <a:solidFill>
                   <a:srgbClr val="8A2BE2"/>
                 </a:solidFill>
@@ -1813,7 +1813,7 @@
               <a:t>TIKTOK CASE 03  </a:t>
             </a:r>
             <a:r>
-              <a:rPr lang="ja-JP" sz="1100" b="1" spc="20" dirty="0">
+              <a:rPr lang="ja-JP" sz="1050" b="1" spc="20" dirty="0">
                 <a:solidFill>
                   <a:srgbClr val="1A1A1A"/>
                 </a:solidFill>
@@ -1834,8 +1834,8 @@
         </p:nvSpPr>
         <p:spPr>
           <a:xfrm>
-            <a:off x="585216" y="822960"/>
-            <a:ext cx="8229600" cy="457200"/>
+            <a:off x="585216" y="777240"/>
+            <a:ext cx="8229600" cy="502920"/>
           </a:xfrm>
           <a:prstGeom prst="rect">
             <a:avLst/>
@@ -1855,7 +1855,7 @@
               </a:lnSpc>
             </a:pPr>
             <a:r>
-              <a:rPr lang="ja-JP" sz="2200" b="1" dirty="0">
+              <a:rPr lang="ja-JP" sz="3300" b="1" dirty="0">
                 <a:solidFill>
                   <a:srgbClr val="1A1A1A"/>
                 </a:solidFill>
@@ -1876,8 +1876,8 @@
         </p:nvSpPr>
         <p:spPr>
           <a:xfrm>
-            <a:off x="585216" y="1600200"/>
-            <a:ext cx="146304" cy="146304"/>
+            <a:off x="585216" y="1627632"/>
+            <a:ext cx="182880" cy="182880"/>
           </a:xfrm>
           <a:prstGeom prst="rect">
             <a:avLst/>
@@ -1903,8 +1903,8 @@
         </p:nvSpPr>
         <p:spPr>
           <a:xfrm>
-            <a:off x="804672" y="1554480"/>
-            <a:ext cx="10801807" cy="256032"/>
+            <a:off x="877824" y="1527048"/>
+            <a:ext cx="10728655" cy="365760"/>
           </a:xfrm>
           <a:prstGeom prst="rect">
             <a:avLst/>
@@ -1920,7 +1920,7 @@
           <a:p>
             <a:pPr algn="l"/>
             <a:r>
-              <a:rPr lang="ja-JP" sz="1100" b="1" spc="30" dirty="0">
+              <a:rPr lang="ja-JP" sz="1000" b="1" spc="40" dirty="0">
                 <a:solidFill>
                   <a:srgbClr val="8A2BE2"/>
                 </a:solidFill>
@@ -1928,10 +1928,10 @@
                 <a:ea typeface="Montserrat"/>
                 <a:cs typeface="Montserrat"/>
               </a:rPr>
-              <a:t>STRUCTURE  </a:t>
-            </a:r>
-            <a:r>
-              <a:rPr lang="ja-JP" sz="1300" b="1" dirty="0">
+              <a:t>STRUCTURE   </a:t>
+            </a:r>
+            <a:r>
+              <a:rPr lang="ja-JP" sz="1650" b="1" dirty="0">
                 <a:solidFill>
                   <a:srgbClr val="1A1A1A"/>
                 </a:solidFill>
@@ -2262,8 +2262,8 @@
         </p:nvSpPr>
         <p:spPr>
           <a:xfrm>
-            <a:off x="585216" y="3246120"/>
-            <a:ext cx="146304" cy="146304"/>
+            <a:off x="585216" y="3273552"/>
+            <a:ext cx="182880" cy="182880"/>
           </a:xfrm>
           <a:prstGeom prst="rect">
             <a:avLst/>
@@ -2289,8 +2289,8 @@
         </p:nvSpPr>
         <p:spPr>
           <a:xfrm>
-            <a:off x="804672" y="3200400"/>
-            <a:ext cx="10801807" cy="256032"/>
+            <a:off x="877824" y="3172968"/>
+            <a:ext cx="10728655" cy="365760"/>
           </a:xfrm>
           <a:prstGeom prst="rect">
             <a:avLst/>
@@ -2306,7 +2306,7 @@
           <a:p>
             <a:pPr algn="l"/>
             <a:r>
-              <a:rPr lang="ja-JP" sz="1100" b="1" spc="30" dirty="0">
+              <a:rPr lang="ja-JP" sz="1000" b="1" spc="40" dirty="0">
                 <a:solidFill>
                   <a:srgbClr val="8A2BE2"/>
                 </a:solidFill>
@@ -2314,10 +2314,10 @@
                 <a:ea typeface="Montserrat"/>
                 <a:cs typeface="Montserrat"/>
               </a:rPr>
-              <a:t>EXAMPLES  </a:t>
-            </a:r>
-            <a:r>
-              <a:rPr lang="ja-JP" sz="1300" b="1" dirty="0">
+              <a:t>EXAMPLES   </a:t>
+            </a:r>
+            <a:r>
+              <a:rPr lang="ja-JP" sz="1650" b="1" dirty="0">
                 <a:solidFill>
                   <a:srgbClr val="1A1A1A"/>
                 </a:solidFill>
@@ -2644,8 +2644,8 @@
         </p:nvCxnSpPr>
         <p:spPr>
           <a:xfrm>
-            <a:off x="8207691" y="5815584"/>
-            <a:ext cx="3270772" cy="914"/>
+            <a:off x="8225979" y="5907024"/>
+            <a:ext cx="3234196" cy="914"/>
           </a:xfrm>
           <a:prstGeom prst="line">
             <a:avLst/>
@@ -2667,8 +2667,8 @@
         </p:nvSpPr>
         <p:spPr>
           <a:xfrm>
-            <a:off x="8207691" y="4361688"/>
-            <a:ext cx="3270772" cy="954634"/>
+            <a:off x="8225979" y="4361688"/>
+            <a:ext cx="3234196" cy="1147572"/>
           </a:xfrm>
           <a:prstGeom prst="rect">
             <a:avLst/>
@@ -2705,8 +2705,8 @@
         </p:nvSpPr>
         <p:spPr>
           <a:xfrm>
-            <a:off x="8207691" y="5852160"/>
-            <a:ext cx="3270772" cy="292608"/>
+            <a:off x="8225979" y="5925312"/>
+            <a:ext cx="3234196" cy="256032"/>
           </a:xfrm>
           <a:prstGeom prst="rect">
             <a:avLst/>
@@ -2722,7 +2722,7 @@
           <a:p>
             <a:pPr algn="ctr"/>
             <a:r>
-              <a:rPr lang="ja-JP" sz="950" dirty="0">
+              <a:rPr lang="ja-JP" sz="840" dirty="0">
                 <a:solidFill>
                   <a:srgbClr val="1A1A1A"/>
                 </a:solidFill>
@@ -2933,7 +2933,7 @@
         <p:spPr>
           <a:xfrm>
             <a:off x="969264" y="365760"/>
-            <a:ext cx="7315200" cy="310896"/>
+            <a:ext cx="8229600" cy="310896"/>
           </a:xfrm>
           <a:prstGeom prst="rect">
             <a:avLst/>
@@ -2949,7 +2949,7 @@
           <a:p>
             <a:pPr algn="l"/>
             <a:r>
-              <a:rPr lang="ja-JP" sz="1250" b="1" spc="60" dirty="0">
+              <a:rPr lang="ja-JP" sz="1200" b="1" spc="60" dirty="0">
                 <a:solidFill>
                   <a:srgbClr val="FF3D8A"/>
                 </a:solidFill>
@@ -2960,7 +2960,7 @@
               <a:t>INSTAGRAM  </a:t>
             </a:r>
             <a:r>
-              <a:rPr lang="ja-JP" sz="1100" b="1" spc="20" dirty="0">
+              <a:rPr lang="ja-JP" sz="1050" b="1" spc="20" dirty="0">
                 <a:solidFill>
                   <a:srgbClr val="1A1A1A"/>
                 </a:solidFill>
@@ -3002,7 +3002,7 @@
               </a:lnSpc>
             </a:pPr>
             <a:r>
-              <a:rPr lang="ja-JP" sz="3000" b="1" dirty="0">
+              <a:rPr lang="ja-JP" sz="3300" b="1" dirty="0">
                 <a:solidFill>
                   <a:srgbClr val="1A1A1A"/>
                 </a:solidFill>
@@ -3224,8 +3224,8 @@
         </p:nvSpPr>
         <p:spPr>
           <a:xfrm>
-            <a:off x="585216" y="2514600"/>
-            <a:ext cx="146304" cy="146304"/>
+            <a:off x="585216" y="2542032"/>
+            <a:ext cx="182880" cy="182880"/>
           </a:xfrm>
           <a:prstGeom prst="rect">
             <a:avLst/>
@@ -3251,8 +3251,8 @@
         </p:nvSpPr>
         <p:spPr>
           <a:xfrm>
-            <a:off x="804672" y="2468880"/>
-            <a:ext cx="5541264" cy="256032"/>
+            <a:off x="877824" y="2441448"/>
+            <a:ext cx="5468112" cy="365760"/>
           </a:xfrm>
           <a:prstGeom prst="rect">
             <a:avLst/>
@@ -3268,7 +3268,7 @@
           <a:p>
             <a:pPr algn="l"/>
             <a:r>
-              <a:rPr lang="ja-JP" sz="1100" b="1" spc="30" dirty="0">
+              <a:rPr lang="ja-JP" sz="1000" b="1" spc="40" dirty="0">
                 <a:solidFill>
                   <a:srgbClr val="FF3D8A"/>
                 </a:solidFill>
@@ -3276,10 +3276,10 @@
                 <a:ea typeface="Montserrat"/>
                 <a:cs typeface="Montserrat"/>
               </a:rPr>
-              <a:t>CAST  </a:t>
-            </a:r>
-            <a:r>
-              <a:rPr lang="ja-JP" sz="1300" b="1" dirty="0">
+              <a:t>CAST   </a:t>
+            </a:r>
+            <a:r>
+              <a:rPr lang="ja-JP" sz="1650" b="1" dirty="0">
                 <a:solidFill>
                   <a:srgbClr val="1A1A1A"/>
                 </a:solidFill>
@@ -3650,8 +3650,8 @@
         </p:nvSpPr>
         <p:spPr>
           <a:xfrm>
-            <a:off x="585216" y="3520440"/>
-            <a:ext cx="146304" cy="146304"/>
+            <a:off x="585216" y="3547872"/>
+            <a:ext cx="182880" cy="182880"/>
           </a:xfrm>
           <a:prstGeom prst="rect">
             <a:avLst/>
@@ -3677,8 +3677,8 @@
         </p:nvSpPr>
         <p:spPr>
           <a:xfrm>
-            <a:off x="804672" y="3474720"/>
-            <a:ext cx="5541264" cy="256032"/>
+            <a:off x="877824" y="3447288"/>
+            <a:ext cx="5468112" cy="365760"/>
           </a:xfrm>
           <a:prstGeom prst="rect">
             <a:avLst/>
@@ -3694,7 +3694,7 @@
           <a:p>
             <a:pPr algn="l"/>
             <a:r>
-              <a:rPr lang="ja-JP" sz="1100" b="1" spc="30" dirty="0">
+              <a:rPr lang="ja-JP" sz="1000" b="1" spc="40" dirty="0">
                 <a:solidFill>
                   <a:srgbClr val="FF3D8A"/>
                 </a:solidFill>
@@ -3702,10 +3702,10 @@
                 <a:ea typeface="Montserrat"/>
                 <a:cs typeface="Montserrat"/>
               </a:rPr>
-              <a:t>CONCEPT  </a:t>
-            </a:r>
-            <a:r>
-              <a:rPr lang="ja-JP" sz="1300" b="1" dirty="0">
+              <a:t>CONCEPT   </a:t>
+            </a:r>
+            <a:r>
+              <a:rPr lang="ja-JP" sz="1650" b="1" dirty="0">
                 <a:solidFill>
                   <a:srgbClr val="1A1A1A"/>
                 </a:solidFill>
@@ -3884,7 +3884,7 @@
         <p:spPr>
           <a:xfrm>
             <a:off x="8363560" y="868680"/>
-            <a:ext cx="1554480" cy="3200400"/>
+            <a:ext cx="1554480" cy="3063240"/>
           </a:xfrm>
           <a:prstGeom prst="roundRect">
             <a:avLst>
@@ -3916,7 +3916,7 @@
         <p:spPr>
           <a:xfrm>
             <a:off x="8432140" y="985266"/>
-            <a:ext cx="1417320" cy="2994660"/>
+            <a:ext cx="1417320" cy="2857500"/>
           </a:xfrm>
           <a:prstGeom prst="rect">
             <a:avLst/>
@@ -3971,7 +3971,7 @@
         </p:nvSpPr>
         <p:spPr>
           <a:xfrm>
-            <a:off x="8994496" y="3993642"/>
+            <a:off x="8994496" y="3856482"/>
             <a:ext cx="292608" cy="27432"/>
           </a:xfrm>
           <a:prstGeom prst="roundRect">
@@ -4066,7 +4066,7 @@
         <p:spPr>
           <a:xfrm>
             <a:off x="8487004" y="1131570"/>
-            <a:ext cx="1307592" cy="2848356"/>
+            <a:ext cx="1307592" cy="2711196"/>
           </a:xfrm>
           <a:prstGeom prst="rect">
             <a:avLst/>
@@ -4103,7 +4103,7 @@
         </p:nvSpPr>
         <p:spPr>
           <a:xfrm>
-            <a:off x="8363560" y="4114800"/>
+            <a:off x="8363560" y="3977640"/>
             <a:ext cx="1554480" cy="237744"/>
           </a:xfrm>
           <a:prstGeom prst="rect">
@@ -4141,8 +4141,8 @@
         </p:nvSpPr>
         <p:spPr>
           <a:xfrm>
-            <a:off x="6675120" y="4526280"/>
-            <a:ext cx="2383384" cy="1417320"/>
+            <a:off x="6675120" y="4434840"/>
+            <a:ext cx="2374240" cy="1691640"/>
           </a:xfrm>
           <a:prstGeom prst="rect">
             <a:avLst/>
@@ -4171,8 +4171,8 @@
         </p:nvCxnSpPr>
         <p:spPr>
           <a:xfrm>
-            <a:off x="6803136" y="5541264"/>
-            <a:ext cx="2127352" cy="914"/>
+            <a:off x="6821424" y="5815584"/>
+            <a:ext cx="2081632" cy="914"/>
           </a:xfrm>
           <a:prstGeom prst="line">
             <a:avLst/>
@@ -4194,8 +4194,8 @@
         </p:nvSpPr>
         <p:spPr>
           <a:xfrm>
-            <a:off x="6803136" y="4951476"/>
-            <a:ext cx="2127352" cy="510235"/>
+            <a:off x="6821424" y="4942332"/>
+            <a:ext cx="2081632" cy="619506"/>
           </a:xfrm>
           <a:prstGeom prst="rect">
             <a:avLst/>
@@ -4211,7 +4211,7 @@
           <a:p>
             <a:pPr algn="ctr"/>
             <a:r>
-              <a:rPr lang="ja-JP" sz="1395" b="1" spc="40" dirty="0">
+              <a:rPr lang="ja-JP" sz="1388" b="1" spc="40" dirty="0">
                 <a:solidFill>
                   <a:srgbClr val="FF3D8A"/>
                 </a:solidFill>
@@ -4232,8 +4232,8 @@
         </p:nvSpPr>
         <p:spPr>
           <a:xfrm>
-            <a:off x="6803136" y="5577840"/>
-            <a:ext cx="2127352" cy="292608"/>
+            <a:off x="6821424" y="5833872"/>
+            <a:ext cx="2081632" cy="256032"/>
           </a:xfrm>
           <a:prstGeom prst="rect">
             <a:avLst/>
@@ -4249,7 +4249,7 @@
           <a:p>
             <a:pPr algn="ctr"/>
             <a:r>
-              <a:rPr lang="ja-JP" sz="950" dirty="0">
+              <a:rPr lang="ja-JP" sz="583" dirty="0">
                 <a:solidFill>
                   <a:srgbClr val="1A1A1A"/>
                 </a:solidFill>
@@ -4270,8 +4270,8 @@
         </p:nvSpPr>
         <p:spPr>
           <a:xfrm>
-            <a:off x="9223096" y="4526280"/>
-            <a:ext cx="2383384" cy="1417320"/>
+            <a:off x="9232240" y="4434840"/>
+            <a:ext cx="2374240" cy="1691640"/>
           </a:xfrm>
           <a:prstGeom prst="rect">
             <a:avLst/>
@@ -4300,8 +4300,8 @@
         </p:nvCxnSpPr>
         <p:spPr>
           <a:xfrm>
-            <a:off x="9351112" y="5541264"/>
-            <a:ext cx="2127352" cy="914"/>
+            <a:off x="9378544" y="5815584"/>
+            <a:ext cx="2081632" cy="914"/>
           </a:xfrm>
           <a:prstGeom prst="line">
             <a:avLst/>
@@ -4323,8 +4323,8 @@
         </p:nvSpPr>
         <p:spPr>
           <a:xfrm>
-            <a:off x="9351112" y="4951476"/>
-            <a:ext cx="2127352" cy="510235"/>
+            <a:off x="9378544" y="4942332"/>
+            <a:ext cx="2081632" cy="619506"/>
           </a:xfrm>
           <a:prstGeom prst="rect">
             <a:avLst/>
@@ -4340,7 +4340,7 @@
           <a:p>
             <a:pPr algn="ctr"/>
             <a:r>
-              <a:rPr lang="ja-JP" sz="1395" b="1" spc="40" dirty="0">
+              <a:rPr lang="ja-JP" sz="1388" b="1" spc="40" dirty="0">
                 <a:solidFill>
                   <a:srgbClr val="FF3D8A"/>
                 </a:solidFill>
@@ -4361,8 +4361,8 @@
         </p:nvSpPr>
         <p:spPr>
           <a:xfrm>
-            <a:off x="9351112" y="5577840"/>
-            <a:ext cx="2127352" cy="292608"/>
+            <a:off x="9378544" y="5833872"/>
+            <a:ext cx="2081632" cy="256032"/>
           </a:xfrm>
           <a:prstGeom prst="rect">
             <a:avLst/>
@@ -4378,7 +4378,7 @@
           <a:p>
             <a:pPr algn="ctr"/>
             <a:r>
-              <a:rPr lang="ja-JP" sz="950" dirty="0">
+              <a:rPr lang="ja-JP" sz="583" dirty="0">
                 <a:solidFill>
                   <a:srgbClr val="1A1A1A"/>
                 </a:solidFill>
@@ -4589,7 +4589,7 @@
         <p:spPr>
           <a:xfrm>
             <a:off x="969264" y="365760"/>
-            <a:ext cx="7315200" cy="310896"/>
+            <a:ext cx="8229600" cy="310896"/>
           </a:xfrm>
           <a:prstGeom prst="rect">
             <a:avLst/>
@@ -4605,7 +4605,7 @@
           <a:p>
             <a:pPr algn="l"/>
             <a:r>
-              <a:rPr lang="ja-JP" sz="1250" b="1" spc="60" dirty="0">
+              <a:rPr lang="ja-JP" sz="1200" b="1" spc="60" dirty="0">
                 <a:solidFill>
                   <a:srgbClr val="FF3D8A"/>
                 </a:solidFill>
@@ -4616,7 +4616,7 @@
               <a:t>INSTAGRAM  </a:t>
             </a:r>
             <a:r>
-              <a:rPr lang="ja-JP" sz="1100" b="1" spc="20" dirty="0">
+              <a:rPr lang="ja-JP" sz="1050" b="1" spc="20" dirty="0">
                 <a:solidFill>
                   <a:srgbClr val="1A1A1A"/>
                 </a:solidFill>
@@ -4637,8 +4637,8 @@
         </p:nvSpPr>
         <p:spPr>
           <a:xfrm>
-            <a:off x="585216" y="896112"/>
-            <a:ext cx="146304" cy="146304"/>
+            <a:off x="585216" y="868680"/>
+            <a:ext cx="182880" cy="182880"/>
           </a:xfrm>
           <a:prstGeom prst="rect">
             <a:avLst/>
@@ -4664,8 +4664,8 @@
         </p:nvSpPr>
         <p:spPr>
           <a:xfrm>
-            <a:off x="804672" y="850392"/>
-            <a:ext cx="10801807" cy="256032"/>
+            <a:off x="877824" y="768096"/>
+            <a:ext cx="10728655" cy="365760"/>
           </a:xfrm>
           <a:prstGeom prst="rect">
             <a:avLst/>
@@ -4681,7 +4681,7 @@
           <a:p>
             <a:pPr algn="l"/>
             <a:r>
-              <a:rPr lang="ja-JP" sz="1100" b="1" spc="30" dirty="0">
+              <a:rPr lang="ja-JP" sz="1000" b="1" spc="40" dirty="0">
                 <a:solidFill>
                   <a:srgbClr val="FF3D8A"/>
                 </a:solidFill>
@@ -4689,10 +4689,10 @@
                 <a:ea typeface="Montserrat"/>
                 <a:cs typeface="Montserrat"/>
               </a:rPr>
-              <a:t>WORLDVIEW  </a:t>
-            </a:r>
-            <a:r>
-              <a:rPr lang="ja-JP" sz="1300" b="1" dirty="0">
+              <a:t>WORLDVIEW   </a:t>
+            </a:r>
+            <a:r>
+              <a:rPr lang="ja-JP" sz="1650" b="1" dirty="0">
                 <a:solidFill>
                   <a:srgbClr val="1A1A1A"/>
                 </a:solidFill>
@@ -4713,8 +4713,8 @@
         </p:nvSpPr>
         <p:spPr>
           <a:xfrm>
-            <a:off x="585216" y="1188720"/>
-            <a:ext cx="11021263" cy="548640"/>
+            <a:off x="585216" y="1133856"/>
+            <a:ext cx="11021263" cy="365760"/>
           </a:xfrm>
           <a:prstGeom prst="rect">
             <a:avLst/>
@@ -4734,7 +4734,7 @@
               </a:lnSpc>
             </a:pPr>
             <a:r>
-              <a:rPr lang="ja-JP" sz="1150" dirty="0">
+              <a:rPr lang="ja-JP" sz="1250" dirty="0">
                 <a:solidFill>
                   <a:srgbClr val="1A1A1A"/>
                 </a:solidFill>
@@ -4755,8 +4755,8 @@
         </p:nvSpPr>
         <p:spPr>
           <a:xfrm>
-            <a:off x="585216" y="1828800"/>
-            <a:ext cx="3003658" cy="3017520"/>
+            <a:off x="585216" y="1627632"/>
+            <a:ext cx="3104726" cy="3520440"/>
           </a:xfrm>
           <a:prstGeom prst="rect">
             <a:avLst/>
@@ -4785,8 +4785,8 @@
         </p:nvCxnSpPr>
         <p:spPr>
           <a:xfrm>
-            <a:off x="713232" y="4443984"/>
-            <a:ext cx="2747626" cy="914"/>
+            <a:off x="731520" y="4794909"/>
+            <a:ext cx="2812118" cy="914"/>
           </a:xfrm>
           <a:prstGeom prst="line">
             <a:avLst/>
@@ -4808,8 +4808,8 @@
         </p:nvSpPr>
         <p:spPr>
           <a:xfrm>
-            <a:off x="713232" y="2734056"/>
-            <a:ext cx="2747626" cy="1086307"/>
+            <a:off x="731520" y="2683764"/>
+            <a:ext cx="2812118" cy="1583079"/>
           </a:xfrm>
           <a:prstGeom prst="rect">
             <a:avLst/>
@@ -4825,7 +4825,7 @@
           <a:p>
             <a:pPr algn="ctr"/>
             <a:r>
-              <a:rPr lang="ja-JP" sz="2000" b="1" spc="40" dirty="0">
+              <a:rPr lang="ja-JP" sz="2547" b="1" spc="40" dirty="0">
                 <a:solidFill>
                   <a:srgbClr val="FF3D8A"/>
                 </a:solidFill>
@@ -4846,8 +4846,8 @@
         </p:nvSpPr>
         <p:spPr>
           <a:xfrm>
-            <a:off x="713232" y="4480560"/>
-            <a:ext cx="2747626" cy="292608"/>
+            <a:off x="731520" y="4813197"/>
+            <a:ext cx="2812118" cy="298299"/>
           </a:xfrm>
           <a:prstGeom prst="rect">
             <a:avLst/>
@@ -4863,7 +4863,7 @@
           <a:p>
             <a:pPr algn="ctr"/>
             <a:r>
-              <a:rPr lang="ja-JP" sz="950" dirty="0">
+              <a:rPr lang="ja-JP" sz="1070" dirty="0">
                 <a:solidFill>
                   <a:srgbClr val="1A1A1A"/>
                 </a:solidFill>
@@ -4884,8 +4884,8 @@
         </p:nvSpPr>
         <p:spPr>
           <a:xfrm>
-            <a:off x="3753466" y="1828800"/>
-            <a:ext cx="3003658" cy="3017520"/>
+            <a:off x="3872822" y="1627632"/>
+            <a:ext cx="3104726" cy="3520440"/>
           </a:xfrm>
           <a:prstGeom prst="rect">
             <a:avLst/>
@@ -4914,8 +4914,8 @@
         </p:nvCxnSpPr>
         <p:spPr>
           <a:xfrm>
-            <a:off x="3881482" y="4443984"/>
-            <a:ext cx="2747626" cy="914"/>
+            <a:off x="4019126" y="4794909"/>
+            <a:ext cx="2812118" cy="914"/>
           </a:xfrm>
           <a:prstGeom prst="line">
             <a:avLst/>
@@ -4937,8 +4937,8 @@
         </p:nvSpPr>
         <p:spPr>
           <a:xfrm>
-            <a:off x="3881482" y="2734056"/>
-            <a:ext cx="2747626" cy="1086307"/>
+            <a:off x="4019126" y="2683764"/>
+            <a:ext cx="2812118" cy="1583079"/>
           </a:xfrm>
           <a:prstGeom prst="rect">
             <a:avLst/>
@@ -4954,7 +4954,7 @@
           <a:p>
             <a:pPr algn="ctr"/>
             <a:r>
-              <a:rPr lang="ja-JP" sz="2000" b="1" spc="40" dirty="0">
+              <a:rPr lang="ja-JP" sz="2547" b="1" spc="40" dirty="0">
                 <a:solidFill>
                   <a:srgbClr val="FF3D8A"/>
                 </a:solidFill>
@@ -4975,8 +4975,8 @@
         </p:nvSpPr>
         <p:spPr>
           <a:xfrm>
-            <a:off x="3881482" y="4480560"/>
-            <a:ext cx="2747626" cy="292608"/>
+            <a:off x="4019126" y="4813197"/>
+            <a:ext cx="2812118" cy="298299"/>
           </a:xfrm>
           <a:prstGeom prst="rect">
             <a:avLst/>
@@ -4992,7 +4992,7 @@
           <a:p>
             <a:pPr algn="ctr"/>
             <a:r>
-              <a:rPr lang="ja-JP" sz="950" dirty="0">
+              <a:rPr lang="ja-JP" sz="1070" dirty="0">
                 <a:solidFill>
                   <a:srgbClr val="1A1A1A"/>
                 </a:solidFill>
@@ -5013,8 +5013,8 @@
         </p:nvSpPr>
         <p:spPr>
           <a:xfrm>
-            <a:off x="7031443" y="1810512"/>
-            <a:ext cx="146304" cy="146304"/>
+            <a:off x="7270157" y="1655064"/>
+            <a:ext cx="182880" cy="182880"/>
           </a:xfrm>
           <a:prstGeom prst="rect">
             <a:avLst/>
@@ -5040,8 +5040,8 @@
         </p:nvSpPr>
         <p:spPr>
           <a:xfrm>
-            <a:off x="7250899" y="1764792"/>
-            <a:ext cx="4355580" cy="256032"/>
+            <a:off x="7562765" y="1554480"/>
+            <a:ext cx="4043715" cy="365760"/>
           </a:xfrm>
           <a:prstGeom prst="rect">
             <a:avLst/>
@@ -5057,7 +5057,7 @@
           <a:p>
             <a:pPr algn="l"/>
             <a:r>
-              <a:rPr lang="ja-JP" sz="1100" b="1" spc="30" dirty="0">
+              <a:rPr lang="ja-JP" sz="1000" b="1" spc="40" dirty="0">
                 <a:solidFill>
                   <a:srgbClr val="FF3D8A"/>
                 </a:solidFill>
@@ -5065,10 +5065,10 @@
                 <a:ea typeface="Montserrat"/>
                 <a:cs typeface="Montserrat"/>
               </a:rPr>
-              <a:t>VOICE  </a:t>
-            </a:r>
-            <a:r>
-              <a:rPr lang="ja-JP" sz="1300" b="1" dirty="0">
+              <a:t>VOICE   </a:t>
+            </a:r>
+            <a:r>
+              <a:rPr lang="ja-JP" sz="1650" b="1" dirty="0">
                 <a:solidFill>
                   <a:srgbClr val="1A1A1A"/>
                 </a:solidFill>
@@ -5089,8 +5089,8 @@
         </p:nvSpPr>
         <p:spPr>
           <a:xfrm>
-            <a:off x="7031443" y="2203704"/>
-            <a:ext cx="54864" cy="530352"/>
+            <a:off x="7270157" y="2029968"/>
+            <a:ext cx="54864" cy="640080"/>
           </a:xfrm>
           <a:prstGeom prst="rect">
             <a:avLst/>
@@ -5116,8 +5116,8 @@
         </p:nvSpPr>
         <p:spPr>
           <a:xfrm>
-            <a:off x="7214323" y="2148840"/>
-            <a:ext cx="4392156" cy="713232"/>
+            <a:off x="7453037" y="1975104"/>
+            <a:ext cx="4153443" cy="822960"/>
           </a:xfrm>
           <a:prstGeom prst="rect">
             <a:avLst/>
@@ -5158,8 +5158,8 @@
         </p:nvSpPr>
         <p:spPr>
           <a:xfrm>
-            <a:off x="7031443" y="2916936"/>
-            <a:ext cx="54864" cy="530352"/>
+            <a:off x="7270157" y="2852928"/>
+            <a:ext cx="54864" cy="640080"/>
           </a:xfrm>
           <a:prstGeom prst="rect">
             <a:avLst/>
@@ -5185,8 +5185,8 @@
         </p:nvSpPr>
         <p:spPr>
           <a:xfrm>
-            <a:off x="7214323" y="2862072"/>
-            <a:ext cx="4392156" cy="713232"/>
+            <a:off x="7453037" y="2798064"/>
+            <a:ext cx="4153443" cy="822960"/>
           </a:xfrm>
           <a:prstGeom prst="rect">
             <a:avLst/>
@@ -5227,8 +5227,8 @@
         </p:nvSpPr>
         <p:spPr>
           <a:xfrm>
-            <a:off x="7031443" y="3630168"/>
-            <a:ext cx="54864" cy="530352"/>
+            <a:off x="7270157" y="3675888"/>
+            <a:ext cx="54864" cy="640080"/>
           </a:xfrm>
           <a:prstGeom prst="rect">
             <a:avLst/>
@@ -5254,8 +5254,8 @@
         </p:nvSpPr>
         <p:spPr>
           <a:xfrm>
-            <a:off x="7214323" y="3575304"/>
-            <a:ext cx="4392156" cy="713232"/>
+            <a:off x="7453037" y="3621024"/>
+            <a:ext cx="4153443" cy="822960"/>
           </a:xfrm>
           <a:prstGeom prst="rect">
             <a:avLst/>
@@ -5296,8 +5296,8 @@
         </p:nvSpPr>
         <p:spPr>
           <a:xfrm>
-            <a:off x="7031443" y="4343400"/>
-            <a:ext cx="54864" cy="530352"/>
+            <a:off x="7270157" y="4498848"/>
+            <a:ext cx="54864" cy="640080"/>
           </a:xfrm>
           <a:prstGeom prst="rect">
             <a:avLst/>
@@ -5323,8 +5323,8 @@
         </p:nvSpPr>
         <p:spPr>
           <a:xfrm>
-            <a:off x="7214323" y="4288536"/>
-            <a:ext cx="4392156" cy="713232"/>
+            <a:off x="7453037" y="4443984"/>
+            <a:ext cx="4153443" cy="822960"/>
           </a:xfrm>
           <a:prstGeom prst="rect">
             <a:avLst/>
@@ -5365,8 +5365,8 @@
         </p:nvSpPr>
         <p:spPr>
           <a:xfrm>
-            <a:off x="585216" y="5074920"/>
-            <a:ext cx="146304" cy="146304"/>
+            <a:off x="585216" y="5422392"/>
+            <a:ext cx="182880" cy="182880"/>
           </a:xfrm>
           <a:prstGeom prst="rect">
             <a:avLst/>
@@ -5392,8 +5392,8 @@
         </p:nvSpPr>
         <p:spPr>
           <a:xfrm>
-            <a:off x="804672" y="5029200"/>
-            <a:ext cx="10801807" cy="256032"/>
+            <a:off x="877824" y="5321808"/>
+            <a:ext cx="10728655" cy="365760"/>
           </a:xfrm>
           <a:prstGeom prst="rect">
             <a:avLst/>
@@ -5409,7 +5409,7 @@
           <a:p>
             <a:pPr algn="l"/>
             <a:r>
-              <a:rPr lang="ja-JP" sz="1100" b="1" spc="30" dirty="0">
+              <a:rPr lang="ja-JP" sz="1000" b="1" spc="40" dirty="0">
                 <a:solidFill>
                   <a:srgbClr val="FF3D8A"/>
                 </a:solidFill>
@@ -5417,10 +5417,10 @@
                 <a:ea typeface="Montserrat"/>
                 <a:cs typeface="Montserrat"/>
               </a:rPr>
-              <a:t>VALUE POINT  </a:t>
-            </a:r>
-            <a:r>
-              <a:rPr lang="ja-JP" sz="1300" b="1" dirty="0">
+              <a:t>VALUE POINT   </a:t>
+            </a:r>
+            <a:r>
+              <a:rPr lang="ja-JP" sz="1650" b="1" dirty="0">
                 <a:solidFill>
                   <a:srgbClr val="1A1A1A"/>
                 </a:solidFill>
@@ -5441,8 +5441,8 @@
         </p:nvSpPr>
         <p:spPr>
           <a:xfrm>
-            <a:off x="585216" y="5394960"/>
-            <a:ext cx="11021263" cy="777240"/>
+            <a:off x="585216" y="5687568"/>
+            <a:ext cx="11021263" cy="621792"/>
           </a:xfrm>
           <a:prstGeom prst="rect">
             <a:avLst/>
@@ -5469,8 +5469,8 @@
         </p:nvSpPr>
         <p:spPr>
           <a:xfrm>
-            <a:off x="585216" y="5394960"/>
-            <a:ext cx="73152" cy="777240"/>
+            <a:off x="585216" y="5687568"/>
+            <a:ext cx="73152" cy="621792"/>
           </a:xfrm>
           <a:prstGeom prst="rect">
             <a:avLst/>
@@ -5496,8 +5496,8 @@
         </p:nvSpPr>
         <p:spPr>
           <a:xfrm>
-            <a:off x="859536" y="5394960"/>
-            <a:ext cx="10472623" cy="777240"/>
+            <a:off x="859536" y="5687568"/>
+            <a:ext cx="10472623" cy="621792"/>
           </a:xfrm>
           <a:prstGeom prst="rect">
             <a:avLst/>
@@ -5517,7 +5517,7 @@
               </a:lnSpc>
             </a:pPr>
             <a:r>
-              <a:rPr lang="ja-JP" sz="1400" b="1" dirty="0">
+              <a:rPr lang="ja-JP" sz="1500" b="1" dirty="0">
                 <a:solidFill>
                   <a:srgbClr val="1A1A1A"/>
                 </a:solidFill>
@@ -5728,7 +5728,7 @@
         <p:spPr>
           <a:xfrm>
             <a:off x="969264" y="365760"/>
-            <a:ext cx="7315200" cy="310896"/>
+            <a:ext cx="8229600" cy="310896"/>
           </a:xfrm>
           <a:prstGeom prst="rect">
             <a:avLst/>
@@ -5744,7 +5744,7 @@
           <a:p>
             <a:pPr algn="l"/>
             <a:r>
-              <a:rPr lang="ja-JP" sz="1250" b="1" spc="60" dirty="0">
+              <a:rPr lang="ja-JP" sz="1200" b="1" spc="60" dirty="0">
                 <a:solidFill>
                   <a:srgbClr val="FF3D8A"/>
                 </a:solidFill>
@@ -5755,7 +5755,7 @@
               <a:t>INSTAGRAM  </a:t>
             </a:r>
             <a:r>
-              <a:rPr lang="ja-JP" sz="1100" b="1" spc="20" dirty="0">
+              <a:rPr lang="ja-JP" sz="1050" b="1" spc="20" dirty="0">
                 <a:solidFill>
                   <a:srgbClr val="1A1A1A"/>
                 </a:solidFill>
@@ -5776,8 +5776,8 @@
         </p:nvSpPr>
         <p:spPr>
           <a:xfrm>
-            <a:off x="585216" y="822960"/>
-            <a:ext cx="8229600" cy="457200"/>
+            <a:off x="585216" y="731520"/>
+            <a:ext cx="10058400" cy="731520"/>
           </a:xfrm>
           <a:prstGeom prst="rect">
             <a:avLst/>
@@ -5797,7 +5797,7 @@
               </a:lnSpc>
             </a:pPr>
             <a:r>
-              <a:rPr lang="ja-JP" sz="2000" b="1" dirty="0">
+              <a:rPr lang="ja-JP" sz="3300" b="1" dirty="0">
                 <a:solidFill>
                   <a:srgbClr val="1A1A1A"/>
                 </a:solidFill>
@@ -6397,8 +6397,8 @@
         </p:nvSpPr>
         <p:spPr>
           <a:xfrm>
-            <a:off x="585216" y="3291840"/>
-            <a:ext cx="146304" cy="146304"/>
+            <a:off x="585216" y="3319272"/>
+            <a:ext cx="182880" cy="182880"/>
           </a:xfrm>
           <a:prstGeom prst="rect">
             <a:avLst/>
@@ -6424,8 +6424,8 @@
         </p:nvSpPr>
         <p:spPr>
           <a:xfrm>
-            <a:off x="804672" y="3246120"/>
-            <a:ext cx="10801807" cy="256032"/>
+            <a:off x="877824" y="3218688"/>
+            <a:ext cx="10728655" cy="365760"/>
           </a:xfrm>
           <a:prstGeom prst="rect">
             <a:avLst/>
@@ -6441,7 +6441,7 @@
           <a:p>
             <a:pPr algn="l"/>
             <a:r>
-              <a:rPr lang="ja-JP" sz="1100" b="1" spc="30" dirty="0">
+              <a:rPr lang="ja-JP" sz="1000" b="1" spc="40" dirty="0">
                 <a:solidFill>
                   <a:srgbClr val="FF3D8A"/>
                 </a:solidFill>
@@ -6449,10 +6449,10 @@
                 <a:ea typeface="Montserrat"/>
                 <a:cs typeface="Montserrat"/>
               </a:rPr>
-              <a:t>SERIES  </a:t>
-            </a:r>
-            <a:r>
-              <a:rPr lang="ja-JP" sz="1300" b="1" dirty="0">
+              <a:t>SERIES   </a:t>
+            </a:r>
+            <a:r>
+              <a:rPr lang="ja-JP" sz="1650" b="1" dirty="0">
                 <a:solidFill>
                   <a:srgbClr val="1A1A1A"/>
                 </a:solidFill>
@@ -6753,8 +6753,8 @@
         </p:nvSpPr>
         <p:spPr>
           <a:xfrm>
-            <a:off x="4373580" y="4343400"/>
-            <a:ext cx="843379" cy="1737360"/>
+            <a:off x="4073958" y="4160520"/>
+            <a:ext cx="1043126" cy="2148840"/>
           </a:xfrm>
           <a:prstGeom prst="roundRect">
             <a:avLst>
@@ -6785,8 +6785,8 @@
         </p:nvSpPr>
         <p:spPr>
           <a:xfrm>
-            <a:off x="4442160" y="4459986"/>
-            <a:ext cx="706219" cy="1531620"/>
+            <a:off x="4142538" y="4277106"/>
+            <a:ext cx="905966" cy="1943100"/>
           </a:xfrm>
           <a:prstGeom prst="rect">
             <a:avLst/>
@@ -6812,7 +6812,7 @@
         </p:nvSpPr>
         <p:spPr>
           <a:xfrm>
-            <a:off x="4639821" y="4381119"/>
+            <a:off x="4440073" y="4198239"/>
             <a:ext cx="310896" cy="41148"/>
           </a:xfrm>
           <a:prstGeom prst="roundRect">
@@ -6841,7 +6841,7 @@
         </p:nvSpPr>
         <p:spPr>
           <a:xfrm>
-            <a:off x="4648965" y="6005322"/>
+            <a:off x="4449217" y="6233922"/>
             <a:ext cx="292608" cy="27432"/>
           </a:xfrm>
           <a:prstGeom prst="roundRect">
@@ -6870,8 +6870,8 @@
         </p:nvSpPr>
         <p:spPr>
           <a:xfrm>
-            <a:off x="4442160" y="4459986"/>
-            <a:ext cx="706219" cy="146304"/>
+            <a:off x="4142538" y="4277106"/>
+            <a:ext cx="905966" cy="146304"/>
           </a:xfrm>
           <a:prstGeom prst="rect">
             <a:avLst/>
@@ -6897,8 +6897,8 @@
         </p:nvSpPr>
         <p:spPr>
           <a:xfrm>
-            <a:off x="4442160" y="4459986"/>
-            <a:ext cx="706219" cy="146304"/>
+            <a:off x="4142538" y="4277106"/>
+            <a:ext cx="905966" cy="146304"/>
           </a:xfrm>
           <a:prstGeom prst="rect">
             <a:avLst/>
@@ -6935,8 +6935,8 @@
         </p:nvSpPr>
         <p:spPr>
           <a:xfrm>
-            <a:off x="4497024" y="4606290"/>
-            <a:ext cx="596491" cy="1385316"/>
+            <a:off x="4197402" y="4423410"/>
+            <a:ext cx="796238" cy="1796796"/>
           </a:xfrm>
           <a:prstGeom prst="rect">
             <a:avLst/>
@@ -6952,7 +6952,7 @@
           <a:p>
             <a:pPr algn="ctr"/>
             <a:r>
-              <a:rPr lang="ja-JP" sz="618" b="1" spc="20" dirty="0">
+              <a:rPr lang="ja-JP" sz="793" b="1" spc="20" dirty="0">
                 <a:solidFill>
                   <a:srgbClr val="FF3D8A"/>
                 </a:solidFill>
@@ -6973,8 +6973,8 @@
         </p:nvSpPr>
         <p:spPr>
           <a:xfrm>
-            <a:off x="5674158" y="4343400"/>
-            <a:ext cx="843379" cy="1737360"/>
+            <a:off x="5574284" y="4160520"/>
+            <a:ext cx="1043126" cy="2148840"/>
           </a:xfrm>
           <a:prstGeom prst="roundRect">
             <a:avLst>
@@ -7005,8 +7005,8 @@
         </p:nvSpPr>
         <p:spPr>
           <a:xfrm>
-            <a:off x="5742738" y="4459986"/>
-            <a:ext cx="706219" cy="1531620"/>
+            <a:off x="5642864" y="4277106"/>
+            <a:ext cx="905966" cy="1943100"/>
           </a:xfrm>
           <a:prstGeom prst="rect">
             <a:avLst/>
@@ -7032,7 +7032,7 @@
         </p:nvSpPr>
         <p:spPr>
           <a:xfrm>
-            <a:off x="5940400" y="4381119"/>
+            <a:off x="5940400" y="4198239"/>
             <a:ext cx="310896" cy="41148"/>
           </a:xfrm>
           <a:prstGeom prst="roundRect">
@@ -7061,7 +7061,7 @@
         </p:nvSpPr>
         <p:spPr>
           <a:xfrm>
-            <a:off x="5949544" y="6005322"/>
+            <a:off x="5949544" y="6233922"/>
             <a:ext cx="292608" cy="27432"/>
           </a:xfrm>
           <a:prstGeom prst="roundRect">
@@ -7090,8 +7090,8 @@
         </p:nvSpPr>
         <p:spPr>
           <a:xfrm>
-            <a:off x="5742738" y="4459986"/>
-            <a:ext cx="706219" cy="146304"/>
+            <a:off x="5642864" y="4277106"/>
+            <a:ext cx="905966" cy="146304"/>
           </a:xfrm>
           <a:prstGeom prst="rect">
             <a:avLst/>
@@ -7117,8 +7117,8 @@
         </p:nvSpPr>
         <p:spPr>
           <a:xfrm>
-            <a:off x="5742738" y="4459986"/>
-            <a:ext cx="706219" cy="146304"/>
+            <a:off x="5642864" y="4277106"/>
+            <a:ext cx="905966" cy="146304"/>
           </a:xfrm>
           <a:prstGeom prst="rect">
             <a:avLst/>
@@ -7155,8 +7155,8 @@
         </p:nvSpPr>
         <p:spPr>
           <a:xfrm>
-            <a:off x="5797602" y="4606290"/>
-            <a:ext cx="596491" cy="1385316"/>
+            <a:off x="5697728" y="4423410"/>
+            <a:ext cx="796238" cy="1796796"/>
           </a:xfrm>
           <a:prstGeom prst="rect">
             <a:avLst/>
@@ -7172,7 +7172,7 @@
           <a:p>
             <a:pPr algn="ctr"/>
             <a:r>
-              <a:rPr lang="ja-JP" sz="618" b="1" spc="20" dirty="0">
+              <a:rPr lang="ja-JP" sz="793" b="1" spc="20" dirty="0">
                 <a:solidFill>
                   <a:srgbClr val="FF3D8A"/>
                 </a:solidFill>
@@ -7193,8 +7193,8 @@
         </p:nvSpPr>
         <p:spPr>
           <a:xfrm>
-            <a:off x="6974737" y="4343400"/>
-            <a:ext cx="843379" cy="1737360"/>
+            <a:off x="7074611" y="4160520"/>
+            <a:ext cx="1043126" cy="2148840"/>
           </a:xfrm>
           <a:prstGeom prst="roundRect">
             <a:avLst>
@@ -7225,8 +7225,8 @@
         </p:nvSpPr>
         <p:spPr>
           <a:xfrm>
-            <a:off x="7043317" y="4459986"/>
-            <a:ext cx="706219" cy="1531620"/>
+            <a:off x="7143191" y="4277106"/>
+            <a:ext cx="905966" cy="1943100"/>
           </a:xfrm>
           <a:prstGeom prst="rect">
             <a:avLst/>
@@ -7252,7 +7252,7 @@
         </p:nvSpPr>
         <p:spPr>
           <a:xfrm>
-            <a:off x="7240978" y="4381119"/>
+            <a:off x="7440726" y="4198239"/>
             <a:ext cx="310896" cy="41148"/>
           </a:xfrm>
           <a:prstGeom prst="roundRect">
@@ -7281,7 +7281,7 @@
         </p:nvSpPr>
         <p:spPr>
           <a:xfrm>
-            <a:off x="7250122" y="6005322"/>
+            <a:off x="7449870" y="6233922"/>
             <a:ext cx="292608" cy="27432"/>
           </a:xfrm>
           <a:prstGeom prst="roundRect">
@@ -7310,8 +7310,8 @@
         </p:nvSpPr>
         <p:spPr>
           <a:xfrm>
-            <a:off x="7043317" y="4459986"/>
-            <a:ext cx="706219" cy="146304"/>
+            <a:off x="7143191" y="4277106"/>
+            <a:ext cx="905966" cy="146304"/>
           </a:xfrm>
           <a:prstGeom prst="rect">
             <a:avLst/>
@@ -7337,8 +7337,8 @@
         </p:nvSpPr>
         <p:spPr>
           <a:xfrm>
-            <a:off x="7043317" y="4459986"/>
-            <a:ext cx="706219" cy="146304"/>
+            <a:off x="7143191" y="4277106"/>
+            <a:ext cx="905966" cy="146304"/>
           </a:xfrm>
           <a:prstGeom prst="rect">
             <a:avLst/>
@@ -7375,8 +7375,8 @@
         </p:nvSpPr>
         <p:spPr>
           <a:xfrm>
-            <a:off x="7098181" y="4606290"/>
-            <a:ext cx="596491" cy="1385316"/>
+            <a:off x="7198055" y="4423410"/>
+            <a:ext cx="796238" cy="1796796"/>
           </a:xfrm>
           <a:prstGeom prst="rect">
             <a:avLst/>
@@ -7392,7 +7392,7 @@
           <a:p>
             <a:pPr algn="ctr"/>
             <a:r>
-              <a:rPr lang="ja-JP" sz="618" b="1" spc="20" dirty="0">
+              <a:rPr lang="ja-JP" sz="793" b="1" spc="20" dirty="0">
                 <a:solidFill>
                   <a:srgbClr val="FF3D8A"/>
                 </a:solidFill>
@@ -7603,7 +7603,7 @@
         <p:spPr>
           <a:xfrm>
             <a:off x="969264" y="365760"/>
-            <a:ext cx="7315200" cy="310896"/>
+            <a:ext cx="8229600" cy="310896"/>
           </a:xfrm>
           <a:prstGeom prst="rect">
             <a:avLst/>
@@ -7619,7 +7619,7 @@
           <a:p>
             <a:pPr algn="l"/>
             <a:r>
-              <a:rPr lang="ja-JP" sz="1250" b="1" spc="60" dirty="0">
+              <a:rPr lang="ja-JP" sz="1200" b="1" spc="60" dirty="0">
                 <a:solidFill>
                   <a:srgbClr val="2A5CFF"/>
                 </a:solidFill>
@@ -7630,7 +7630,7 @@
               <a:t>YOUTUBE  </a:t>
             </a:r>
             <a:r>
-              <a:rPr lang="ja-JP" sz="1100" b="1" spc="20" dirty="0">
+              <a:rPr lang="ja-JP" sz="1050" b="1" spc="20" dirty="0">
                 <a:solidFill>
                   <a:srgbClr val="1A1A1A"/>
                 </a:solidFill>
@@ -7651,7 +7651,7 @@
         </p:nvSpPr>
         <p:spPr>
           <a:xfrm>
-            <a:off x="585216" y="822960"/>
+            <a:off x="585216" y="804672"/>
             <a:ext cx="6035040" cy="1371600"/>
           </a:xfrm>
           <a:prstGeom prst="rect">
@@ -7668,11 +7668,11 @@
           <a:p>
             <a:pPr algn="l">
               <a:lnSpc>
-                <a:spcPct val="122000"/>
+                <a:spcPct val="116000"/>
               </a:lnSpc>
             </a:pPr>
             <a:r>
-              <a:rPr lang="ja-JP" sz="2700" b="1" dirty="0">
+              <a:rPr lang="ja-JP" sz="3300" b="1" dirty="0">
                 <a:solidFill>
                   <a:srgbClr val="1A1A1A"/>
                 </a:solidFill>
@@ -7686,11 +7686,11 @@
           <a:p>
             <a:pPr algn="l">
               <a:lnSpc>
-                <a:spcPct val="122000"/>
+                <a:spcPct val="116000"/>
               </a:lnSpc>
             </a:pPr>
             <a:r>
-              <a:rPr lang="ja-JP" sz="2700" b="1" dirty="0">
+              <a:rPr lang="ja-JP" sz="3300" b="1" dirty="0">
                 <a:solidFill>
                   <a:srgbClr val="1A1A1A"/>
                 </a:solidFill>
@@ -7711,8 +7711,8 @@
         </p:nvSpPr>
         <p:spPr>
           <a:xfrm>
-            <a:off x="585216" y="2331720"/>
-            <a:ext cx="146304" cy="146304"/>
+            <a:off x="585216" y="1719072"/>
+            <a:ext cx="182880" cy="182880"/>
           </a:xfrm>
           <a:prstGeom prst="rect">
             <a:avLst/>
@@ -7738,8 +7738,8 @@
         </p:nvSpPr>
         <p:spPr>
           <a:xfrm>
-            <a:off x="804672" y="2286000"/>
-            <a:ext cx="5541264" cy="256032"/>
+            <a:off x="877824" y="1618488"/>
+            <a:ext cx="5468112" cy="365760"/>
           </a:xfrm>
           <a:prstGeom prst="rect">
             <a:avLst/>
@@ -7755,7 +7755,7 @@
           <a:p>
             <a:pPr algn="l"/>
             <a:r>
-              <a:rPr lang="ja-JP" sz="1100" b="1" spc="30" dirty="0">
+              <a:rPr lang="ja-JP" sz="1000" b="1" spc="40" dirty="0">
                 <a:solidFill>
                   <a:srgbClr val="2A5CFF"/>
                 </a:solidFill>
@@ -7763,10 +7763,10 @@
                 <a:ea typeface="Montserrat"/>
                 <a:cs typeface="Montserrat"/>
               </a:rPr>
-              <a:t>ACCOUNT DESIGN  </a:t>
-            </a:r>
-            <a:r>
-              <a:rPr lang="ja-JP" sz="1300" b="1" dirty="0">
+              <a:t>ACCOUNT DESIGN   </a:t>
+            </a:r>
+            <a:r>
+              <a:rPr lang="ja-JP" sz="1650" b="1" dirty="0">
                 <a:solidFill>
                   <a:srgbClr val="1A1A1A"/>
                 </a:solidFill>
@@ -7787,8 +7787,144 @@
         </p:nvSpPr>
         <p:spPr>
           <a:xfrm>
-            <a:off x="585216" y="2633472"/>
+            <a:off x="585216" y="2011680"/>
             <a:ext cx="5760720" cy="1005840"/>
+          </a:xfrm>
+          <a:prstGeom prst="rect">
+            <a:avLst/>
+          </a:prstGeom>
+          <a:noFill/>
+          <a:ln>
+            <a:noFill/>
+          </a:ln>
+        </p:spPr>
+        <p:txBody>
+          <a:bodyPr wrap="square" anchor="t" lIns="45720" rIns="45720" tIns="27432" bIns="27432"/>
+          <a:lstStyle/>
+          <a:p>
+            <a:pPr algn="l">
+              <a:lnSpc>
+                <a:spcPct val="155000"/>
+              </a:lnSpc>
+            </a:pPr>
+            <a:r>
+              <a:rPr lang="ja-JP" sz="1250" dirty="0">
+                <a:solidFill>
+                  <a:srgbClr val="1A1A1A"/>
+                </a:solidFill>
+                <a:latin typeface="Noto Sans JP"/>
+                <a:ea typeface="Noto Sans JP"/>
+                <a:cs typeface="Noto Sans JP"/>
+              </a:rPr>
+              <a:t>高校生が普段見られない「仕事・会社・働く人」を見せる。</a:t>
+            </a:r>
+          </a:p>
+          <a:p>
+            <a:pPr algn="l">
+              <a:lnSpc>
+                <a:spcPct val="155000"/>
+              </a:lnSpc>
+            </a:pPr>
+            <a:r>
+              <a:rPr lang="ja-JP" sz="1250" dirty="0">
+                <a:solidFill>
+                  <a:srgbClr val="1A1A1A"/>
+                </a:solidFill>
+                <a:latin typeface="Noto Sans JP"/>
+                <a:ea typeface="Noto Sans JP"/>
+                <a:cs typeface="Noto Sans JP"/>
+              </a:rPr>
+              <a:t>主役は採用担当者ではなく、若手社員と高校生、現場の人。</a:t>
+            </a:r>
+          </a:p>
+        </p:txBody>
+      </p:sp>
+      <p:sp>
+        <p:nvSpPr>
+          <p:cNvPr id="9" name="Subhead Mark"/>
+          <p:cNvSpPr/>
+          <p:nvPr/>
+        </p:nvSpPr>
+        <p:spPr>
+          <a:xfrm>
+            <a:off x="585216" y="3090672"/>
+            <a:ext cx="182880" cy="182880"/>
+          </a:xfrm>
+          <a:prstGeom prst="rect">
+            <a:avLst/>
+          </a:prstGeom>
+          <a:solidFill>
+            <a:srgbClr val="2A5CFF"/>
+          </a:solidFill>
+          <a:ln>
+            <a:noFill/>
+          </a:ln>
+        </p:spPr>
+        <p:txBody>
+          <a:bodyPr/>
+          <a:lstStyle/>
+          <a:p/>
+        </p:txBody>
+      </p:sp>
+      <p:sp>
+        <p:nvSpPr>
+          <p:cNvPr id="10" name="TextBox"/>
+          <p:cNvSpPr txBox="1"/>
+          <p:nvPr/>
+        </p:nvSpPr>
+        <p:spPr>
+          <a:xfrm>
+            <a:off x="877824" y="2990088"/>
+            <a:ext cx="5468112" cy="365760"/>
+          </a:xfrm>
+          <a:prstGeom prst="rect">
+            <a:avLst/>
+          </a:prstGeom>
+          <a:noFill/>
+          <a:ln>
+            <a:noFill/>
+          </a:ln>
+        </p:spPr>
+        <p:txBody>
+          <a:bodyPr wrap="square" anchor="ctr" lIns="45720" rIns="45720" tIns="27432" bIns="27432"/>
+          <a:lstStyle/>
+          <a:p>
+            <a:pPr algn="l"/>
+            <a:r>
+              <a:rPr lang="ja-JP" sz="1000" b="1" spc="40" dirty="0">
+                <a:solidFill>
+                  <a:srgbClr val="2A5CFF"/>
+                </a:solidFill>
+                <a:latin typeface="Montserrat"/>
+                <a:ea typeface="Montserrat"/>
+                <a:cs typeface="Montserrat"/>
+              </a:rPr>
+              <a:t>CONCEPT   </a:t>
+            </a:r>
+            <a:r>
+              <a:rPr lang="ja-JP" sz="1650" b="1" dirty="0">
+                <a:solidFill>
+                  <a:srgbClr val="1A1A1A"/>
+                </a:solidFill>
+                <a:latin typeface="Noto Sans JP"/>
+                <a:ea typeface="Noto Sans JP"/>
+                <a:cs typeface="Noto Sans JP"/>
+              </a:rPr>
+              <a:t>全体コンセプト</a:t>
+            </a:r>
+          </a:p>
+        </p:txBody>
+      </p:sp>
+      <p:sp>
+        <p:nvSpPr>
+          <p:cNvPr id="11" name="TextBox"/>
+          <p:cNvSpPr txBox="1"/>
+          <p:nvPr/>
+        </p:nvSpPr>
+        <p:spPr>
+          <a:xfrm>
+            <a:off x="585216" y="3383280"/>
+            <a:ext cx="5760720" cy="548640"/>
           </a:xfrm>
           <a:prstGeom prst="rect">
             <a:avLst/>
@@ -7808,7 +7944,7 @@
               </a:lnSpc>
             </a:pPr>
             <a:r>
-              <a:rPr lang="ja-JP" sz="1200" dirty="0">
+              <a:rPr lang="ja-JP" sz="1800" b="1" dirty="0">
                 <a:solidFill>
                   <a:srgbClr val="1A1A1A"/>
                 </a:solidFill>
@@ -7816,17 +7952,75 @@
                 <a:ea typeface="Noto Sans JP"/>
                 <a:cs typeface="Noto Sans JP"/>
               </a:rPr>
-              <a:t>高校生が普段見られない「仕事・会社・働く人」を見せる。</a:t>
-            </a:r>
-          </a:p>
-          <a:p>
-            <a:pPr algn="l">
-              <a:lnSpc>
-                <a:spcPct val="150000"/>
-              </a:lnSpc>
-            </a:pPr>
-            <a:r>
-              <a:rPr lang="ja-JP" sz="1200" dirty="0">
+              <a:t>会社を知る前に、そこで働く人を知る。</a:t>
+            </a:r>
+          </a:p>
+        </p:txBody>
+      </p:sp>
+      <p:sp>
+        <p:nvSpPr>
+          <p:cNvPr id="12" name="Subhead Mark"/>
+          <p:cNvSpPr/>
+          <p:nvPr/>
+        </p:nvSpPr>
+        <p:spPr>
+          <a:xfrm>
+            <a:off x="585216" y="4370832"/>
+            <a:ext cx="182880" cy="182880"/>
+          </a:xfrm>
+          <a:prstGeom prst="rect">
+            <a:avLst/>
+          </a:prstGeom>
+          <a:solidFill>
+            <a:srgbClr val="2A5CFF"/>
+          </a:solidFill>
+          <a:ln>
+            <a:noFill/>
+          </a:ln>
+        </p:spPr>
+        <p:txBody>
+          <a:bodyPr/>
+          <a:lstStyle/>
+          <a:p/>
+        </p:txBody>
+      </p:sp>
+      <p:sp>
+        <p:nvSpPr>
+          <p:cNvPr id="13" name="TextBox"/>
+          <p:cNvSpPr txBox="1"/>
+          <p:nvPr/>
+        </p:nvSpPr>
+        <p:spPr>
+          <a:xfrm>
+            <a:off x="877824" y="4270248"/>
+            <a:ext cx="5468112" cy="365760"/>
+          </a:xfrm>
+          <a:prstGeom prst="rect">
+            <a:avLst/>
+          </a:prstGeom>
+          <a:noFill/>
+          <a:ln>
+            <a:noFill/>
+          </a:ln>
+        </p:spPr>
+        <p:txBody>
+          <a:bodyPr wrap="square" anchor="ctr" lIns="45720" rIns="45720" tIns="27432" bIns="27432"/>
+          <a:lstStyle/>
+          <a:p>
+            <a:pPr algn="l"/>
+            <a:r>
+              <a:rPr lang="ja-JP" sz="1000" b="1" spc="40" dirty="0">
+                <a:solidFill>
+                  <a:srgbClr val="2A5CFF"/>
+                </a:solidFill>
+                <a:latin typeface="Montserrat"/>
+                <a:ea typeface="Montserrat"/>
+                <a:cs typeface="Montserrat"/>
+              </a:rPr>
+              <a:t>WHY YOUTUBE   </a:t>
+            </a:r>
+            <a:r>
+              <a:rPr lang="ja-JP" sz="1650" b="1" dirty="0">
                 <a:solidFill>
                   <a:srgbClr val="1A1A1A"/>
                 </a:solidFill>
@@ -7834,75 +8028,41 @@
                 <a:ea typeface="Noto Sans JP"/>
                 <a:cs typeface="Noto Sans JP"/>
               </a:rPr>
-              <a:t>主役は採用担当者ではなく、若手社員と高校生、現場の人。</a:t>
-            </a:r>
-          </a:p>
-        </p:txBody>
-      </p:sp>
-      <p:sp>
-        <p:nvSpPr>
-          <p:cNvPr id="9" name="Subhead Mark"/>
-          <p:cNvSpPr/>
-          <p:nvPr/>
-        </p:nvSpPr>
-        <p:spPr>
-          <a:xfrm>
-            <a:off x="585216" y="3794760"/>
-            <a:ext cx="146304" cy="146304"/>
-          </a:xfrm>
-          <a:prstGeom prst="rect">
-            <a:avLst/>
-          </a:prstGeom>
-          <a:solidFill>
-            <a:srgbClr val="2A5CFF"/>
-          </a:solidFill>
-          <a:ln>
-            <a:noFill/>
-          </a:ln>
-        </p:spPr>
-        <p:txBody>
-          <a:bodyPr/>
-          <a:lstStyle/>
-          <a:p/>
-        </p:txBody>
-      </p:sp>
-      <p:sp>
-        <p:nvSpPr>
-          <p:cNvPr id="10" name="TextBox"/>
-          <p:cNvSpPr txBox="1"/>
-          <p:nvPr/>
-        </p:nvSpPr>
-        <p:spPr>
-          <a:xfrm>
-            <a:off x="804672" y="3749040"/>
-            <a:ext cx="5541264" cy="256032"/>
-          </a:xfrm>
-          <a:prstGeom prst="rect">
-            <a:avLst/>
-          </a:prstGeom>
-          <a:noFill/>
-          <a:ln>
-            <a:noFill/>
-          </a:ln>
-        </p:spPr>
-        <p:txBody>
-          <a:bodyPr wrap="square" anchor="ctr" lIns="45720" rIns="45720" tIns="27432" bIns="27432"/>
-          <a:lstStyle/>
-          <a:p>
-            <a:pPr algn="l"/>
-            <a:r>
-              <a:rPr lang="ja-JP" sz="1100" b="1" spc="30" dirty="0">
-                <a:solidFill>
-                  <a:srgbClr val="2A5CFF"/>
-                </a:solidFill>
-                <a:latin typeface="Montserrat"/>
-                <a:ea typeface="Montserrat"/>
-                <a:cs typeface="Montserrat"/>
-              </a:rPr>
-              <a:t>CONCEPT  </a:t>
-            </a:r>
-            <a:r>
-              <a:rPr lang="ja-JP" sz="1300" b="1" dirty="0">
+              <a:t>TikTok / Instagramとの違い</a:t>
+            </a:r>
+          </a:p>
+        </p:txBody>
+      </p:sp>
+      <p:sp>
+        <p:nvSpPr>
+          <p:cNvPr id="14" name="TextBox"/>
+          <p:cNvSpPr txBox="1"/>
+          <p:nvPr/>
+        </p:nvSpPr>
+        <p:spPr>
+          <a:xfrm>
+            <a:off x="585216" y="4663440"/>
+            <a:ext cx="5760720" cy="1280160"/>
+          </a:xfrm>
+          <a:prstGeom prst="rect">
+            <a:avLst/>
+          </a:prstGeom>
+          <a:noFill/>
+          <a:ln>
+            <a:noFill/>
+          </a:ln>
+        </p:spPr>
+        <p:txBody>
+          <a:bodyPr wrap="square" anchor="t" lIns="45720" rIns="45720" tIns="27432" bIns="27432"/>
+          <a:lstStyle/>
+          <a:p>
+            <a:pPr algn="l">
+              <a:lnSpc>
+                <a:spcPct val="155000"/>
+              </a:lnSpc>
+            </a:pPr>
+            <a:r>
+              <a:rPr lang="ja-JP" sz="1200" dirty="0">
                 <a:solidFill>
                   <a:srgbClr val="1A1A1A"/>
                 </a:solidFill>
@@ -7910,41 +8070,17 @@
                 <a:ea typeface="Noto Sans JP"/>
                 <a:cs typeface="Noto Sans JP"/>
               </a:rPr>
-              <a:t>全体コンセプト</a:t>
-            </a:r>
-          </a:p>
-        </p:txBody>
-      </p:sp>
-      <p:sp>
-        <p:nvSpPr>
-          <p:cNvPr id="11" name="TextBox"/>
-          <p:cNvSpPr txBox="1"/>
-          <p:nvPr/>
-        </p:nvSpPr>
-        <p:spPr>
-          <a:xfrm>
-            <a:off x="585216" y="4096512"/>
-            <a:ext cx="5760720" cy="548640"/>
-          </a:xfrm>
-          <a:prstGeom prst="rect">
-            <a:avLst/>
-          </a:prstGeom>
-          <a:noFill/>
-          <a:ln>
-            <a:noFill/>
-          </a:ln>
-        </p:spPr>
-        <p:txBody>
-          <a:bodyPr wrap="square" anchor="t" lIns="45720" rIns="45720" tIns="27432" bIns="27432"/>
-          <a:lstStyle/>
+              <a:t>短尺で興味を引いたTikTok、実在の先輩に共感したInstagramの先に、</a:t>
+            </a:r>
+          </a:p>
           <a:p>
             <a:pPr algn="l">
               <a:lnSpc>
-                <a:spcPct val="150000"/>
+                <a:spcPct val="155000"/>
               </a:lnSpc>
             </a:pPr>
             <a:r>
-              <a:rPr lang="ja-JP" sz="1500" b="1" dirty="0">
+              <a:rPr lang="ja-JP" sz="1200" dirty="0">
                 <a:solidFill>
                   <a:srgbClr val="1A1A1A"/>
                 </a:solidFill>
@@ -7952,153 +8088,17 @@
                 <a:ea typeface="Noto Sans JP"/>
                 <a:cs typeface="Noto Sans JP"/>
               </a:rPr>
-              <a:t>会社を知る前に、そこで働く人を知る。</a:t>
-            </a:r>
-          </a:p>
-        </p:txBody>
-      </p:sp>
-      <p:sp>
-        <p:nvSpPr>
-          <p:cNvPr id="12" name="Subhead Mark"/>
-          <p:cNvSpPr/>
-          <p:nvPr/>
-        </p:nvSpPr>
-        <p:spPr>
-          <a:xfrm>
-            <a:off x="585216" y="4892040"/>
-            <a:ext cx="146304" cy="146304"/>
-          </a:xfrm>
-          <a:prstGeom prst="rect">
-            <a:avLst/>
-          </a:prstGeom>
-          <a:solidFill>
-            <a:srgbClr val="2A5CFF"/>
-          </a:solidFill>
-          <a:ln>
-            <a:noFill/>
-          </a:ln>
-        </p:spPr>
-        <p:txBody>
-          <a:bodyPr/>
-          <a:lstStyle/>
-          <a:p/>
-        </p:txBody>
-      </p:sp>
-      <p:sp>
-        <p:nvSpPr>
-          <p:cNvPr id="13" name="TextBox"/>
-          <p:cNvSpPr txBox="1"/>
-          <p:nvPr/>
-        </p:nvSpPr>
-        <p:spPr>
-          <a:xfrm>
-            <a:off x="804672" y="4846320"/>
-            <a:ext cx="5541264" cy="256032"/>
-          </a:xfrm>
-          <a:prstGeom prst="rect">
-            <a:avLst/>
-          </a:prstGeom>
-          <a:noFill/>
-          <a:ln>
-            <a:noFill/>
-          </a:ln>
-        </p:spPr>
-        <p:txBody>
-          <a:bodyPr wrap="square" anchor="ctr" lIns="45720" rIns="45720" tIns="27432" bIns="27432"/>
-          <a:lstStyle/>
-          <a:p>
-            <a:pPr algn="l"/>
-            <a:r>
-              <a:rPr lang="ja-JP" sz="1100" b="1" spc="30" dirty="0">
-                <a:solidFill>
-                  <a:srgbClr val="2A5CFF"/>
-                </a:solidFill>
-                <a:latin typeface="Montserrat"/>
-                <a:ea typeface="Montserrat"/>
-                <a:cs typeface="Montserrat"/>
-              </a:rPr>
-              <a:t>WHY YOUTUBE  </a:t>
-            </a:r>
-            <a:r>
-              <a:rPr lang="ja-JP" sz="1300" b="1" dirty="0">
-                <a:solidFill>
-                  <a:srgbClr val="1A1A1A"/>
-                </a:solidFill>
-                <a:latin typeface="Noto Sans JP"/>
-                <a:ea typeface="Noto Sans JP"/>
-                <a:cs typeface="Noto Sans JP"/>
-              </a:rPr>
-              <a:t>TikTok / Instagramとの違い</a:t>
-            </a:r>
-          </a:p>
-        </p:txBody>
-      </p:sp>
-      <p:sp>
-        <p:nvSpPr>
-          <p:cNvPr id="14" name="TextBox"/>
-          <p:cNvSpPr txBox="1"/>
-          <p:nvPr/>
-        </p:nvSpPr>
-        <p:spPr>
-          <a:xfrm>
-            <a:off x="585216" y="5193792"/>
-            <a:ext cx="5760720" cy="1005840"/>
-          </a:xfrm>
-          <a:prstGeom prst="rect">
-            <a:avLst/>
-          </a:prstGeom>
-          <a:noFill/>
-          <a:ln>
-            <a:noFill/>
-          </a:ln>
-        </p:spPr>
-        <p:txBody>
-          <a:bodyPr wrap="square" anchor="t" lIns="45720" rIns="45720" tIns="27432" bIns="27432"/>
-          <a:lstStyle/>
+              <a:t>「10分間、じっくり見て理解する」場所を置く。採用担当者目線ではなく、</a:t>
+            </a:r>
+          </a:p>
           <a:p>
             <a:pPr algn="l">
               <a:lnSpc>
-                <a:spcPct val="150000"/>
+                <a:spcPct val="155000"/>
               </a:lnSpc>
             </a:pPr>
             <a:r>
-              <a:rPr lang="ja-JP" sz="1100" dirty="0">
-                <a:solidFill>
-                  <a:srgbClr val="1A1A1A"/>
-                </a:solidFill>
-                <a:latin typeface="Noto Sans JP"/>
-                <a:ea typeface="Noto Sans JP"/>
-                <a:cs typeface="Noto Sans JP"/>
-              </a:rPr>
-              <a:t>短尺で興味を引いたTikTok、実在の先輩に共感したInstagramの先に、</a:t>
-            </a:r>
-          </a:p>
-          <a:p>
-            <a:pPr algn="l">
-              <a:lnSpc>
-                <a:spcPct val="150000"/>
-              </a:lnSpc>
-            </a:pPr>
-            <a:r>
-              <a:rPr lang="ja-JP" sz="1100" dirty="0">
-                <a:solidFill>
-                  <a:srgbClr val="1A1A1A"/>
-                </a:solidFill>
-                <a:latin typeface="Noto Sans JP"/>
-                <a:ea typeface="Noto Sans JP"/>
-                <a:cs typeface="Noto Sans JP"/>
-              </a:rPr>
-              <a:t>「10分間、じっくり見て理解する」場所を置く。採用担当者目線ではなく、</a:t>
-            </a:r>
-          </a:p>
-          <a:p>
-            <a:pPr algn="l">
-              <a:lnSpc>
-                <a:spcPct val="150000"/>
-              </a:lnSpc>
-            </a:pPr>
-            <a:r>
-              <a:rPr lang="ja-JP" sz="1100" dirty="0">
+              <a:rPr lang="ja-JP" sz="1200" dirty="0">
                 <a:solidFill>
                   <a:srgbClr val="1A1A1A"/>
                 </a:solidFill>
@@ -8396,8 +8396,8 @@
         </p:nvCxnSpPr>
         <p:spPr>
           <a:xfrm>
-            <a:off x="6848856" y="5220255"/>
-            <a:ext cx="4629607" cy="914"/>
+            <a:off x="6867144" y="5311695"/>
+            <a:ext cx="4593031" cy="914"/>
           </a:xfrm>
           <a:prstGeom prst="line">
             <a:avLst/>
@@ -8419,8 +8419,8 @@
         </p:nvSpPr>
         <p:spPr>
           <a:xfrm>
-            <a:off x="6848856" y="4630467"/>
-            <a:ext cx="4629607" cy="510235"/>
+            <a:off x="6867144" y="4630467"/>
+            <a:ext cx="4593031" cy="468630"/>
           </a:xfrm>
           <a:prstGeom prst="rect">
             <a:avLst/>
@@ -8457,8 +8457,8 @@
         </p:nvSpPr>
         <p:spPr>
           <a:xfrm>
-            <a:off x="6848856" y="5256831"/>
-            <a:ext cx="4629607" cy="292608"/>
+            <a:off x="6867144" y="5329983"/>
+            <a:ext cx="4593031" cy="256032"/>
           </a:xfrm>
           <a:prstGeom prst="rect">
             <a:avLst/>
@@ -8474,7 +8474,7 @@
           <a:p>
             <a:pPr algn="ctr"/>
             <a:r>
-              <a:rPr lang="ja-JP" sz="950" dirty="0">
+              <a:rPr lang="ja-JP" sz="586" dirty="0">
                 <a:solidFill>
                   <a:srgbClr val="1A1A1A"/>
                 </a:solidFill>
@@ -8685,7 +8685,7 @@
         <p:spPr>
           <a:xfrm>
             <a:off x="969264" y="365760"/>
-            <a:ext cx="7315200" cy="310896"/>
+            <a:ext cx="8229600" cy="310896"/>
           </a:xfrm>
           <a:prstGeom prst="rect">
             <a:avLst/>
@@ -8701,7 +8701,7 @@
           <a:p>
             <a:pPr algn="l"/>
             <a:r>
-              <a:rPr lang="ja-JP" sz="1250" b="1" spc="60" dirty="0">
+              <a:rPr lang="ja-JP" sz="1200" b="1" spc="60" dirty="0">
                 <a:solidFill>
                   <a:srgbClr val="2A5CFF"/>
                 </a:solidFill>
@@ -8712,7 +8712,7 @@
               <a:t>YOUTUBE  </a:t>
             </a:r>
             <a:r>
-              <a:rPr lang="ja-JP" sz="1100" b="1" spc="20" dirty="0">
+              <a:rPr lang="ja-JP" sz="1050" b="1" spc="20" dirty="0">
                 <a:solidFill>
                   <a:srgbClr val="1A1A1A"/>
                 </a:solidFill>
@@ -8733,8 +8733,8 @@
         </p:nvSpPr>
         <p:spPr>
           <a:xfrm>
-            <a:off x="585216" y="896112"/>
-            <a:ext cx="146304" cy="146304"/>
+            <a:off x="585216" y="923544"/>
+            <a:ext cx="182880" cy="182880"/>
           </a:xfrm>
           <a:prstGeom prst="rect">
             <a:avLst/>
@@ -8760,8 +8760,8 @@
         </p:nvSpPr>
         <p:spPr>
           <a:xfrm>
-            <a:off x="804672" y="850392"/>
-            <a:ext cx="10801807" cy="256032"/>
+            <a:off x="877824" y="822960"/>
+            <a:ext cx="10728655" cy="365760"/>
           </a:xfrm>
           <a:prstGeom prst="rect">
             <a:avLst/>
@@ -8777,7 +8777,7 @@
           <a:p>
             <a:pPr algn="l"/>
             <a:r>
-              <a:rPr lang="ja-JP" sz="1100" b="1" spc="30" dirty="0">
+              <a:rPr lang="ja-JP" sz="1000" b="1" spc="40" dirty="0">
                 <a:solidFill>
                   <a:srgbClr val="2A5CFF"/>
                 </a:solidFill>
@@ -8785,10 +8785,10 @@
                 <a:ea typeface="Montserrat"/>
                 <a:cs typeface="Montserrat"/>
               </a:rPr>
-              <a:t>WORLDVIEW  </a:t>
-            </a:r>
-            <a:r>
-              <a:rPr lang="ja-JP" sz="1300" b="1" dirty="0">
+              <a:t>WORLDVIEW   </a:t>
+            </a:r>
+            <a:r>
+              <a:rPr lang="ja-JP" sz="1650" b="1" dirty="0">
                 <a:solidFill>
                   <a:srgbClr val="1A1A1A"/>
                 </a:solidFill>
@@ -9416,8 +9416,8 @@
         </p:nvSpPr>
         <p:spPr>
           <a:xfrm>
-            <a:off x="585216" y="2148840"/>
-            <a:ext cx="146304" cy="146304"/>
+            <a:off x="585216" y="2176272"/>
+            <a:ext cx="182880" cy="182880"/>
           </a:xfrm>
           <a:prstGeom prst="rect">
             <a:avLst/>
@@ -9443,8 +9443,8 @@
         </p:nvSpPr>
         <p:spPr>
           <a:xfrm>
-            <a:off x="804672" y="2103120"/>
-            <a:ext cx="5842239" cy="256032"/>
+            <a:off x="877824" y="2075688"/>
+            <a:ext cx="5769087" cy="365760"/>
           </a:xfrm>
           <a:prstGeom prst="rect">
             <a:avLst/>
@@ -9460,7 +9460,7 @@
           <a:p>
             <a:pPr algn="l"/>
             <a:r>
-              <a:rPr lang="ja-JP" sz="1100" b="1" spc="30" dirty="0">
+              <a:rPr lang="ja-JP" sz="1000" b="1" spc="40" dirty="0">
                 <a:solidFill>
                   <a:srgbClr val="2A5CFF"/>
                 </a:solidFill>
@@ -9468,10 +9468,10 @@
                 <a:ea typeface="Montserrat"/>
                 <a:cs typeface="Montserrat"/>
               </a:rPr>
-              <a:t>QUESTIONS  </a:t>
-            </a:r>
-            <a:r>
-              <a:rPr lang="ja-JP" sz="1300" b="1" dirty="0">
+              <a:t>QUESTIONS   </a:t>
+            </a:r>
+            <a:r>
+              <a:rPr lang="ja-JP" sz="1650" b="1" dirty="0">
                 <a:solidFill>
                   <a:srgbClr val="1A1A1A"/>
                 </a:solidFill>
@@ -9837,8 +9837,8 @@
         </p:nvSpPr>
         <p:spPr>
           <a:xfrm>
-            <a:off x="6966951" y="2450592"/>
-            <a:ext cx="4639528" cy="2377440"/>
+            <a:off x="6966951" y="2148840"/>
+            <a:ext cx="4639528" cy="2880360"/>
           </a:xfrm>
           <a:prstGeom prst="rect">
             <a:avLst/>
@@ -9867,8 +9867,8 @@
         </p:nvCxnSpPr>
         <p:spPr>
           <a:xfrm>
-            <a:off x="7094967" y="4425696"/>
-            <a:ext cx="4383496" cy="914"/>
+            <a:off x="7113255" y="4701559"/>
+            <a:ext cx="4346920" cy="914"/>
           </a:xfrm>
           <a:prstGeom prst="line">
             <a:avLst/>
@@ -9890,8 +9890,8 @@
         </p:nvSpPr>
         <p:spPr>
           <a:xfrm>
-            <a:off x="7094967" y="3163824"/>
-            <a:ext cx="4383496" cy="855878"/>
+            <a:off x="7113255" y="3012948"/>
+            <a:ext cx="4346920" cy="1256557"/>
           </a:xfrm>
           <a:prstGeom prst="rect">
             <a:avLst/>
@@ -9907,7 +9907,7 @@
           <a:p>
             <a:pPr algn="ctr"/>
             <a:r>
-              <a:rPr lang="ja-JP" sz="2000" b="1" spc="40" dirty="0">
+              <a:rPr lang="ja-JP" sz="2362" b="1" spc="40" dirty="0">
                 <a:solidFill>
                   <a:srgbClr val="2A5CFF"/>
                 </a:solidFill>
@@ -9928,8 +9928,8 @@
         </p:nvSpPr>
         <p:spPr>
           <a:xfrm>
-            <a:off x="7094967" y="4462272"/>
-            <a:ext cx="4383496" cy="292608"/>
+            <a:off x="7113255" y="4719847"/>
+            <a:ext cx="4346920" cy="272777"/>
           </a:xfrm>
           <a:prstGeom prst="rect">
             <a:avLst/>
@@ -9945,7 +9945,7 @@
           <a:p>
             <a:pPr algn="ctr"/>
             <a:r>
-              <a:rPr lang="ja-JP" sz="950" dirty="0">
+              <a:rPr lang="ja-JP" sz="992" dirty="0">
                 <a:solidFill>
                   <a:srgbClr val="1A1A1A"/>
                 </a:solidFill>
@@ -9966,8 +9966,8 @@
         </p:nvSpPr>
         <p:spPr>
           <a:xfrm>
-            <a:off x="585216" y="5349240"/>
-            <a:ext cx="146304" cy="146304"/>
+            <a:off x="585216" y="5376672"/>
+            <a:ext cx="182880" cy="182880"/>
           </a:xfrm>
           <a:prstGeom prst="rect">
             <a:avLst/>
@@ -9993,8 +9993,8 @@
         </p:nvSpPr>
         <p:spPr>
           <a:xfrm>
-            <a:off x="804672" y="5303520"/>
-            <a:ext cx="10801807" cy="256032"/>
+            <a:off x="877824" y="5276088"/>
+            <a:ext cx="10728655" cy="365760"/>
           </a:xfrm>
           <a:prstGeom prst="rect">
             <a:avLst/>
@@ -10010,7 +10010,7 @@
           <a:p>
             <a:pPr algn="l"/>
             <a:r>
-              <a:rPr lang="ja-JP" sz="1100" b="1" spc="30" dirty="0">
+              <a:rPr lang="ja-JP" sz="1000" b="1" spc="40" dirty="0">
                 <a:solidFill>
                   <a:srgbClr val="2A5CFF"/>
                 </a:solidFill>
@@ -10018,10 +10018,10 @@
                 <a:ea typeface="Montserrat"/>
                 <a:cs typeface="Montserrat"/>
               </a:rPr>
-              <a:t>VALUE POINT  </a:t>
-            </a:r>
-            <a:r>
-              <a:rPr lang="ja-JP" sz="1300" b="1" dirty="0">
+              <a:t>VALUE POINT   </a:t>
+            </a:r>
+            <a:r>
+              <a:rPr lang="ja-JP" sz="1650" b="1" dirty="0">
                 <a:solidFill>
                   <a:srgbClr val="1A1A1A"/>
                 </a:solidFill>
@@ -10042,8 +10042,8 @@
         </p:nvSpPr>
         <p:spPr>
           <a:xfrm>
-            <a:off x="585216" y="5632704"/>
-            <a:ext cx="11021263" cy="457200"/>
+            <a:off x="585216" y="5650992"/>
+            <a:ext cx="11021263" cy="548640"/>
           </a:xfrm>
           <a:prstGeom prst="rect">
             <a:avLst/>
@@ -10063,7 +10063,7 @@
               </a:lnSpc>
             </a:pPr>
             <a:r>
-              <a:rPr lang="ja-JP" sz="1300" b="1" dirty="0">
+              <a:rPr lang="ja-JP" sz="1700" b="1" dirty="0">
                 <a:solidFill>
                   <a:srgbClr val="1A1A1A"/>
                 </a:solidFill>
@@ -10274,7 +10274,7 @@
         <p:spPr>
           <a:xfrm>
             <a:off x="969264" y="365760"/>
-            <a:ext cx="7315200" cy="310896"/>
+            <a:ext cx="8229600" cy="310896"/>
           </a:xfrm>
           <a:prstGeom prst="rect">
             <a:avLst/>
@@ -10290,7 +10290,7 @@
           <a:p>
             <a:pPr algn="l"/>
             <a:r>
-              <a:rPr lang="ja-JP" sz="1250" b="1" spc="60" dirty="0">
+              <a:rPr lang="ja-JP" sz="1200" b="1" spc="60" dirty="0">
                 <a:solidFill>
                   <a:srgbClr val="2A5CFF"/>
                 </a:solidFill>
@@ -10301,7 +10301,7 @@
               <a:t>YOUTUBE  </a:t>
             </a:r>
             <a:r>
-              <a:rPr lang="ja-JP" sz="1100" b="1" spc="20" dirty="0">
+              <a:rPr lang="ja-JP" sz="1050" b="1" spc="20" dirty="0">
                 <a:solidFill>
                   <a:srgbClr val="1A1A1A"/>
                 </a:solidFill>
@@ -10322,8 +10322,8 @@
         </p:nvSpPr>
         <p:spPr>
           <a:xfrm>
-            <a:off x="585216" y="822960"/>
-            <a:ext cx="8229600" cy="457200"/>
+            <a:off x="585216" y="731520"/>
+            <a:ext cx="9601200" cy="731520"/>
           </a:xfrm>
           <a:prstGeom prst="rect">
             <a:avLst/>
@@ -10343,7 +10343,7 @@
               </a:lnSpc>
             </a:pPr>
             <a:r>
-              <a:rPr lang="ja-JP" sz="1900" b="1" dirty="0">
+              <a:rPr lang="ja-JP" sz="3300" b="1" dirty="0">
                 <a:solidFill>
                   <a:srgbClr val="1A1A1A"/>
                 </a:solidFill>
@@ -10682,8 +10682,8 @@
         </p:nvSpPr>
         <p:spPr>
           <a:xfrm>
-            <a:off x="585216" y="2606040"/>
-            <a:ext cx="146304" cy="146304"/>
+            <a:off x="585216" y="2633472"/>
+            <a:ext cx="182880" cy="182880"/>
           </a:xfrm>
           <a:prstGeom prst="rect">
             <a:avLst/>
@@ -10709,8 +10709,8 @@
         </p:nvSpPr>
         <p:spPr>
           <a:xfrm>
-            <a:off x="804672" y="2560320"/>
-            <a:ext cx="10801807" cy="256032"/>
+            <a:off x="877824" y="2532888"/>
+            <a:ext cx="10728655" cy="365760"/>
           </a:xfrm>
           <a:prstGeom prst="rect">
             <a:avLst/>
@@ -10726,7 +10726,7 @@
           <a:p>
             <a:pPr algn="l"/>
             <a:r>
-              <a:rPr lang="ja-JP" sz="1100" b="1" spc="30" dirty="0">
+              <a:rPr lang="ja-JP" sz="1000" b="1" spc="40" dirty="0">
                 <a:solidFill>
                   <a:srgbClr val="2A5CFF"/>
                 </a:solidFill>
@@ -10734,10 +10734,10 @@
                 <a:ea typeface="Montserrat"/>
                 <a:cs typeface="Montserrat"/>
               </a:rPr>
-              <a:t>JOBS  </a:t>
-            </a:r>
-            <a:r>
-              <a:rPr lang="ja-JP" sz="1300" b="1" dirty="0">
+              <a:t>JOBS   </a:t>
+            </a:r>
+            <a:r>
+              <a:rPr lang="ja-JP" sz="1650" b="1" dirty="0">
                 <a:solidFill>
                   <a:srgbClr val="1A1A1A"/>
                 </a:solidFill>
@@ -12020,8 +12020,8 @@
         </p:nvCxnSpPr>
         <p:spPr>
           <a:xfrm>
-            <a:off x="7068312" y="5861304"/>
-            <a:ext cx="4410151" cy="914"/>
+            <a:off x="7086600" y="5952744"/>
+            <a:ext cx="4373575" cy="914"/>
           </a:xfrm>
           <a:prstGeom prst="line">
             <a:avLst/>
@@ -12043,8 +12043,8 @@
         </p:nvSpPr>
         <p:spPr>
           <a:xfrm>
-            <a:off x="7068312" y="4343400"/>
-            <a:ext cx="4410151" cy="987552"/>
+            <a:off x="7086600" y="4343400"/>
+            <a:ext cx="4373575" cy="1197864"/>
           </a:xfrm>
           <a:prstGeom prst="rect">
             <a:avLst/>
@@ -12081,8 +12081,8 @@
         </p:nvSpPr>
         <p:spPr>
           <a:xfrm>
-            <a:off x="7068312" y="5897880"/>
-            <a:ext cx="4410151" cy="292608"/>
+            <a:off x="7086600" y="5971032"/>
+            <a:ext cx="4373575" cy="256032"/>
           </a:xfrm>
           <a:prstGeom prst="rect">
             <a:avLst/>
@@ -12098,7 +12098,7 @@
           <a:p>
             <a:pPr algn="ctr"/>
             <a:r>
-              <a:rPr lang="ja-JP" sz="950" dirty="0">
+              <a:rPr lang="ja-JP" sz="840" dirty="0">
                 <a:solidFill>
                   <a:srgbClr val="1A1A1A"/>
                 </a:solidFill>
@@ -12309,7 +12309,7 @@
         <p:spPr>
           <a:xfrm>
             <a:off x="969264" y="365760"/>
-            <a:ext cx="7315200" cy="310896"/>
+            <a:ext cx="8229600" cy="310896"/>
           </a:xfrm>
           <a:prstGeom prst="rect">
             <a:avLst/>
@@ -12325,7 +12325,7 @@
           <a:p>
             <a:pPr algn="l"/>
             <a:r>
-              <a:rPr lang="ja-JP" sz="1250" b="1" spc="60" dirty="0">
+              <a:rPr lang="ja-JP" sz="1200" b="1" spc="60" dirty="0">
                 <a:solidFill>
                   <a:srgbClr val="FF6A00"/>
                 </a:solidFill>
@@ -12336,7 +12336,7 @@
               <a:t>PHASE 4  </a:t>
             </a:r>
             <a:r>
-              <a:rPr lang="ja-JP" sz="1100" b="1" spc="20" dirty="0">
+              <a:rPr lang="ja-JP" sz="1050" b="1" spc="20" dirty="0">
                 <a:solidFill>
                   <a:srgbClr val="1A1A1A"/>
                 </a:solidFill>
@@ -12357,8 +12357,8 @@
         </p:nvSpPr>
         <p:spPr>
           <a:xfrm>
-            <a:off x="585216" y="777240"/>
-            <a:ext cx="8229600" cy="502920"/>
+            <a:off x="585216" y="749808"/>
+            <a:ext cx="8229600" cy="548640"/>
           </a:xfrm>
           <a:prstGeom prst="rect">
             <a:avLst/>
@@ -12378,7 +12378,7 @@
               </a:lnSpc>
             </a:pPr>
             <a:r>
-              <a:rPr lang="ja-JP" sz="2200" b="1" dirty="0">
+              <a:rPr lang="ja-JP" sz="3300" b="1" dirty="0">
                 <a:solidFill>
                   <a:srgbClr val="1A1A1A"/>
                 </a:solidFill>
@@ -13417,7 +13417,7 @@
               </a:lnSpc>
             </a:pPr>
             <a:r>
-              <a:rPr lang="ja-JP" sz="1600" b="1" dirty="0">
+              <a:rPr lang="ja-JP" sz="2000" b="1" dirty="0">
                 <a:solidFill>
                   <a:srgbClr val="1A1A1A"/>
                 </a:solidFill>
@@ -13629,7 +13629,7 @@
         <p:spPr>
           <a:xfrm>
             <a:off x="969264" y="365760"/>
-            <a:ext cx="7315200" cy="310896"/>
+            <a:ext cx="8229600" cy="310896"/>
           </a:xfrm>
           <a:prstGeom prst="rect">
             <a:avLst/>
@@ -13645,7 +13645,7 @@
           <a:p>
             <a:pPr algn="l"/>
             <a:r>
-              <a:rPr lang="ja-JP" sz="1250" b="1" spc="60" dirty="0">
+              <a:rPr lang="ja-JP" sz="1200" b="1" spc="60" dirty="0">
                 <a:solidFill>
                   <a:srgbClr val="FF6A00"/>
                 </a:solidFill>
@@ -13656,7 +13656,7 @@
               <a:t>MARKETING ROADMAP  </a:t>
             </a:r>
             <a:r>
-              <a:rPr lang="ja-JP" sz="1100" b="1" spc="20" dirty="0">
+              <a:rPr lang="ja-JP" sz="1050" b="1" spc="20" dirty="0">
                 <a:solidFill>
                   <a:srgbClr val="1A1A1A"/>
                 </a:solidFill>
@@ -13677,8 +13677,8 @@
         </p:nvSpPr>
         <p:spPr>
           <a:xfrm>
-            <a:off x="585216" y="777240"/>
-            <a:ext cx="8229600" cy="502920"/>
+            <a:off x="585216" y="749808"/>
+            <a:ext cx="8686800" cy="548640"/>
           </a:xfrm>
           <a:prstGeom prst="rect">
             <a:avLst/>
@@ -13698,7 +13698,7 @@
               </a:lnSpc>
             </a:pPr>
             <a:r>
-              <a:rPr lang="ja-JP" sz="2000" b="1" dirty="0">
+              <a:rPr lang="ja-JP" sz="3300" b="1" dirty="0">
                 <a:solidFill>
                   <a:srgbClr val="1A1A1A"/>
                 </a:solidFill>
@@ -13719,12 +13719,12 @@
         </p:nvSpPr>
         <p:spPr>
           <a:xfrm>
-            <a:off x="585216" y="1691640"/>
-            <a:ext cx="1714957" cy="1051560"/>
+            <a:off x="585216" y="1783080"/>
+            <a:ext cx="1714957" cy="1463040"/>
           </a:xfrm>
           <a:prstGeom prst="roundRect">
             <a:avLst>
-              <a:gd name="adj" fmla="val 6000"/>
+              <a:gd name="adj" fmla="val 5000"/>
             </a:avLst>
           </a:prstGeom>
           <a:solidFill>
@@ -13748,8 +13748,8 @@
         </p:nvSpPr>
         <p:spPr>
           <a:xfrm>
-            <a:off x="676656" y="1801368"/>
-            <a:ext cx="1532077" cy="365760"/>
+            <a:off x="713232" y="1947672"/>
+            <a:ext cx="1458925" cy="457200"/>
           </a:xfrm>
           <a:prstGeom prst="rect">
             <a:avLst/>
@@ -13765,7 +13765,7 @@
           <a:p>
             <a:pPr algn="l"/>
             <a:r>
-              <a:rPr lang="ja-JP" sz="1350" b="1" spc="10" dirty="0">
+              <a:rPr lang="ja-JP" sz="1700" b="1" spc="10" dirty="0">
                 <a:solidFill>
                   <a:srgbClr val="FFFFFF"/>
                 </a:solidFill>
@@ -13786,8 +13786,8 @@
         </p:nvSpPr>
         <p:spPr>
           <a:xfrm>
-            <a:off x="676656" y="2148840"/>
-            <a:ext cx="1532077" cy="548640"/>
+            <a:off x="713232" y="2441448"/>
+            <a:ext cx="1458925" cy="731520"/>
           </a:xfrm>
           <a:prstGeom prst="rect">
             <a:avLst/>
@@ -13803,7 +13803,7 @@
           <a:p>
             <a:pPr algn="l"/>
             <a:r>
-              <a:rPr lang="ja-JP" sz="1000" b="1" dirty="0">
+              <a:rPr lang="ja-JP" sz="1250" b="1" dirty="0">
                 <a:solidFill>
                   <a:srgbClr val="FFFFFF"/>
                 </a:solidFill>
@@ -13824,7 +13824,7 @@
         </p:nvCxnSpPr>
         <p:spPr>
           <a:xfrm>
-            <a:off x="2318461" y="2217420"/>
+            <a:off x="2318461" y="2514600"/>
             <a:ext cx="109728" cy="914"/>
           </a:xfrm>
           <a:prstGeom prst="line">
@@ -13847,12 +13847,12 @@
         </p:nvSpPr>
         <p:spPr>
           <a:xfrm>
-            <a:off x="2446477" y="1691640"/>
-            <a:ext cx="1714957" cy="1051560"/>
+            <a:off x="2446477" y="1783080"/>
+            <a:ext cx="1714957" cy="1463040"/>
           </a:xfrm>
           <a:prstGeom prst="roundRect">
             <a:avLst>
-              <a:gd name="adj" fmla="val 6000"/>
+              <a:gd name="adj" fmla="val 5000"/>
             </a:avLst>
           </a:prstGeom>
           <a:solidFill>
@@ -13876,8 +13876,8 @@
         </p:nvSpPr>
         <p:spPr>
           <a:xfrm>
-            <a:off x="2537917" y="1801368"/>
-            <a:ext cx="1532077" cy="365760"/>
+            <a:off x="2574493" y="1947672"/>
+            <a:ext cx="1458925" cy="457200"/>
           </a:xfrm>
           <a:prstGeom prst="rect">
             <a:avLst/>
@@ -13893,7 +13893,7 @@
           <a:p>
             <a:pPr algn="l"/>
             <a:r>
-              <a:rPr lang="ja-JP" sz="1350" b="1" spc="10" dirty="0">
+              <a:rPr lang="ja-JP" sz="1700" b="1" spc="10" dirty="0">
                 <a:solidFill>
                   <a:srgbClr val="FFFFFF"/>
                 </a:solidFill>
@@ -13914,8 +13914,8 @@
         </p:nvSpPr>
         <p:spPr>
           <a:xfrm>
-            <a:off x="2537917" y="2148840"/>
-            <a:ext cx="1532077" cy="548640"/>
+            <a:off x="2574493" y="2441448"/>
+            <a:ext cx="1458925" cy="731520"/>
           </a:xfrm>
           <a:prstGeom prst="rect">
             <a:avLst/>
@@ -13931,7 +13931,7 @@
           <a:p>
             <a:pPr algn="l"/>
             <a:r>
-              <a:rPr lang="ja-JP" sz="1000" b="1" dirty="0">
+              <a:rPr lang="ja-JP" sz="1250" b="1" dirty="0">
                 <a:solidFill>
                   <a:srgbClr val="FFFFFF"/>
                 </a:solidFill>
@@ -13952,7 +13952,7 @@
         </p:nvCxnSpPr>
         <p:spPr>
           <a:xfrm>
-            <a:off x="4179722" y="2217420"/>
+            <a:off x="4179722" y="2514600"/>
             <a:ext cx="109728" cy="914"/>
           </a:xfrm>
           <a:prstGeom prst="line">
@@ -13975,12 +13975,12 @@
         </p:nvSpPr>
         <p:spPr>
           <a:xfrm>
-            <a:off x="4307738" y="1691640"/>
-            <a:ext cx="1714957" cy="1051560"/>
+            <a:off x="4307738" y="1783080"/>
+            <a:ext cx="1714957" cy="1463040"/>
           </a:xfrm>
           <a:prstGeom prst="roundRect">
             <a:avLst>
-              <a:gd name="adj" fmla="val 6000"/>
+              <a:gd name="adj" fmla="val 5000"/>
             </a:avLst>
           </a:prstGeom>
           <a:solidFill>
@@ -14004,8 +14004,8 @@
         </p:nvSpPr>
         <p:spPr>
           <a:xfrm>
-            <a:off x="4399178" y="1801368"/>
-            <a:ext cx="1532077" cy="365760"/>
+            <a:off x="4435754" y="1947672"/>
+            <a:ext cx="1458925" cy="457200"/>
           </a:xfrm>
           <a:prstGeom prst="rect">
             <a:avLst/>
@@ -14021,7 +14021,7 @@
           <a:p>
             <a:pPr algn="l"/>
             <a:r>
-              <a:rPr lang="ja-JP" sz="1350" b="1" spc="10" dirty="0">
+              <a:rPr lang="ja-JP" sz="1700" b="1" spc="10" dirty="0">
                 <a:solidFill>
                   <a:srgbClr val="FFFFFF"/>
                 </a:solidFill>
@@ -14042,8 +14042,8 @@
         </p:nvSpPr>
         <p:spPr>
           <a:xfrm>
-            <a:off x="4399178" y="2148840"/>
-            <a:ext cx="1532077" cy="548640"/>
+            <a:off x="4435754" y="2441448"/>
+            <a:ext cx="1458925" cy="731520"/>
           </a:xfrm>
           <a:prstGeom prst="rect">
             <a:avLst/>
@@ -14059,7 +14059,7 @@
           <a:p>
             <a:pPr algn="l"/>
             <a:r>
-              <a:rPr lang="ja-JP" sz="1000" b="1" dirty="0">
+              <a:rPr lang="ja-JP" sz="1250" b="1" dirty="0">
                 <a:solidFill>
                   <a:srgbClr val="FFFFFF"/>
                 </a:solidFill>
@@ -14080,7 +14080,7 @@
         </p:nvCxnSpPr>
         <p:spPr>
           <a:xfrm>
-            <a:off x="6040984" y="2217420"/>
+            <a:off x="6040984" y="2514600"/>
             <a:ext cx="109728" cy="914"/>
           </a:xfrm>
           <a:prstGeom prst="line">
@@ -14103,12 +14103,12 @@
         </p:nvSpPr>
         <p:spPr>
           <a:xfrm>
-            <a:off x="6169000" y="1691640"/>
-            <a:ext cx="1714957" cy="1051560"/>
+            <a:off x="6169000" y="1783080"/>
+            <a:ext cx="1714957" cy="1463040"/>
           </a:xfrm>
           <a:prstGeom prst="roundRect">
             <a:avLst>
-              <a:gd name="adj" fmla="val 6000"/>
+              <a:gd name="adj" fmla="val 5000"/>
             </a:avLst>
           </a:prstGeom>
           <a:solidFill>
@@ -14132,8 +14132,8 @@
         </p:nvSpPr>
         <p:spPr>
           <a:xfrm>
-            <a:off x="6260440" y="1801368"/>
-            <a:ext cx="1532077" cy="365760"/>
+            <a:off x="6297016" y="1947672"/>
+            <a:ext cx="1458925" cy="457200"/>
           </a:xfrm>
           <a:prstGeom prst="rect">
             <a:avLst/>
@@ -14149,7 +14149,7 @@
           <a:p>
             <a:pPr algn="l"/>
             <a:r>
-              <a:rPr lang="ja-JP" sz="1350" b="1" spc="10" dirty="0">
+              <a:rPr lang="ja-JP" sz="1700" b="1" spc="10" dirty="0">
                 <a:solidFill>
                   <a:srgbClr val="FFFFFF"/>
                 </a:solidFill>
@@ -14170,8 +14170,8 @@
         </p:nvSpPr>
         <p:spPr>
           <a:xfrm>
-            <a:off x="6260440" y="2148840"/>
-            <a:ext cx="1532077" cy="548640"/>
+            <a:off x="6297016" y="2441448"/>
+            <a:ext cx="1458925" cy="731520"/>
           </a:xfrm>
           <a:prstGeom prst="rect">
             <a:avLst/>
@@ -14187,7 +14187,7 @@
           <a:p>
             <a:pPr algn="l"/>
             <a:r>
-              <a:rPr lang="ja-JP" sz="1000" b="1" dirty="0">
+              <a:rPr lang="ja-JP" sz="1250" b="1" dirty="0">
                 <a:solidFill>
                   <a:srgbClr val="FFFFFF"/>
                 </a:solidFill>
@@ -14208,7 +14208,7 @@
         </p:nvCxnSpPr>
         <p:spPr>
           <a:xfrm>
-            <a:off x="7902245" y="2217420"/>
+            <a:off x="7902245" y="2514600"/>
             <a:ext cx="109728" cy="914"/>
           </a:xfrm>
           <a:prstGeom prst="line">
@@ -14231,12 +14231,12 @@
         </p:nvSpPr>
         <p:spPr>
           <a:xfrm>
-            <a:off x="8030261" y="1691640"/>
-            <a:ext cx="1714957" cy="1051560"/>
+            <a:off x="8030261" y="1783080"/>
+            <a:ext cx="1714957" cy="1463040"/>
           </a:xfrm>
           <a:prstGeom prst="roundRect">
             <a:avLst>
-              <a:gd name="adj" fmla="val 6000"/>
+              <a:gd name="adj" fmla="val 5000"/>
             </a:avLst>
           </a:prstGeom>
           <a:solidFill>
@@ -14260,8 +14260,8 @@
         </p:nvSpPr>
         <p:spPr>
           <a:xfrm>
-            <a:off x="8121701" y="1801368"/>
-            <a:ext cx="1532077" cy="365760"/>
+            <a:off x="8158277" y="1947672"/>
+            <a:ext cx="1458925" cy="457200"/>
           </a:xfrm>
           <a:prstGeom prst="rect">
             <a:avLst/>
@@ -14277,7 +14277,7 @@
           <a:p>
             <a:pPr algn="l"/>
             <a:r>
-              <a:rPr lang="ja-JP" sz="1350" b="1" spc="10" dirty="0">
+              <a:rPr lang="ja-JP" sz="1700" b="1" spc="10" dirty="0">
                 <a:solidFill>
                   <a:srgbClr val="FFFFFF"/>
                 </a:solidFill>
@@ -14298,8 +14298,8 @@
         </p:nvSpPr>
         <p:spPr>
           <a:xfrm>
-            <a:off x="8121701" y="2148840"/>
-            <a:ext cx="1532077" cy="548640"/>
+            <a:off x="8158277" y="2441448"/>
+            <a:ext cx="1458925" cy="731520"/>
           </a:xfrm>
           <a:prstGeom prst="rect">
             <a:avLst/>
@@ -14315,7 +14315,7 @@
           <a:p>
             <a:pPr algn="l"/>
             <a:r>
-              <a:rPr lang="ja-JP" sz="1000" b="1" dirty="0">
+              <a:rPr lang="ja-JP" sz="1250" b="1" dirty="0">
                 <a:solidFill>
                   <a:srgbClr val="FFFFFF"/>
                 </a:solidFill>
@@ -14336,7 +14336,7 @@
         </p:nvCxnSpPr>
         <p:spPr>
           <a:xfrm>
-            <a:off x="9763506" y="2217420"/>
+            <a:off x="9763506" y="2514600"/>
             <a:ext cx="109728" cy="914"/>
           </a:xfrm>
           <a:prstGeom prst="line">
@@ -14359,12 +14359,12 @@
         </p:nvSpPr>
         <p:spPr>
           <a:xfrm>
-            <a:off x="9891522" y="1691640"/>
-            <a:ext cx="1714957" cy="1051560"/>
+            <a:off x="9891522" y="1783080"/>
+            <a:ext cx="1714957" cy="1463040"/>
           </a:xfrm>
           <a:prstGeom prst="roundRect">
             <a:avLst>
-              <a:gd name="adj" fmla="val 6000"/>
+              <a:gd name="adj" fmla="val 5000"/>
             </a:avLst>
           </a:prstGeom>
           <a:solidFill>
@@ -14388,8 +14388,8 @@
         </p:nvSpPr>
         <p:spPr>
           <a:xfrm>
-            <a:off x="9982962" y="1801368"/>
-            <a:ext cx="1532077" cy="365760"/>
+            <a:off x="10019538" y="1947672"/>
+            <a:ext cx="1458925" cy="457200"/>
           </a:xfrm>
           <a:prstGeom prst="rect">
             <a:avLst/>
@@ -14405,7 +14405,7 @@
           <a:p>
             <a:pPr algn="l"/>
             <a:r>
-              <a:rPr lang="ja-JP" sz="1350" b="1" spc="10" dirty="0">
+              <a:rPr lang="ja-JP" sz="1700" b="1" spc="10" dirty="0">
                 <a:solidFill>
                   <a:srgbClr val="FFFFFF"/>
                 </a:solidFill>
@@ -14426,8 +14426,8 @@
         </p:nvSpPr>
         <p:spPr>
           <a:xfrm>
-            <a:off x="9982962" y="2148840"/>
-            <a:ext cx="1532077" cy="548640"/>
+            <a:off x="10019538" y="2441448"/>
+            <a:ext cx="1458925" cy="731520"/>
           </a:xfrm>
           <a:prstGeom prst="rect">
             <a:avLst/>
@@ -14443,7 +14443,7 @@
           <a:p>
             <a:pPr algn="l"/>
             <a:r>
-              <a:rPr lang="ja-JP" sz="1000" b="1" dirty="0">
+              <a:rPr lang="ja-JP" sz="1250" b="1" dirty="0">
                 <a:solidFill>
                   <a:srgbClr val="FFFFFF"/>
                 </a:solidFill>
@@ -14464,8 +14464,8 @@
         </p:nvSpPr>
         <p:spPr>
           <a:xfrm>
-            <a:off x="585216" y="2971800"/>
-            <a:ext cx="11021263" cy="292608"/>
+            <a:off x="585216" y="3429000"/>
+            <a:ext cx="11021263" cy="310896"/>
           </a:xfrm>
           <a:prstGeom prst="rect">
             <a:avLst/>
@@ -14481,7 +14481,7 @@
           <a:p>
             <a:pPr algn="l"/>
             <a:r>
-              <a:rPr lang="ja-JP" sz="1100" b="1" spc="30" dirty="0">
+              <a:rPr lang="ja-JP" sz="1200" b="1" spc="30" dirty="0">
                 <a:solidFill>
                   <a:srgbClr val="1A1A1A"/>
                 </a:solidFill>
@@ -14502,8 +14502,8 @@
         </p:nvSpPr>
         <p:spPr>
           <a:xfrm>
-            <a:off x="585216" y="3383280"/>
-            <a:ext cx="1714957" cy="777240"/>
+            <a:off x="585216" y="3813048"/>
+            <a:ext cx="1714957" cy="1051560"/>
           </a:xfrm>
           <a:prstGeom prst="rect">
             <a:avLst/>
@@ -14532,8 +14532,8 @@
         </p:nvSpPr>
         <p:spPr>
           <a:xfrm>
-            <a:off x="676656" y="3383280"/>
-            <a:ext cx="1532077" cy="777240"/>
+            <a:off x="694944" y="3813048"/>
+            <a:ext cx="1495501" cy="1051560"/>
           </a:xfrm>
           <a:prstGeom prst="rect">
             <a:avLst/>
@@ -14549,11 +14549,11 @@
           <a:p>
             <a:pPr algn="ctr">
               <a:lnSpc>
-                <a:spcPct val="128000"/>
+                <a:spcPct val="132000"/>
               </a:lnSpc>
             </a:pPr>
             <a:r>
-              <a:rPr lang="ja-JP" sz="1050" b="1" dirty="0">
+              <a:rPr lang="ja-JP" sz="1300" b="1" dirty="0">
                 <a:solidFill>
                   <a:srgbClr val="1A1A1A"/>
                 </a:solidFill>
@@ -14574,7 +14574,7 @@
         </p:nvCxnSpPr>
         <p:spPr>
           <a:xfrm>
-            <a:off x="2318461" y="3771900"/>
+            <a:off x="2318461" y="4338828"/>
             <a:ext cx="109728" cy="914"/>
           </a:xfrm>
           <a:prstGeom prst="line">
@@ -14597,8 +14597,8 @@
         </p:nvSpPr>
         <p:spPr>
           <a:xfrm>
-            <a:off x="2446477" y="3383280"/>
-            <a:ext cx="1714957" cy="777240"/>
+            <a:off x="2446477" y="3813048"/>
+            <a:ext cx="1714957" cy="1051560"/>
           </a:xfrm>
           <a:prstGeom prst="rect">
             <a:avLst/>
@@ -14627,8 +14627,8 @@
         </p:nvSpPr>
         <p:spPr>
           <a:xfrm>
-            <a:off x="2537917" y="3383280"/>
-            <a:ext cx="1532077" cy="777240"/>
+            <a:off x="2556205" y="3813048"/>
+            <a:ext cx="1495501" cy="1051560"/>
           </a:xfrm>
           <a:prstGeom prst="rect">
             <a:avLst/>
@@ -14644,11 +14644,11 @@
           <a:p>
             <a:pPr algn="ctr">
               <a:lnSpc>
-                <a:spcPct val="128000"/>
+                <a:spcPct val="132000"/>
               </a:lnSpc>
             </a:pPr>
             <a:r>
-              <a:rPr lang="ja-JP" sz="1050" b="1" dirty="0">
+              <a:rPr lang="ja-JP" sz="1300" b="1" dirty="0">
                 <a:solidFill>
                   <a:srgbClr val="1A1A1A"/>
                 </a:solidFill>
@@ -14669,7 +14669,7 @@
         </p:nvCxnSpPr>
         <p:spPr>
           <a:xfrm>
-            <a:off x="4179722" y="3771900"/>
+            <a:off x="4179722" y="4338828"/>
             <a:ext cx="109728" cy="914"/>
           </a:xfrm>
           <a:prstGeom prst="line">
@@ -14692,8 +14692,8 @@
         </p:nvSpPr>
         <p:spPr>
           <a:xfrm>
-            <a:off x="4307738" y="3383280"/>
-            <a:ext cx="1714957" cy="777240"/>
+            <a:off x="4307738" y="3813048"/>
+            <a:ext cx="1714957" cy="1051560"/>
           </a:xfrm>
           <a:prstGeom prst="rect">
             <a:avLst/>
@@ -14722,8 +14722,8 @@
         </p:nvSpPr>
         <p:spPr>
           <a:xfrm>
-            <a:off x="4399178" y="3383280"/>
-            <a:ext cx="1532077" cy="777240"/>
+            <a:off x="4417466" y="3813048"/>
+            <a:ext cx="1495501" cy="1051560"/>
           </a:xfrm>
           <a:prstGeom prst="rect">
             <a:avLst/>
@@ -14739,11 +14739,11 @@
           <a:p>
             <a:pPr algn="ctr">
               <a:lnSpc>
-                <a:spcPct val="128000"/>
+                <a:spcPct val="132000"/>
               </a:lnSpc>
             </a:pPr>
             <a:r>
-              <a:rPr lang="ja-JP" sz="1050" b="1" dirty="0">
+              <a:rPr lang="ja-JP" sz="1300" b="1" dirty="0">
                 <a:solidFill>
                   <a:srgbClr val="1A1A1A"/>
                 </a:solidFill>
@@ -14764,7 +14764,7 @@
         </p:nvCxnSpPr>
         <p:spPr>
           <a:xfrm>
-            <a:off x="6040984" y="3771900"/>
+            <a:off x="6040984" y="4338828"/>
             <a:ext cx="109728" cy="914"/>
           </a:xfrm>
           <a:prstGeom prst="line">
@@ -14787,8 +14787,8 @@
         </p:nvSpPr>
         <p:spPr>
           <a:xfrm>
-            <a:off x="6169000" y="3383280"/>
-            <a:ext cx="1714957" cy="777240"/>
+            <a:off x="6169000" y="3813048"/>
+            <a:ext cx="1714957" cy="1051560"/>
           </a:xfrm>
           <a:prstGeom prst="rect">
             <a:avLst/>
@@ -14817,8 +14817,8 @@
         </p:nvSpPr>
         <p:spPr>
           <a:xfrm>
-            <a:off x="6260440" y="3383280"/>
-            <a:ext cx="1532077" cy="777240"/>
+            <a:off x="6278728" y="3813048"/>
+            <a:ext cx="1495501" cy="1051560"/>
           </a:xfrm>
           <a:prstGeom prst="rect">
             <a:avLst/>
@@ -14834,11 +14834,11 @@
           <a:p>
             <a:pPr algn="ctr">
               <a:lnSpc>
-                <a:spcPct val="128000"/>
+                <a:spcPct val="132000"/>
               </a:lnSpc>
             </a:pPr>
             <a:r>
-              <a:rPr lang="ja-JP" sz="1050" b="1" dirty="0">
+              <a:rPr lang="ja-JP" sz="1300" b="1" dirty="0">
                 <a:solidFill>
                   <a:srgbClr val="1A1A1A"/>
                 </a:solidFill>
@@ -14859,7 +14859,7 @@
         </p:nvCxnSpPr>
         <p:spPr>
           <a:xfrm>
-            <a:off x="7902245" y="3771900"/>
+            <a:off x="7902245" y="4338828"/>
             <a:ext cx="109728" cy="914"/>
           </a:xfrm>
           <a:prstGeom prst="line">
@@ -14882,8 +14882,8 @@
         </p:nvSpPr>
         <p:spPr>
           <a:xfrm>
-            <a:off x="8030261" y="3383280"/>
-            <a:ext cx="1714957" cy="777240"/>
+            <a:off x="8030261" y="3813048"/>
+            <a:ext cx="1714957" cy="1051560"/>
           </a:xfrm>
           <a:prstGeom prst="rect">
             <a:avLst/>
@@ -14912,8 +14912,8 @@
         </p:nvSpPr>
         <p:spPr>
           <a:xfrm>
-            <a:off x="8121701" y="3383280"/>
-            <a:ext cx="1532077" cy="777240"/>
+            <a:off x="8139989" y="3813048"/>
+            <a:ext cx="1495501" cy="1051560"/>
           </a:xfrm>
           <a:prstGeom prst="rect">
             <a:avLst/>
@@ -14929,11 +14929,11 @@
           <a:p>
             <a:pPr algn="ctr">
               <a:lnSpc>
-                <a:spcPct val="128000"/>
+                <a:spcPct val="132000"/>
               </a:lnSpc>
             </a:pPr>
             <a:r>
-              <a:rPr lang="ja-JP" sz="1050" b="1" dirty="0">
+              <a:rPr lang="ja-JP" sz="1300" b="1" dirty="0">
                 <a:solidFill>
                   <a:srgbClr val="1A1A1A"/>
                 </a:solidFill>
@@ -14954,7 +14954,7 @@
         </p:nvCxnSpPr>
         <p:spPr>
           <a:xfrm>
-            <a:off x="9763506" y="3771900"/>
+            <a:off x="9763506" y="4338828"/>
             <a:ext cx="109728" cy="914"/>
           </a:xfrm>
           <a:prstGeom prst="line">
@@ -14977,8 +14977,8 @@
         </p:nvSpPr>
         <p:spPr>
           <a:xfrm>
-            <a:off x="9891522" y="3383280"/>
-            <a:ext cx="1714957" cy="777240"/>
+            <a:off x="9891522" y="3813048"/>
+            <a:ext cx="1714957" cy="1051560"/>
           </a:xfrm>
           <a:prstGeom prst="rect">
             <a:avLst/>
@@ -15007,8 +15007,8 @@
         </p:nvSpPr>
         <p:spPr>
           <a:xfrm>
-            <a:off x="9982962" y="3383280"/>
-            <a:ext cx="1532077" cy="777240"/>
+            <a:off x="10001250" y="3813048"/>
+            <a:ext cx="1495501" cy="1051560"/>
           </a:xfrm>
           <a:prstGeom prst="rect">
             <a:avLst/>
@@ -15024,11 +15024,11 @@
           <a:p>
             <a:pPr algn="ctr">
               <a:lnSpc>
-                <a:spcPct val="128000"/>
+                <a:spcPct val="132000"/>
               </a:lnSpc>
             </a:pPr>
             <a:r>
-              <a:rPr lang="ja-JP" sz="1050" b="1" dirty="0">
+              <a:rPr lang="ja-JP" sz="1300" b="1" dirty="0">
                 <a:solidFill>
                   <a:srgbClr val="1A1A1A"/>
                 </a:solidFill>
@@ -15049,7 +15049,7 @@
         </p:nvCxnSpPr>
         <p:spPr>
           <a:xfrm>
-            <a:off x="585216" y="4434840"/>
+            <a:off x="585216" y="5084064"/>
             <a:ext cx="11021263" cy="914"/>
           </a:xfrm>
           <a:prstGeom prst="line">
@@ -15072,8 +15072,8 @@
         </p:nvSpPr>
         <p:spPr>
           <a:xfrm>
-            <a:off x="585216" y="4617720"/>
-            <a:ext cx="11021263" cy="1280160"/>
+            <a:off x="585216" y="5248656"/>
+            <a:ext cx="11021263" cy="777240"/>
           </a:xfrm>
           <a:prstGeom prst="rect">
             <a:avLst/>
@@ -15089,11 +15089,11 @@
           <a:p>
             <a:pPr algn="l">
               <a:lnSpc>
-                <a:spcPct val="160000"/>
+                <a:spcPct val="165000"/>
               </a:lnSpc>
             </a:pPr>
             <a:r>
-              <a:rPr lang="ja-JP" sz="1200" dirty="0">
+              <a:rPr lang="ja-JP" sz="1350" dirty="0">
                 <a:solidFill>
                   <a:srgbClr val="1A1A1A"/>
                 </a:solidFill>
@@ -15107,11 +15107,11 @@
           <a:p>
             <a:pPr algn="l">
               <a:lnSpc>
-                <a:spcPct val="160000"/>
+                <a:spcPct val="165000"/>
               </a:lnSpc>
             </a:pPr>
             <a:r>
-              <a:rPr lang="ja-JP" sz="1200" dirty="0">
+              <a:rPr lang="ja-JP" sz="1350" dirty="0">
                 <a:solidFill>
                   <a:srgbClr val="1A1A1A"/>
                 </a:solidFill>
@@ -15322,7 +15322,7 @@
         <p:spPr>
           <a:xfrm>
             <a:off x="969264" y="365760"/>
-            <a:ext cx="7315200" cy="310896"/>
+            <a:ext cx="8229600" cy="310896"/>
           </a:xfrm>
           <a:prstGeom prst="rect">
             <a:avLst/>
@@ -15338,7 +15338,7 @@
           <a:p>
             <a:pPr algn="l"/>
             <a:r>
-              <a:rPr lang="ja-JP" sz="1250" b="1" spc="60" dirty="0">
+              <a:rPr lang="ja-JP" sz="1200" b="1" spc="60" dirty="0">
                 <a:solidFill>
                   <a:srgbClr val="FF6A00"/>
                 </a:solidFill>
@@ -15349,7 +15349,7 @@
               <a:t>INDEX  </a:t>
             </a:r>
             <a:r>
-              <a:rPr lang="ja-JP" sz="1100" b="1" spc="20" dirty="0">
+              <a:rPr lang="ja-JP" sz="1050" b="1" spc="20" dirty="0">
                 <a:solidFill>
                   <a:srgbClr val="1A1A1A"/>
                 </a:solidFill>
@@ -15370,7 +15370,7 @@
         </p:nvSpPr>
         <p:spPr>
           <a:xfrm>
-            <a:off x="585216" y="841248"/>
+            <a:off x="585216" y="822960"/>
             <a:ext cx="7315200" cy="914400"/>
           </a:xfrm>
           <a:prstGeom prst="rect">
@@ -15391,7 +15391,7 @@
               </a:lnSpc>
             </a:pPr>
             <a:r>
-              <a:rPr lang="ja-JP" sz="3000" b="1" dirty="0">
+              <a:rPr lang="ja-JP" sz="3300" b="1" dirty="0">
                 <a:solidFill>
                   <a:srgbClr val="1A1A1A"/>
                 </a:solidFill>
@@ -15454,8 +15454,8 @@
         </p:nvSpPr>
         <p:spPr>
           <a:xfrm>
-            <a:off x="585216" y="2331720"/>
-            <a:ext cx="1496089" cy="868680"/>
+            <a:off x="585216" y="2103120"/>
+            <a:ext cx="1496089" cy="1508760"/>
           </a:xfrm>
           <a:prstGeom prst="chevron">
             <a:avLst>
@@ -15484,8 +15484,8 @@
         </p:nvSpPr>
         <p:spPr>
           <a:xfrm>
-            <a:off x="896112" y="2423160"/>
-            <a:ext cx="1093753" cy="292608"/>
+            <a:off x="896112" y="2286000"/>
+            <a:ext cx="1093753" cy="365760"/>
           </a:xfrm>
           <a:prstGeom prst="rect">
             <a:avLst/>
@@ -15501,7 +15501,7 @@
           <a:p>
             <a:pPr algn="l"/>
             <a:r>
-              <a:rPr lang="ja-JP" sz="1700" b="1" dirty="0">
+              <a:rPr lang="ja-JP" sz="2200" b="1" dirty="0">
                 <a:solidFill>
                   <a:srgbClr val="FFFFFF"/>
                 </a:solidFill>
@@ -15522,8 +15522,8 @@
         </p:nvSpPr>
         <p:spPr>
           <a:xfrm>
-            <a:off x="896112" y="2715768"/>
-            <a:ext cx="1093753" cy="457200"/>
+            <a:off x="896112" y="2761488"/>
+            <a:ext cx="1093753" cy="548640"/>
           </a:xfrm>
           <a:prstGeom prst="rect">
             <a:avLst/>
@@ -15539,7 +15539,7 @@
           <a:p>
             <a:pPr algn="l"/>
             <a:r>
-              <a:rPr lang="ja-JP" sz="1250" b="1" spc="10" dirty="0">
+              <a:rPr lang="ja-JP" sz="1500" b="1" spc="10" dirty="0">
                 <a:solidFill>
                   <a:srgbClr val="FFFFFF"/>
                 </a:solidFill>
@@ -15560,8 +15560,8 @@
         </p:nvSpPr>
         <p:spPr>
           <a:xfrm>
-            <a:off x="585216" y="3310128"/>
-            <a:ext cx="1496089" cy="548640"/>
+            <a:off x="585216" y="3758184"/>
+            <a:ext cx="1496089" cy="457200"/>
           </a:xfrm>
           <a:prstGeom prst="rect">
             <a:avLst/>
@@ -15577,7 +15577,7 @@
           <a:p>
             <a:pPr algn="ctr"/>
             <a:r>
-              <a:rPr lang="ja-JP" sz="1050" dirty="0">
+              <a:rPr lang="ja-JP" sz="1200" b="1" dirty="0">
                 <a:solidFill>
                   <a:srgbClr val="1A1A1A"/>
                 </a:solidFill>
@@ -15598,8 +15598,8 @@
         </p:nvSpPr>
         <p:spPr>
           <a:xfrm>
-            <a:off x="2172745" y="2331720"/>
-            <a:ext cx="1496089" cy="868680"/>
+            <a:off x="2172745" y="2103120"/>
+            <a:ext cx="1496089" cy="1508760"/>
           </a:xfrm>
           <a:prstGeom prst="chevron">
             <a:avLst>
@@ -15628,8 +15628,8 @@
         </p:nvSpPr>
         <p:spPr>
           <a:xfrm>
-            <a:off x="2483641" y="2423160"/>
-            <a:ext cx="1093753" cy="292608"/>
+            <a:off x="2483641" y="2286000"/>
+            <a:ext cx="1093753" cy="365760"/>
           </a:xfrm>
           <a:prstGeom prst="rect">
             <a:avLst/>
@@ -15645,7 +15645,7 @@
           <a:p>
             <a:pPr algn="l"/>
             <a:r>
-              <a:rPr lang="ja-JP" sz="1700" b="1" dirty="0">
+              <a:rPr lang="ja-JP" sz="2200" b="1" dirty="0">
                 <a:solidFill>
                   <a:srgbClr val="FFFFFF"/>
                 </a:solidFill>
@@ -15666,8 +15666,8 @@
         </p:nvSpPr>
         <p:spPr>
           <a:xfrm>
-            <a:off x="2483641" y="2715768"/>
-            <a:ext cx="1093753" cy="457200"/>
+            <a:off x="2483641" y="2761488"/>
+            <a:ext cx="1093753" cy="548640"/>
           </a:xfrm>
           <a:prstGeom prst="rect">
             <a:avLst/>
@@ -15683,7 +15683,7 @@
           <a:p>
             <a:pPr algn="l"/>
             <a:r>
-              <a:rPr lang="ja-JP" sz="1250" b="1" spc="10" dirty="0">
+              <a:rPr lang="ja-JP" sz="1500" b="1" spc="10" dirty="0">
                 <a:solidFill>
                   <a:srgbClr val="FFFFFF"/>
                 </a:solidFill>
@@ -15704,8 +15704,8 @@
         </p:nvSpPr>
         <p:spPr>
           <a:xfrm>
-            <a:off x="2172745" y="3310128"/>
-            <a:ext cx="1496089" cy="548640"/>
+            <a:off x="2172745" y="3758184"/>
+            <a:ext cx="1496089" cy="457200"/>
           </a:xfrm>
           <a:prstGeom prst="rect">
             <a:avLst/>
@@ -15721,7 +15721,7 @@
           <a:p>
             <a:pPr algn="ctr"/>
             <a:r>
-              <a:rPr lang="ja-JP" sz="1050" dirty="0">
+              <a:rPr lang="ja-JP" sz="1200" b="1" dirty="0">
                 <a:solidFill>
                   <a:srgbClr val="1A1A1A"/>
                 </a:solidFill>
@@ -15742,8 +15742,8 @@
         </p:nvSpPr>
         <p:spPr>
           <a:xfrm>
-            <a:off x="3760274" y="2331720"/>
-            <a:ext cx="1496089" cy="868680"/>
+            <a:off x="3760274" y="2103120"/>
+            <a:ext cx="1496089" cy="1508760"/>
           </a:xfrm>
           <a:prstGeom prst="chevron">
             <a:avLst>
@@ -15772,8 +15772,8 @@
         </p:nvSpPr>
         <p:spPr>
           <a:xfrm>
-            <a:off x="4071170" y="2423160"/>
-            <a:ext cx="1093753" cy="292608"/>
+            <a:off x="4071170" y="2286000"/>
+            <a:ext cx="1093753" cy="365760"/>
           </a:xfrm>
           <a:prstGeom prst="rect">
             <a:avLst/>
@@ -15789,7 +15789,7 @@
           <a:p>
             <a:pPr algn="l"/>
             <a:r>
-              <a:rPr lang="ja-JP" sz="1700" b="1" dirty="0">
+              <a:rPr lang="ja-JP" sz="2200" b="1" dirty="0">
                 <a:solidFill>
                   <a:srgbClr val="FFFFFF"/>
                 </a:solidFill>
@@ -15810,8 +15810,8 @@
         </p:nvSpPr>
         <p:spPr>
           <a:xfrm>
-            <a:off x="4071170" y="2715768"/>
-            <a:ext cx="1093753" cy="457200"/>
+            <a:off x="4071170" y="2761488"/>
+            <a:ext cx="1093753" cy="548640"/>
           </a:xfrm>
           <a:prstGeom prst="rect">
             <a:avLst/>
@@ -15827,7 +15827,7 @@
           <a:p>
             <a:pPr algn="l"/>
             <a:r>
-              <a:rPr lang="ja-JP" sz="1250" b="1" spc="10" dirty="0">
+              <a:rPr lang="ja-JP" sz="1500" b="1" spc="10" dirty="0">
                 <a:solidFill>
                   <a:srgbClr val="FFFFFF"/>
                 </a:solidFill>
@@ -15848,8 +15848,8 @@
         </p:nvSpPr>
         <p:spPr>
           <a:xfrm>
-            <a:off x="3760274" y="3310128"/>
-            <a:ext cx="1496089" cy="548640"/>
+            <a:off x="3760274" y="3758184"/>
+            <a:ext cx="1496089" cy="457200"/>
           </a:xfrm>
           <a:prstGeom prst="rect">
             <a:avLst/>
@@ -15865,7 +15865,7 @@
           <a:p>
             <a:pPr algn="ctr"/>
             <a:r>
-              <a:rPr lang="ja-JP" sz="1050" dirty="0">
+              <a:rPr lang="ja-JP" sz="1200" b="1" dirty="0">
                 <a:solidFill>
                   <a:srgbClr val="1A1A1A"/>
                 </a:solidFill>
@@ -15886,8 +15886,8 @@
         </p:nvSpPr>
         <p:spPr>
           <a:xfrm>
-            <a:off x="5347803" y="2331720"/>
-            <a:ext cx="1496089" cy="868680"/>
+            <a:off x="5347803" y="2103120"/>
+            <a:ext cx="1496089" cy="1508760"/>
           </a:xfrm>
           <a:prstGeom prst="chevron">
             <a:avLst>
@@ -15916,8 +15916,8 @@
         </p:nvSpPr>
         <p:spPr>
           <a:xfrm>
-            <a:off x="5658699" y="2423160"/>
-            <a:ext cx="1093753" cy="292608"/>
+            <a:off x="5658699" y="2286000"/>
+            <a:ext cx="1093753" cy="365760"/>
           </a:xfrm>
           <a:prstGeom prst="rect">
             <a:avLst/>
@@ -15933,7 +15933,7 @@
           <a:p>
             <a:pPr algn="l"/>
             <a:r>
-              <a:rPr lang="ja-JP" sz="1700" b="1" dirty="0">
+              <a:rPr lang="ja-JP" sz="2200" b="1" dirty="0">
                 <a:solidFill>
                   <a:srgbClr val="FFFFFF"/>
                 </a:solidFill>
@@ -15954,8 +15954,8 @@
         </p:nvSpPr>
         <p:spPr>
           <a:xfrm>
-            <a:off x="5658699" y="2715768"/>
-            <a:ext cx="1093753" cy="457200"/>
+            <a:off x="5658699" y="2761488"/>
+            <a:ext cx="1093753" cy="548640"/>
           </a:xfrm>
           <a:prstGeom prst="rect">
             <a:avLst/>
@@ -15971,7 +15971,7 @@
           <a:p>
             <a:pPr algn="l"/>
             <a:r>
-              <a:rPr lang="ja-JP" sz="1250" b="1" spc="10" dirty="0">
+              <a:rPr lang="ja-JP" sz="1500" b="1" spc="10" dirty="0">
                 <a:solidFill>
                   <a:srgbClr val="FFFFFF"/>
                 </a:solidFill>
@@ -15992,8 +15992,8 @@
         </p:nvSpPr>
         <p:spPr>
           <a:xfrm>
-            <a:off x="5347803" y="3310128"/>
-            <a:ext cx="1496089" cy="548640"/>
+            <a:off x="5347803" y="3758184"/>
+            <a:ext cx="1496089" cy="457200"/>
           </a:xfrm>
           <a:prstGeom prst="rect">
             <a:avLst/>
@@ -16009,7 +16009,7 @@
           <a:p>
             <a:pPr algn="ctr"/>
             <a:r>
-              <a:rPr lang="ja-JP" sz="1050" dirty="0">
+              <a:rPr lang="ja-JP" sz="1200" b="1" dirty="0">
                 <a:solidFill>
                   <a:srgbClr val="1A1A1A"/>
                 </a:solidFill>
@@ -16030,8 +16030,8 @@
         </p:nvSpPr>
         <p:spPr>
           <a:xfrm>
-            <a:off x="6935332" y="2331720"/>
-            <a:ext cx="1496089" cy="868680"/>
+            <a:off x="6935332" y="2103120"/>
+            <a:ext cx="1496089" cy="1508760"/>
           </a:xfrm>
           <a:prstGeom prst="chevron">
             <a:avLst>
@@ -16060,8 +16060,8 @@
         </p:nvSpPr>
         <p:spPr>
           <a:xfrm>
-            <a:off x="7246228" y="2423160"/>
-            <a:ext cx="1093753" cy="292608"/>
+            <a:off x="7246228" y="2286000"/>
+            <a:ext cx="1093753" cy="365760"/>
           </a:xfrm>
           <a:prstGeom prst="rect">
             <a:avLst/>
@@ -16077,7 +16077,7 @@
           <a:p>
             <a:pPr algn="l"/>
             <a:r>
-              <a:rPr lang="ja-JP" sz="1700" b="1" dirty="0">
+              <a:rPr lang="ja-JP" sz="2200" b="1" dirty="0">
                 <a:solidFill>
                   <a:srgbClr val="FFFFFF"/>
                 </a:solidFill>
@@ -16098,8 +16098,8 @@
         </p:nvSpPr>
         <p:spPr>
           <a:xfrm>
-            <a:off x="7246228" y="2715768"/>
-            <a:ext cx="1093753" cy="457200"/>
+            <a:off x="7246228" y="2761488"/>
+            <a:ext cx="1093753" cy="548640"/>
           </a:xfrm>
           <a:prstGeom prst="rect">
             <a:avLst/>
@@ -16115,7 +16115,7 @@
           <a:p>
             <a:pPr algn="l"/>
             <a:r>
-              <a:rPr lang="ja-JP" sz="1250" b="1" spc="10" dirty="0">
+              <a:rPr lang="ja-JP" sz="1500" b="1" spc="10" dirty="0">
                 <a:solidFill>
                   <a:srgbClr val="FFFFFF"/>
                 </a:solidFill>
@@ -16136,8 +16136,8 @@
         </p:nvSpPr>
         <p:spPr>
           <a:xfrm>
-            <a:off x="6935332" y="3310128"/>
-            <a:ext cx="1496089" cy="548640"/>
+            <a:off x="6935332" y="3758184"/>
+            <a:ext cx="1496089" cy="457200"/>
           </a:xfrm>
           <a:prstGeom prst="rect">
             <a:avLst/>
@@ -16153,7 +16153,7 @@
           <a:p>
             <a:pPr algn="ctr"/>
             <a:r>
-              <a:rPr lang="ja-JP" sz="1050" dirty="0">
+              <a:rPr lang="ja-JP" sz="1200" b="1" dirty="0">
                 <a:solidFill>
                   <a:srgbClr val="1A1A1A"/>
                 </a:solidFill>
@@ -16174,8 +16174,8 @@
         </p:nvSpPr>
         <p:spPr>
           <a:xfrm>
-            <a:off x="8522861" y="2331720"/>
-            <a:ext cx="1496089" cy="868680"/>
+            <a:off x="8522861" y="2103120"/>
+            <a:ext cx="1496089" cy="1508760"/>
           </a:xfrm>
           <a:prstGeom prst="chevron">
             <a:avLst>
@@ -16204,8 +16204,8 @@
         </p:nvSpPr>
         <p:spPr>
           <a:xfrm>
-            <a:off x="8833757" y="2423160"/>
-            <a:ext cx="1093753" cy="292608"/>
+            <a:off x="8833757" y="2286000"/>
+            <a:ext cx="1093753" cy="365760"/>
           </a:xfrm>
           <a:prstGeom prst="rect">
             <a:avLst/>
@@ -16221,7 +16221,7 @@
           <a:p>
             <a:pPr algn="l"/>
             <a:r>
-              <a:rPr lang="ja-JP" sz="1700" b="1" dirty="0">
+              <a:rPr lang="ja-JP" sz="2200" b="1" dirty="0">
                 <a:solidFill>
                   <a:srgbClr val="FFFFFF"/>
                 </a:solidFill>
@@ -16242,8 +16242,8 @@
         </p:nvSpPr>
         <p:spPr>
           <a:xfrm>
-            <a:off x="8833757" y="2715768"/>
-            <a:ext cx="1093753" cy="457200"/>
+            <a:off x="8833757" y="2761488"/>
+            <a:ext cx="1093753" cy="548640"/>
           </a:xfrm>
           <a:prstGeom prst="rect">
             <a:avLst/>
@@ -16259,7 +16259,7 @@
           <a:p>
             <a:pPr algn="l"/>
             <a:r>
-              <a:rPr lang="ja-JP" sz="1250" b="1" spc="10" dirty="0">
+              <a:rPr lang="ja-JP" sz="1500" b="1" spc="10" dirty="0">
                 <a:solidFill>
                   <a:srgbClr val="FFFFFF"/>
                 </a:solidFill>
@@ -16280,8 +16280,8 @@
         </p:nvSpPr>
         <p:spPr>
           <a:xfrm>
-            <a:off x="8522861" y="3310128"/>
-            <a:ext cx="1496089" cy="548640"/>
+            <a:off x="8522861" y="3758184"/>
+            <a:ext cx="1496089" cy="457200"/>
           </a:xfrm>
           <a:prstGeom prst="rect">
             <a:avLst/>
@@ -16297,7 +16297,7 @@
           <a:p>
             <a:pPr algn="ctr"/>
             <a:r>
-              <a:rPr lang="ja-JP" sz="1050" dirty="0">
+              <a:rPr lang="ja-JP" sz="1200" b="1" dirty="0">
                 <a:solidFill>
                   <a:srgbClr val="1A1A1A"/>
                 </a:solidFill>
@@ -16318,8 +16318,8 @@
         </p:nvSpPr>
         <p:spPr>
           <a:xfrm>
-            <a:off x="10110390" y="2331720"/>
-            <a:ext cx="1496089" cy="868680"/>
+            <a:off x="10110390" y="2103120"/>
+            <a:ext cx="1496089" cy="1508760"/>
           </a:xfrm>
           <a:prstGeom prst="rect">
             <a:avLst/>
@@ -16345,8 +16345,8 @@
         </p:nvSpPr>
         <p:spPr>
           <a:xfrm>
-            <a:off x="10421286" y="2423160"/>
-            <a:ext cx="1093753" cy="292608"/>
+            <a:off x="10421286" y="2286000"/>
+            <a:ext cx="1093753" cy="365760"/>
           </a:xfrm>
           <a:prstGeom prst="rect">
             <a:avLst/>
@@ -16362,7 +16362,7 @@
           <a:p>
             <a:pPr algn="l"/>
             <a:r>
-              <a:rPr lang="ja-JP" sz="1700" b="1" dirty="0">
+              <a:rPr lang="ja-JP" sz="2200" b="1" dirty="0">
                 <a:solidFill>
                   <a:srgbClr val="FFFFFF"/>
                 </a:solidFill>
@@ -16383,8 +16383,8 @@
         </p:nvSpPr>
         <p:spPr>
           <a:xfrm>
-            <a:off x="10421286" y="2715768"/>
-            <a:ext cx="1093753" cy="457200"/>
+            <a:off x="10421286" y="2761488"/>
+            <a:ext cx="1093753" cy="548640"/>
           </a:xfrm>
           <a:prstGeom prst="rect">
             <a:avLst/>
@@ -16400,7 +16400,7 @@
           <a:p>
             <a:pPr algn="l"/>
             <a:r>
-              <a:rPr lang="ja-JP" sz="1250" b="1" spc="10" dirty="0">
+              <a:rPr lang="ja-JP" sz="1500" b="1" spc="10" dirty="0">
                 <a:solidFill>
                   <a:srgbClr val="FFFFFF"/>
                 </a:solidFill>
@@ -16421,8 +16421,8 @@
         </p:nvSpPr>
         <p:spPr>
           <a:xfrm>
-            <a:off x="10110390" y="3310128"/>
-            <a:ext cx="1496089" cy="548640"/>
+            <a:off x="10110390" y="3758184"/>
+            <a:ext cx="1496089" cy="457200"/>
           </a:xfrm>
           <a:prstGeom prst="rect">
             <a:avLst/>
@@ -16438,7 +16438,7 @@
           <a:p>
             <a:pPr algn="ctr"/>
             <a:r>
-              <a:rPr lang="ja-JP" sz="1050" dirty="0">
+              <a:rPr lang="ja-JP" sz="1200" b="1" dirty="0">
                 <a:solidFill>
                   <a:srgbClr val="1A1A1A"/>
                 </a:solidFill>
@@ -16459,7 +16459,7 @@
         </p:nvCxnSpPr>
         <p:spPr>
           <a:xfrm>
-            <a:off x="585216" y="3977640"/>
+            <a:off x="585216" y="4389120"/>
             <a:ext cx="11021263" cy="914"/>
           </a:xfrm>
           <a:prstGeom prst="line">
@@ -16482,7 +16482,7 @@
         </p:nvSpPr>
         <p:spPr>
           <a:xfrm>
-            <a:off x="585216" y="4160520"/>
+            <a:off x="585216" y="4590288"/>
             <a:ext cx="11021263" cy="548640"/>
           </a:xfrm>
           <a:prstGeom prst="rect">
@@ -16499,11 +16499,11 @@
           <a:p>
             <a:pPr algn="l">
               <a:lnSpc>
-                <a:spcPct val="155000"/>
+                <a:spcPct val="160000"/>
               </a:lnSpc>
             </a:pPr>
             <a:r>
-              <a:rPr lang="ja-JP" sz="1150" dirty="0">
+              <a:rPr lang="ja-JP" sz="1400" dirty="0">
                 <a:solidFill>
                   <a:srgbClr val="1A1A1A"/>
                 </a:solidFill>
@@ -16516,9 +16516,408 @@
           </a:p>
         </p:txBody>
       </p:sp>
+      <p:sp>
+        <p:nvSpPr>
+          <p:cNvPr id="37" name="PhaseNote0"/>
+          <p:cNvSpPr/>
+          <p:nvPr/>
+        </p:nvSpPr>
+        <p:spPr>
+          <a:xfrm>
+            <a:off x="585216" y="5394960"/>
+            <a:ext cx="3490874" cy="822960"/>
+          </a:xfrm>
+          <a:prstGeom prst="rect">
+            <a:avLst/>
+          </a:prstGeom>
+          <a:solidFill>
+            <a:srgbClr val="FFFFFF"/>
+          </a:solidFill>
+          <a:ln w="15875" cap="flat">
+            <a:solidFill>
+              <a:srgbClr val="FF6A00"/>
+            </a:solidFill>
+            <a:round/>
+          </a:ln>
+        </p:spPr>
+        <p:txBody>
+          <a:bodyPr/>
+          <a:lstStyle/>
+          <a:p/>
+        </p:txBody>
+      </p:sp>
+      <p:sp>
+        <p:nvSpPr>
+          <p:cNvPr id="38" name="PhaseAccent0"/>
+          <p:cNvSpPr/>
+          <p:nvPr/>
+        </p:nvSpPr>
+        <p:spPr>
+          <a:xfrm>
+            <a:off x="585216" y="5394960"/>
+            <a:ext cx="73152" cy="822960"/>
+          </a:xfrm>
+          <a:prstGeom prst="rect">
+            <a:avLst/>
+          </a:prstGeom>
+          <a:solidFill>
+            <a:srgbClr val="FF6A00"/>
+          </a:solidFill>
+          <a:ln>
+            <a:noFill/>
+          </a:ln>
+        </p:spPr>
+        <p:txBody>
+          <a:bodyPr/>
+          <a:lstStyle/>
+          <a:p/>
+        </p:txBody>
+      </p:sp>
+      <p:sp>
+        <p:nvSpPr>
+          <p:cNvPr id="39" name="TextBox"/>
+          <p:cNvSpPr txBox="1"/>
+          <p:nvPr/>
+        </p:nvSpPr>
+        <p:spPr>
+          <a:xfrm>
+            <a:off x="822960" y="5522976"/>
+            <a:ext cx="3125114" cy="274320"/>
+          </a:xfrm>
+          <a:prstGeom prst="rect">
+            <a:avLst/>
+          </a:prstGeom>
+          <a:noFill/>
+          <a:ln>
+            <a:noFill/>
+          </a:ln>
+        </p:spPr>
+        <p:txBody>
+          <a:bodyPr wrap="square" anchor="t" lIns="45720" rIns="45720" tIns="27432" bIns="27432"/>
+          <a:lstStyle/>
+          <a:p>
+            <a:pPr algn="l"/>
+            <a:r>
+              <a:rPr lang="ja-JP" sz="1300" b="1" spc="20" dirty="0">
+                <a:solidFill>
+                  <a:srgbClr val="FF6A00"/>
+                </a:solidFill>
+                <a:latin typeface="Montserrat"/>
+                <a:ea typeface="Montserrat"/>
+                <a:cs typeface="Montserrat"/>
+              </a:rPr>
+              <a:t>PHASE 1-3</a:t>
+            </a:r>
+          </a:p>
+        </p:txBody>
+      </p:sp>
+      <p:sp>
+        <p:nvSpPr>
+          <p:cNvPr id="40" name="TextBox"/>
+          <p:cNvSpPr txBox="1"/>
+          <p:nvPr/>
+        </p:nvSpPr>
+        <p:spPr>
+          <a:xfrm>
+            <a:off x="822960" y="5815584"/>
+            <a:ext cx="3125114" cy="329184"/>
+          </a:xfrm>
+          <a:prstGeom prst="rect">
+            <a:avLst/>
+          </a:prstGeom>
+          <a:noFill/>
+          <a:ln>
+            <a:noFill/>
+          </a:ln>
+        </p:spPr>
+        <p:txBody>
+          <a:bodyPr wrap="square" anchor="t" lIns="45720" rIns="45720" tIns="27432" bIns="27432"/>
+          <a:lstStyle/>
+          <a:p>
+            <a:pPr algn="l"/>
+            <a:r>
+              <a:rPr lang="ja-JP" sz="1200" b="1" dirty="0">
+                <a:solidFill>
+                  <a:srgbClr val="1A1A1A"/>
+                </a:solidFill>
+                <a:latin typeface="Noto Sans JP"/>
+                <a:ea typeface="Noto Sans JP"/>
+                <a:cs typeface="Noto Sans JP"/>
+              </a:rPr>
+              <a:t>認知・共感・理解を積み上げる</a:t>
+            </a:r>
+          </a:p>
+        </p:txBody>
+      </p:sp>
+      <p:sp>
+        <p:nvSpPr>
+          <p:cNvPr id="41" name="PhaseNote1"/>
+          <p:cNvSpPr/>
+          <p:nvPr/>
+        </p:nvSpPr>
+        <p:spPr>
+          <a:xfrm>
+            <a:off x="4350410" y="5394960"/>
+            <a:ext cx="3490874" cy="822960"/>
+          </a:xfrm>
+          <a:prstGeom prst="rect">
+            <a:avLst/>
+          </a:prstGeom>
+          <a:solidFill>
+            <a:srgbClr val="FFFFFF"/>
+          </a:solidFill>
+          <a:ln w="15875" cap="flat">
+            <a:solidFill>
+              <a:srgbClr val="00C2D1"/>
+            </a:solidFill>
+            <a:round/>
+          </a:ln>
+        </p:spPr>
+        <p:txBody>
+          <a:bodyPr/>
+          <a:lstStyle/>
+          <a:p/>
+        </p:txBody>
+      </p:sp>
+      <p:sp>
+        <p:nvSpPr>
+          <p:cNvPr id="42" name="PhaseAccent1"/>
+          <p:cNvSpPr/>
+          <p:nvPr/>
+        </p:nvSpPr>
+        <p:spPr>
+          <a:xfrm>
+            <a:off x="4350410" y="5394960"/>
+            <a:ext cx="73152" cy="822960"/>
+          </a:xfrm>
+          <a:prstGeom prst="rect">
+            <a:avLst/>
+          </a:prstGeom>
+          <a:solidFill>
+            <a:srgbClr val="00C2D1"/>
+          </a:solidFill>
+          <a:ln>
+            <a:noFill/>
+          </a:ln>
+        </p:spPr>
+        <p:txBody>
+          <a:bodyPr/>
+          <a:lstStyle/>
+          <a:p/>
+        </p:txBody>
+      </p:sp>
+      <p:sp>
+        <p:nvSpPr>
+          <p:cNvPr id="43" name="TextBox"/>
+          <p:cNvSpPr txBox="1"/>
+          <p:nvPr/>
+        </p:nvSpPr>
+        <p:spPr>
+          <a:xfrm>
+            <a:off x="4588154" y="5522976"/>
+            <a:ext cx="3125114" cy="274320"/>
+          </a:xfrm>
+          <a:prstGeom prst="rect">
+            <a:avLst/>
+          </a:prstGeom>
+          <a:noFill/>
+          <a:ln>
+            <a:noFill/>
+          </a:ln>
+        </p:spPr>
+        <p:txBody>
+          <a:bodyPr wrap="square" anchor="t" lIns="45720" rIns="45720" tIns="27432" bIns="27432"/>
+          <a:lstStyle/>
+          <a:p>
+            <a:pPr algn="l"/>
+            <a:r>
+              <a:rPr lang="ja-JP" sz="1300" b="1" spc="20" dirty="0">
+                <a:solidFill>
+                  <a:srgbClr val="00C2D1"/>
+                </a:solidFill>
+                <a:latin typeface="Montserrat"/>
+                <a:ea typeface="Montserrat"/>
+                <a:cs typeface="Montserrat"/>
+              </a:rPr>
+              <a:t>PHASE 4</a:t>
+            </a:r>
+          </a:p>
+        </p:txBody>
+      </p:sp>
+      <p:sp>
+        <p:nvSpPr>
+          <p:cNvPr id="44" name="TextBox"/>
+          <p:cNvSpPr txBox="1"/>
+          <p:nvPr/>
+        </p:nvSpPr>
+        <p:spPr>
+          <a:xfrm>
+            <a:off x="4588154" y="5815584"/>
+            <a:ext cx="3125114" cy="329184"/>
+          </a:xfrm>
+          <a:prstGeom prst="rect">
+            <a:avLst/>
+          </a:prstGeom>
+          <a:noFill/>
+          <a:ln>
+            <a:noFill/>
+          </a:ln>
+        </p:spPr>
+        <p:txBody>
+          <a:bodyPr wrap="square" anchor="t" lIns="45720" rIns="45720" tIns="27432" bIns="27432"/>
+          <a:lstStyle/>
+          <a:p>
+            <a:pPr algn="l"/>
+            <a:r>
+              <a:rPr lang="ja-JP" sz="1200" b="1" dirty="0">
+                <a:solidFill>
+                  <a:srgbClr val="1A1A1A"/>
+                </a:solidFill>
+                <a:latin typeface="Noto Sans JP"/>
+                <a:ea typeface="Noto Sans JP"/>
+                <a:cs typeface="Noto Sans JP"/>
+              </a:rPr>
+              <a:t>Web / Real で行動へつなぐ</a:t>
+            </a:r>
+          </a:p>
+        </p:txBody>
+      </p:sp>
+      <p:sp>
+        <p:nvSpPr>
+          <p:cNvPr id="45" name="PhaseNote2"/>
+          <p:cNvSpPr/>
+          <p:nvPr/>
+        </p:nvSpPr>
+        <p:spPr>
+          <a:xfrm>
+            <a:off x="8115605" y="5394960"/>
+            <a:ext cx="3490874" cy="822960"/>
+          </a:xfrm>
+          <a:prstGeom prst="rect">
+            <a:avLst/>
+          </a:prstGeom>
+          <a:solidFill>
+            <a:srgbClr val="FFFFFF"/>
+          </a:solidFill>
+          <a:ln w="15875" cap="flat">
+            <a:solidFill>
+              <a:srgbClr val="8A2BE2"/>
+            </a:solidFill>
+            <a:round/>
+          </a:ln>
+        </p:spPr>
+        <p:txBody>
+          <a:bodyPr/>
+          <a:lstStyle/>
+          <a:p/>
+        </p:txBody>
+      </p:sp>
+      <p:sp>
+        <p:nvSpPr>
+          <p:cNvPr id="46" name="PhaseAccent2"/>
+          <p:cNvSpPr/>
+          <p:nvPr/>
+        </p:nvSpPr>
+        <p:spPr>
+          <a:xfrm>
+            <a:off x="8115605" y="5394960"/>
+            <a:ext cx="73152" cy="822960"/>
+          </a:xfrm>
+          <a:prstGeom prst="rect">
+            <a:avLst/>
+          </a:prstGeom>
+          <a:solidFill>
+            <a:srgbClr val="8A2BE2"/>
+          </a:solidFill>
+          <a:ln>
+            <a:noFill/>
+          </a:ln>
+        </p:spPr>
+        <p:txBody>
+          <a:bodyPr/>
+          <a:lstStyle/>
+          <a:p/>
+        </p:txBody>
+      </p:sp>
+      <p:sp>
+        <p:nvSpPr>
+          <p:cNvPr id="47" name="TextBox"/>
+          <p:cNvSpPr txBox="1"/>
+          <p:nvPr/>
+        </p:nvSpPr>
+        <p:spPr>
+          <a:xfrm>
+            <a:off x="8353349" y="5522976"/>
+            <a:ext cx="3125114" cy="274320"/>
+          </a:xfrm>
+          <a:prstGeom prst="rect">
+            <a:avLst/>
+          </a:prstGeom>
+          <a:noFill/>
+          <a:ln>
+            <a:noFill/>
+          </a:ln>
+        </p:spPr>
+        <p:txBody>
+          <a:bodyPr wrap="square" anchor="t" lIns="45720" rIns="45720" tIns="27432" bIns="27432"/>
+          <a:lstStyle/>
+          <a:p>
+            <a:pPr algn="l"/>
+            <a:r>
+              <a:rPr lang="ja-JP" sz="1300" b="1" spc="20" dirty="0">
+                <a:solidFill>
+                  <a:srgbClr val="8A2BE2"/>
+                </a:solidFill>
+                <a:latin typeface="Montserrat"/>
+                <a:ea typeface="Montserrat"/>
+                <a:cs typeface="Montserrat"/>
+              </a:rPr>
+              <a:t>GOAL</a:t>
+            </a:r>
+          </a:p>
+        </p:txBody>
+      </p:sp>
+      <p:sp>
+        <p:nvSpPr>
+          <p:cNvPr id="48" name="TextBox"/>
+          <p:cNvSpPr txBox="1"/>
+          <p:nvPr/>
+        </p:nvSpPr>
+        <p:spPr>
+          <a:xfrm>
+            <a:off x="8353349" y="5815584"/>
+            <a:ext cx="3125114" cy="329184"/>
+          </a:xfrm>
+          <a:prstGeom prst="rect">
+            <a:avLst/>
+          </a:prstGeom>
+          <a:noFill/>
+          <a:ln>
+            <a:noFill/>
+          </a:ln>
+        </p:spPr>
+        <p:txBody>
+          <a:bodyPr wrap="square" anchor="t" lIns="45720" rIns="45720" tIns="27432" bIns="27432"/>
+          <a:lstStyle/>
+          <a:p>
+            <a:pPr algn="l"/>
+            <a:r>
+              <a:rPr lang="ja-JP" sz="1200" b="1" dirty="0">
+                <a:solidFill>
+                  <a:srgbClr val="1A1A1A"/>
+                </a:solidFill>
+                <a:latin typeface="Noto Sans JP"/>
+                <a:ea typeface="Noto Sans JP"/>
+                <a:cs typeface="Noto Sans JP"/>
+              </a:rPr>
+              <a:t>採用・進路選択</a:t>
+            </a:r>
+          </a:p>
+        </p:txBody>
+      </p:sp>
       <p:cxnSp>
         <p:nvCxnSpPr>
-          <p:cNvPr id="37" name="Line"/>
+          <p:cNvPr id="49" name="Line"/>
           <p:cNvCxnSpPr/>
           <p:nvPr/>
         </p:nvCxnSpPr>
@@ -16541,7 +16940,7 @@
       </p:cxnSp>
       <p:sp>
         <p:nvSpPr>
-          <p:cNvPr id="38" name="TextBox"/>
+          <p:cNvPr id="50" name="TextBox"/>
           <p:cNvSpPr txBox="1"/>
           <p:nvPr/>
         </p:nvSpPr>
@@ -16579,7 +16978,7 @@
       </p:sp>
       <p:sp>
         <p:nvSpPr>
-          <p:cNvPr id="39" name="TextBox"/>
+          <p:cNvPr id="51" name="TextBox"/>
           <p:cNvSpPr txBox="1"/>
           <p:nvPr/>
         </p:nvSpPr>
@@ -16714,7 +17113,7 @@
         <p:spPr>
           <a:xfrm>
             <a:off x="969264" y="365760"/>
-            <a:ext cx="7315200" cy="310896"/>
+            <a:ext cx="8229600" cy="310896"/>
           </a:xfrm>
           <a:prstGeom prst="rect">
             <a:avLst/>
@@ -16730,7 +17129,7 @@
           <a:p>
             <a:pPr algn="l"/>
             <a:r>
-              <a:rPr lang="ja-JP" sz="1250" b="1" spc="60" dirty="0">
+              <a:rPr lang="ja-JP" sz="1200" b="1" spc="60" dirty="0">
                 <a:solidFill>
                   <a:srgbClr val="FF6A00"/>
                 </a:solidFill>
@@ -16741,7 +17140,7 @@
               <a:t>12 MONTH ROADMAP  </a:t>
             </a:r>
             <a:r>
-              <a:rPr lang="ja-JP" sz="1100" b="1" spc="20" dirty="0">
+              <a:rPr lang="ja-JP" sz="1050" b="1" spc="20" dirty="0">
                 <a:solidFill>
                   <a:srgbClr val="1A1A1A"/>
                 </a:solidFill>
@@ -16762,8 +17161,8 @@
         </p:nvSpPr>
         <p:spPr>
           <a:xfrm>
-            <a:off x="585216" y="777240"/>
-            <a:ext cx="8229600" cy="502920"/>
+            <a:off x="585216" y="731520"/>
+            <a:ext cx="10515600" cy="685800"/>
           </a:xfrm>
           <a:prstGeom prst="rect">
             <a:avLst/>
@@ -16783,7 +17182,7 @@
               </a:lnSpc>
             </a:pPr>
             <a:r>
-              <a:rPr lang="ja-JP" sz="1900" b="1" dirty="0">
+              <a:rPr lang="ja-JP" sz="2800" b="1" dirty="0">
                 <a:solidFill>
                   <a:srgbClr val="1A1A1A"/>
                 </a:solidFill>
@@ -18657,7 +19056,7 @@
         <p:spPr>
           <a:xfrm>
             <a:off x="969264" y="365760"/>
-            <a:ext cx="7315200" cy="310896"/>
+            <a:ext cx="8229600" cy="310896"/>
           </a:xfrm>
           <a:prstGeom prst="rect">
             <a:avLst/>
@@ -18673,7 +19072,7 @@
           <a:p>
             <a:pPr algn="l"/>
             <a:r>
-              <a:rPr lang="ja-JP" sz="1250" b="1" spc="60" dirty="0">
+              <a:rPr lang="ja-JP" sz="1200" b="1" spc="60" dirty="0">
                 <a:solidFill>
                   <a:srgbClr val="2A5CFF"/>
                 </a:solidFill>
@@ -18684,7 +19083,7 @@
               <a:t>KPI  </a:t>
             </a:r>
             <a:r>
-              <a:rPr lang="ja-JP" sz="1100" b="1" spc="20" dirty="0">
+              <a:rPr lang="ja-JP" sz="1050" b="1" spc="20" dirty="0">
                 <a:solidFill>
                   <a:srgbClr val="1A1A1A"/>
                 </a:solidFill>
@@ -18705,8 +19104,8 @@
         </p:nvSpPr>
         <p:spPr>
           <a:xfrm>
-            <a:off x="585216" y="777240"/>
-            <a:ext cx="8686800" cy="548640"/>
+            <a:off x="585216" y="713232"/>
+            <a:ext cx="10789920" cy="777240"/>
           </a:xfrm>
           <a:prstGeom prst="rect">
             <a:avLst/>
@@ -18726,7 +19125,7 @@
               </a:lnSpc>
             </a:pPr>
             <a:r>
-              <a:rPr lang="ja-JP" sz="1800" b="1" dirty="0">
+              <a:rPr lang="ja-JP" sz="2500" b="1" dirty="0">
                 <a:solidFill>
                   <a:srgbClr val="1A1A1A"/>
                 </a:solidFill>
@@ -20278,7 +20677,7 @@
         <p:spPr>
           <a:xfrm>
             <a:off x="969264" y="365760"/>
-            <a:ext cx="7315200" cy="310896"/>
+            <a:ext cx="8229600" cy="310896"/>
           </a:xfrm>
           <a:prstGeom prst="rect">
             <a:avLst/>
@@ -20294,7 +20693,7 @@
           <a:p>
             <a:pPr algn="l"/>
             <a:r>
-              <a:rPr lang="ja-JP" sz="1250" b="1" spc="60" dirty="0">
+              <a:rPr lang="ja-JP" sz="1200" b="1" spc="60" dirty="0">
                 <a:solidFill>
                   <a:srgbClr val="FFFFFF"/>
                 </a:solidFill>
@@ -20305,7 +20704,7 @@
               <a:t>FUTURE VISION  </a:t>
             </a:r>
             <a:r>
-              <a:rPr lang="ja-JP" sz="1100" b="1" spc="20" dirty="0">
+              <a:rPr lang="ja-JP" sz="1050" b="1" spc="20" dirty="0">
                 <a:solidFill>
                   <a:srgbClr val="FFFFFF"/>
                 </a:solidFill>
@@ -20606,8 +21005,8 @@
         </p:nvSpPr>
         <p:spPr>
           <a:xfrm>
-            <a:off x="585216" y="4343400"/>
-            <a:ext cx="146304" cy="146304"/>
+            <a:off x="585216" y="4370832"/>
+            <a:ext cx="182880" cy="182880"/>
           </a:xfrm>
           <a:prstGeom prst="rect">
             <a:avLst/>
@@ -20633,8 +21032,8 @@
         </p:nvSpPr>
         <p:spPr>
           <a:xfrm>
-            <a:off x="804672" y="4297680"/>
-            <a:ext cx="10801807" cy="256032"/>
+            <a:off x="877824" y="4270248"/>
+            <a:ext cx="10728655" cy="365760"/>
           </a:xfrm>
           <a:prstGeom prst="rect">
             <a:avLst/>
@@ -20650,7 +21049,7 @@
           <a:p>
             <a:pPr algn="l"/>
             <a:r>
-              <a:rPr lang="ja-JP" sz="1100" b="1" spc="30" dirty="0">
+              <a:rPr lang="ja-JP" sz="1000" b="1" spc="40" dirty="0">
                 <a:solidFill>
                   <a:srgbClr val="FF6A00"/>
                 </a:solidFill>
@@ -20658,10 +21057,10 @@
                 <a:ea typeface="Montserrat"/>
                 <a:cs typeface="Montserrat"/>
               </a:rPr>
-              <a:t>NEXT  </a:t>
-            </a:r>
-            <a:r>
-              <a:rPr lang="ja-JP" sz="1300" b="1" dirty="0">
+              <a:t>NEXT   </a:t>
+            </a:r>
+            <a:r>
+              <a:rPr lang="ja-JP" sz="1650" b="1" dirty="0">
                 <a:solidFill>
                   <a:srgbClr val="1A1A1A"/>
                 </a:solidFill>
@@ -21423,7 +21822,7 @@
         <p:spPr>
           <a:xfrm>
             <a:off x="969264" y="365760"/>
-            <a:ext cx="7315200" cy="310896"/>
+            <a:ext cx="8229600" cy="310896"/>
           </a:xfrm>
           <a:prstGeom prst="rect">
             <a:avLst/>
@@ -21439,7 +21838,7 @@
           <a:p>
             <a:pPr algn="l"/>
             <a:r>
-              <a:rPr lang="ja-JP" sz="1250" b="1" spc="60" dirty="0">
+              <a:rPr lang="ja-JP" sz="1200" b="1" spc="60" dirty="0">
                 <a:solidFill>
                   <a:srgbClr val="FF3D8A"/>
                 </a:solidFill>
@@ -21450,7 +21849,7 @@
               <a:t>TIKTOK CASE 01  </a:t>
             </a:r>
             <a:r>
-              <a:rPr lang="ja-JP" sz="1100" b="1" spc="20" dirty="0">
+              <a:rPr lang="ja-JP" sz="1050" b="1" spc="20" dirty="0">
                 <a:solidFill>
                   <a:srgbClr val="1A1A1A"/>
                 </a:solidFill>
@@ -21488,11 +21887,11 @@
           <a:p>
             <a:pPr algn="l">
               <a:lnSpc>
-                <a:spcPct val="120000"/>
+                <a:spcPct val="116000"/>
               </a:lnSpc>
             </a:pPr>
             <a:r>
-              <a:rPr lang="ja-JP" sz="2800" b="1" dirty="0">
+              <a:rPr lang="ja-JP" sz="3300" b="1" dirty="0">
                 <a:solidFill>
                   <a:srgbClr val="1A1A1A"/>
                 </a:solidFill>
@@ -21506,11 +21905,11 @@
           <a:p>
             <a:pPr algn="l">
               <a:lnSpc>
-                <a:spcPct val="120000"/>
+                <a:spcPct val="116000"/>
               </a:lnSpc>
             </a:pPr>
             <a:r>
-              <a:rPr lang="ja-JP" sz="2800" b="1" dirty="0">
+              <a:rPr lang="ja-JP" sz="3300" b="1" dirty="0">
                 <a:solidFill>
                   <a:srgbClr val="1A1A1A"/>
                 </a:solidFill>
@@ -21531,8 +21930,8 @@
         </p:nvSpPr>
         <p:spPr>
           <a:xfrm>
-            <a:off x="585216" y="2148840"/>
-            <a:ext cx="146304" cy="146304"/>
+            <a:off x="585216" y="2176272"/>
+            <a:ext cx="182880" cy="182880"/>
           </a:xfrm>
           <a:prstGeom prst="rect">
             <a:avLst/>
@@ -21558,8 +21957,8 @@
         </p:nvSpPr>
         <p:spPr>
           <a:xfrm>
-            <a:off x="804672" y="2103120"/>
-            <a:ext cx="5586984" cy="256032"/>
+            <a:off x="877824" y="2075688"/>
+            <a:ext cx="5513832" cy="365760"/>
           </a:xfrm>
           <a:prstGeom prst="rect">
             <a:avLst/>
@@ -21575,7 +21974,7 @@
           <a:p>
             <a:pPr algn="l"/>
             <a:r>
-              <a:rPr lang="ja-JP" sz="1100" b="1" spc="30" dirty="0">
+              <a:rPr lang="ja-JP" sz="1000" b="1" spc="40" dirty="0">
                 <a:solidFill>
                   <a:srgbClr val="FF3D8A"/>
                 </a:solidFill>
@@ -21583,10 +21982,10 @@
                 <a:ea typeface="Montserrat"/>
                 <a:cs typeface="Montserrat"/>
               </a:rPr>
-              <a:t>ACCOUNT DESIGN  </a:t>
-            </a:r>
-            <a:r>
-              <a:rPr lang="ja-JP" sz="1300" b="1" dirty="0">
+              <a:t>ACCOUNT DESIGN   </a:t>
+            </a:r>
+            <a:r>
+              <a:rPr lang="ja-JP" sz="1650" b="1" dirty="0">
                 <a:solidFill>
                   <a:srgbClr val="1A1A1A"/>
                 </a:solidFill>
@@ -22385,8 +22784,8 @@
         </p:nvSpPr>
         <p:spPr>
           <a:xfrm>
-            <a:off x="585216" y="5029200"/>
-            <a:ext cx="146304" cy="146304"/>
+            <a:off x="585216" y="5056632"/>
+            <a:ext cx="182880" cy="182880"/>
           </a:xfrm>
           <a:prstGeom prst="rect">
             <a:avLst/>
@@ -22412,8 +22811,8 @@
         </p:nvSpPr>
         <p:spPr>
           <a:xfrm>
-            <a:off x="804672" y="4983480"/>
-            <a:ext cx="5586984" cy="256032"/>
+            <a:off x="877824" y="4956048"/>
+            <a:ext cx="5513832" cy="365760"/>
           </a:xfrm>
           <a:prstGeom prst="rect">
             <a:avLst/>
@@ -22429,7 +22828,7 @@
           <a:p>
             <a:pPr algn="l"/>
             <a:r>
-              <a:rPr lang="ja-JP" sz="1100" b="1" spc="30" dirty="0">
+              <a:rPr lang="ja-JP" sz="1000" b="1" spc="40" dirty="0">
                 <a:solidFill>
                   <a:srgbClr val="FF3D8A"/>
                 </a:solidFill>
@@ -22437,10 +22836,10 @@
                 <a:ea typeface="Montserrat"/>
                 <a:cs typeface="Montserrat"/>
               </a:rPr>
-              <a:t>CONCEPT  </a:t>
-            </a:r>
-            <a:r>
-              <a:rPr lang="ja-JP" sz="1300" b="1" dirty="0">
+              <a:t>CONCEPT   </a:t>
+            </a:r>
+            <a:r>
+              <a:rPr lang="ja-JP" sz="1650" b="1" dirty="0">
                 <a:solidFill>
                   <a:srgbClr val="1A1A1A"/>
                 </a:solidFill>
@@ -23411,7 +23810,7 @@
         <p:spPr>
           <a:xfrm>
             <a:off x="969264" y="365760"/>
-            <a:ext cx="7315200" cy="310896"/>
+            <a:ext cx="8229600" cy="310896"/>
           </a:xfrm>
           <a:prstGeom prst="rect">
             <a:avLst/>
@@ -23427,7 +23826,7 @@
           <a:p>
             <a:pPr algn="l"/>
             <a:r>
-              <a:rPr lang="ja-JP" sz="1250" b="1" spc="60" dirty="0">
+              <a:rPr lang="ja-JP" sz="1200" b="1" spc="60" dirty="0">
                 <a:solidFill>
                   <a:srgbClr val="FF3D8A"/>
                 </a:solidFill>
@@ -23438,7 +23837,7 @@
               <a:t>TIKTOK CASE 01  </a:t>
             </a:r>
             <a:r>
-              <a:rPr lang="ja-JP" sz="1100" b="1" spc="20" dirty="0">
+              <a:rPr lang="ja-JP" sz="1050" b="1" spc="20" dirty="0">
                 <a:solidFill>
                   <a:srgbClr val="1A1A1A"/>
                 </a:solidFill>
@@ -23459,8 +23858,8 @@
         </p:nvSpPr>
         <p:spPr>
           <a:xfrm>
-            <a:off x="585216" y="896112"/>
-            <a:ext cx="146304" cy="146304"/>
+            <a:off x="585216" y="868680"/>
+            <a:ext cx="182880" cy="182880"/>
           </a:xfrm>
           <a:prstGeom prst="rect">
             <a:avLst/>
@@ -23486,8 +23885,8 @@
         </p:nvSpPr>
         <p:spPr>
           <a:xfrm>
-            <a:off x="804672" y="850392"/>
-            <a:ext cx="10801807" cy="256032"/>
+            <a:off x="877824" y="768096"/>
+            <a:ext cx="10728655" cy="365760"/>
           </a:xfrm>
           <a:prstGeom prst="rect">
             <a:avLst/>
@@ -23503,7 +23902,7 @@
           <a:p>
             <a:pPr algn="l"/>
             <a:r>
-              <a:rPr lang="ja-JP" sz="1100" b="1" spc="30" dirty="0">
+              <a:rPr lang="ja-JP" sz="1000" b="1" spc="40" dirty="0">
                 <a:solidFill>
                   <a:srgbClr val="FF3D8A"/>
                 </a:solidFill>
@@ -23511,10 +23910,10 @@
                 <a:ea typeface="Montserrat"/>
                 <a:cs typeface="Montserrat"/>
               </a:rPr>
-              <a:t>WORLDVIEW  </a:t>
-            </a:r>
-            <a:r>
-              <a:rPr lang="ja-JP" sz="1300" b="1" dirty="0">
+              <a:t>WORLDVIEW   </a:t>
+            </a:r>
+            <a:r>
+              <a:rPr lang="ja-JP" sz="1650" b="1" dirty="0">
                 <a:solidFill>
                   <a:srgbClr val="1A1A1A"/>
                 </a:solidFill>
@@ -23535,8 +23934,8 @@
         </p:nvSpPr>
         <p:spPr>
           <a:xfrm>
-            <a:off x="585216" y="1188720"/>
-            <a:ext cx="11021263" cy="777240"/>
+            <a:off x="585216" y="1133856"/>
+            <a:ext cx="11021263" cy="548640"/>
           </a:xfrm>
           <a:prstGeom prst="rect">
             <a:avLst/>
@@ -23556,7 +23955,7 @@
               </a:lnSpc>
             </a:pPr>
             <a:r>
-              <a:rPr lang="ja-JP" sz="1150" dirty="0">
+              <a:rPr lang="ja-JP" sz="1200" dirty="0">
                 <a:solidFill>
                   <a:srgbClr val="1A1A1A"/>
                 </a:solidFill>
@@ -23577,8 +23976,8 @@
         </p:nvSpPr>
         <p:spPr>
           <a:xfrm>
-            <a:off x="585216" y="2148840"/>
-            <a:ext cx="3564026" cy="2331720"/>
+            <a:off x="585216" y="1755648"/>
+            <a:ext cx="6300893" cy="3364992"/>
           </a:xfrm>
           <a:prstGeom prst="rect">
             <a:avLst/>
@@ -23607,8 +24006,8 @@
         </p:nvCxnSpPr>
         <p:spPr>
           <a:xfrm>
-            <a:off x="713232" y="4078224"/>
-            <a:ext cx="3307994" cy="914"/>
+            <a:off x="731520" y="4737872"/>
+            <a:ext cx="6008285" cy="914"/>
           </a:xfrm>
           <a:prstGeom prst="line">
             <a:avLst/>
@@ -23630,8 +24029,8 @@
         </p:nvSpPr>
         <p:spPr>
           <a:xfrm>
-            <a:off x="713232" y="2848356"/>
-            <a:ext cx="3307994" cy="839419"/>
+            <a:off x="731520" y="2765146"/>
+            <a:ext cx="6008285" cy="1467978"/>
           </a:xfrm>
           <a:prstGeom prst="rect">
             <a:avLst/>
@@ -23647,7 +24046,7 @@
           <a:p>
             <a:pPr algn="ctr"/>
             <a:r>
-              <a:rPr lang="ja-JP" sz="2000" b="1" spc="40" dirty="0">
+              <a:rPr lang="ja-JP" sz="2760" b="1" spc="40" dirty="0">
                 <a:solidFill>
                   <a:srgbClr val="FF3D8A"/>
                 </a:solidFill>
@@ -23668,8 +24067,8 @@
         </p:nvSpPr>
         <p:spPr>
           <a:xfrm>
-            <a:off x="713232" y="4114800"/>
-            <a:ext cx="3307994" cy="292608"/>
+            <a:off x="731520" y="4756160"/>
+            <a:ext cx="6008285" cy="327904"/>
           </a:xfrm>
           <a:prstGeom prst="rect">
             <a:avLst/>
@@ -23685,7 +24084,7 @@
           <a:p>
             <a:pPr algn="ctr"/>
             <a:r>
-              <a:rPr lang="ja-JP" sz="950" dirty="0">
+              <a:rPr lang="ja-JP" sz="1159" dirty="0">
                 <a:solidFill>
                   <a:srgbClr val="1A1A1A"/>
                 </a:solidFill>
@@ -23706,8 +24105,8 @@
         </p:nvSpPr>
         <p:spPr>
           <a:xfrm>
-            <a:off x="4313834" y="2148840"/>
-            <a:ext cx="3564026" cy="2331720"/>
+            <a:off x="7068989" y="1755648"/>
+            <a:ext cx="4537491" cy="1591056"/>
           </a:xfrm>
           <a:prstGeom prst="rect">
             <a:avLst/>
@@ -23736,8 +24135,8 @@
         </p:nvCxnSpPr>
         <p:spPr>
           <a:xfrm>
-            <a:off x="4441850" y="4078224"/>
-            <a:ext cx="3307994" cy="914"/>
+            <a:off x="7215293" y="3035808"/>
+            <a:ext cx="4244883" cy="914"/>
           </a:xfrm>
           <a:prstGeom prst="line">
             <a:avLst/>
@@ -23759,8 +24158,8 @@
         </p:nvSpPr>
         <p:spPr>
           <a:xfrm>
-            <a:off x="4441850" y="2848356"/>
-            <a:ext cx="3307994" cy="839419"/>
+            <a:off x="7215293" y="2232965"/>
+            <a:ext cx="4244883" cy="564185"/>
           </a:xfrm>
           <a:prstGeom prst="rect">
             <a:avLst/>
@@ -23776,7 +24175,7 @@
           <a:p>
             <a:pPr algn="ctr"/>
             <a:r>
-              <a:rPr lang="ja-JP" sz="2000" b="1" spc="40" dirty="0">
+              <a:rPr lang="ja-JP" sz="1566" b="1" spc="40" dirty="0">
                 <a:solidFill>
                   <a:srgbClr val="FF3D8A"/>
                 </a:solidFill>
@@ -23797,8 +24196,8 @@
         </p:nvSpPr>
         <p:spPr>
           <a:xfrm>
-            <a:off x="4441850" y="4114800"/>
-            <a:ext cx="3307994" cy="292608"/>
+            <a:off x="7215293" y="3054096"/>
+            <a:ext cx="4244883" cy="256032"/>
           </a:xfrm>
           <a:prstGeom prst="rect">
             <a:avLst/>
@@ -23814,7 +24213,7 @@
           <a:p>
             <a:pPr algn="ctr"/>
             <a:r>
-              <a:rPr lang="ja-JP" sz="950" dirty="0">
+              <a:rPr lang="ja-JP" sz="658" dirty="0">
                 <a:solidFill>
                   <a:srgbClr val="1A1A1A"/>
                 </a:solidFill>
@@ -23835,8 +24234,8 @@
         </p:nvSpPr>
         <p:spPr>
           <a:xfrm>
-            <a:off x="8042453" y="2148840"/>
-            <a:ext cx="3564026" cy="2331720"/>
+            <a:off x="7068989" y="3529584"/>
+            <a:ext cx="4537491" cy="1591056"/>
           </a:xfrm>
           <a:prstGeom prst="rect">
             <a:avLst/>
@@ -23865,8 +24264,8 @@
         </p:nvCxnSpPr>
         <p:spPr>
           <a:xfrm>
-            <a:off x="8170469" y="4078224"/>
-            <a:ext cx="3307994" cy="914"/>
+            <a:off x="7215293" y="4809744"/>
+            <a:ext cx="4244883" cy="914"/>
           </a:xfrm>
           <a:prstGeom prst="line">
             <a:avLst/>
@@ -23888,8 +24287,8 @@
         </p:nvSpPr>
         <p:spPr>
           <a:xfrm>
-            <a:off x="8170469" y="2848356"/>
-            <a:ext cx="3307994" cy="839419"/>
+            <a:off x="7215293" y="4006901"/>
+            <a:ext cx="4244883" cy="564185"/>
           </a:xfrm>
           <a:prstGeom prst="rect">
             <a:avLst/>
@@ -23905,7 +24304,7 @@
           <a:p>
             <a:pPr algn="ctr"/>
             <a:r>
-              <a:rPr lang="ja-JP" sz="2000" b="1" spc="40" dirty="0">
+              <a:rPr lang="ja-JP" sz="1566" b="1" spc="40" dirty="0">
                 <a:solidFill>
                   <a:srgbClr val="FF3D8A"/>
                 </a:solidFill>
@@ -23926,8 +24325,8 @@
         </p:nvSpPr>
         <p:spPr>
           <a:xfrm>
-            <a:off x="8170469" y="4114800"/>
-            <a:ext cx="3307994" cy="292608"/>
+            <a:off x="7215293" y="4828032"/>
+            <a:ext cx="4244883" cy="256032"/>
           </a:xfrm>
           <a:prstGeom prst="rect">
             <a:avLst/>
@@ -23943,7 +24342,7 @@
           <a:p>
             <a:pPr algn="ctr"/>
             <a:r>
-              <a:rPr lang="ja-JP" sz="950" dirty="0">
+              <a:rPr lang="ja-JP" sz="658" dirty="0">
                 <a:solidFill>
                   <a:srgbClr val="1A1A1A"/>
                 </a:solidFill>
@@ -23964,8 +24363,8 @@
         </p:nvSpPr>
         <p:spPr>
           <a:xfrm>
-            <a:off x="585216" y="4828032"/>
-            <a:ext cx="146304" cy="146304"/>
+            <a:off x="585216" y="5349240"/>
+            <a:ext cx="182880" cy="182880"/>
           </a:xfrm>
           <a:prstGeom prst="rect">
             <a:avLst/>
@@ -23991,8 +24390,8 @@
         </p:nvSpPr>
         <p:spPr>
           <a:xfrm>
-            <a:off x="804672" y="4782312"/>
-            <a:ext cx="10801807" cy="256032"/>
+            <a:off x="877824" y="5248656"/>
+            <a:ext cx="10728655" cy="365760"/>
           </a:xfrm>
           <a:prstGeom prst="rect">
             <a:avLst/>
@@ -24008,7 +24407,7 @@
           <a:p>
             <a:pPr algn="l"/>
             <a:r>
-              <a:rPr lang="ja-JP" sz="1100" b="1" spc="30" dirty="0">
+              <a:rPr lang="ja-JP" sz="1000" b="1" spc="40" dirty="0">
                 <a:solidFill>
                   <a:srgbClr val="FF3D8A"/>
                 </a:solidFill>
@@ -24016,10 +24415,10 @@
                 <a:ea typeface="Montserrat"/>
                 <a:cs typeface="Montserrat"/>
               </a:rPr>
-              <a:t>VALUE POINT  </a:t>
-            </a:r>
-            <a:r>
-              <a:rPr lang="ja-JP" sz="1300" b="1" dirty="0">
+              <a:t>VALUE POINT   </a:t>
+            </a:r>
+            <a:r>
+              <a:rPr lang="ja-JP" sz="1650" b="1" dirty="0">
                 <a:solidFill>
                   <a:srgbClr val="1A1A1A"/>
                 </a:solidFill>
@@ -24040,8 +24439,8 @@
         </p:nvSpPr>
         <p:spPr>
           <a:xfrm>
-            <a:off x="585216" y="5138928"/>
-            <a:ext cx="3165132" cy="420624"/>
+            <a:off x="585216" y="5614416"/>
+            <a:ext cx="2834494" cy="457200"/>
           </a:xfrm>
           <a:prstGeom prst="roundRect">
             <a:avLst>
@@ -24069,8 +24468,8 @@
         </p:nvSpPr>
         <p:spPr>
           <a:xfrm>
-            <a:off x="585216" y="5138928"/>
-            <a:ext cx="3165132" cy="420624"/>
+            <a:off x="585216" y="5614416"/>
+            <a:ext cx="2834494" cy="457200"/>
           </a:xfrm>
           <a:prstGeom prst="rect">
             <a:avLst/>
@@ -24107,8 +24506,8 @@
         </p:nvSpPr>
         <p:spPr>
           <a:xfrm>
-            <a:off x="3796068" y="5138928"/>
-            <a:ext cx="411480" cy="420624"/>
+            <a:off x="3465430" y="5614416"/>
+            <a:ext cx="411480" cy="457200"/>
           </a:xfrm>
           <a:prstGeom prst="roundRect">
             <a:avLst>
@@ -24136,8 +24535,8 @@
         </p:nvSpPr>
         <p:spPr>
           <a:xfrm>
-            <a:off x="3796068" y="5138928"/>
-            <a:ext cx="411480" cy="420624"/>
+            <a:off x="3465430" y="5614416"/>
+            <a:ext cx="411480" cy="457200"/>
           </a:xfrm>
           <a:prstGeom prst="rect">
             <a:avLst/>
@@ -24174,8 +24573,8 @@
         </p:nvSpPr>
         <p:spPr>
           <a:xfrm>
-            <a:off x="4253268" y="5138928"/>
-            <a:ext cx="3165132" cy="420624"/>
+            <a:off x="3922630" y="5614416"/>
+            <a:ext cx="2834494" cy="457200"/>
           </a:xfrm>
           <a:prstGeom prst="roundRect">
             <a:avLst>
@@ -24203,8 +24602,8 @@
         </p:nvSpPr>
         <p:spPr>
           <a:xfrm>
-            <a:off x="4253268" y="5138928"/>
-            <a:ext cx="3165132" cy="420624"/>
+            <a:off x="3922630" y="5614416"/>
+            <a:ext cx="2834494" cy="457200"/>
           </a:xfrm>
           <a:prstGeom prst="rect">
             <a:avLst/>
@@ -24242,19 +24641,19 @@
         </p:nvSpPr>
         <p:spPr>
           <a:xfrm>
-            <a:off x="8079675" y="5111496"/>
-            <a:ext cx="3526804" cy="548640"/>
-          </a:xfrm>
-          <a:prstGeom prst="rect">
-            <a:avLst/>
-          </a:prstGeom>
-          <a:noFill/>
-          <a:ln>
-            <a:noFill/>
-          </a:ln>
-        </p:spPr>
-        <p:txBody>
-          <a:bodyPr wrap="square" anchor="t" lIns="45720" rIns="45720" tIns="27432" bIns="27432"/>
+            <a:off x="7031443" y="5632704"/>
+            <a:ext cx="4575036" cy="457200"/>
+          </a:xfrm>
+          <a:prstGeom prst="rect">
+            <a:avLst/>
+          </a:prstGeom>
+          <a:noFill/>
+          <a:ln>
+            <a:noFill/>
+          </a:ln>
+        </p:spPr>
+        <p:txBody>
+          <a:bodyPr wrap="square" anchor="ctr" lIns="45720" rIns="45720" tIns="27432" bIns="27432"/>
           <a:lstStyle/>
           <a:p>
             <a:pPr algn="l">
@@ -24263,7 +24662,7 @@
               </a:lnSpc>
             </a:pPr>
             <a:r>
-              <a:rPr lang="ja-JP" sz="1000" dirty="0">
+              <a:rPr lang="ja-JP" sz="1050" dirty="0">
                 <a:solidFill>
                   <a:srgbClr val="1A1A1A"/>
                 </a:solidFill>
@@ -24271,25 +24670,7 @@
                 <a:ea typeface="Noto Sans JP"/>
                 <a:cs typeface="Noto Sans JP"/>
               </a:rPr>
-              <a:t>届けたいのは「高卒でも成功できる」ではなく、</a:t>
-            </a:r>
-          </a:p>
-          <a:p>
-            <a:pPr algn="l">
-              <a:lnSpc>
-                <a:spcPct val="140000"/>
-              </a:lnSpc>
-            </a:pPr>
-            <a:r>
-              <a:rPr lang="ja-JP" sz="1000" dirty="0">
-                <a:solidFill>
-                  <a:srgbClr val="1A1A1A"/>
-                </a:solidFill>
-                <a:latin typeface="Noto Sans JP"/>
-                <a:ea typeface="Noto Sans JP"/>
-                <a:cs typeface="Noto Sans JP"/>
-              </a:rPr>
-              <a:t>選択肢そのものへの見方を変えること。</a:t>
+              <a:t>届けたいのは「高卒でも成功できる」ではなく、選択肢そのものへの見方を変えること。</a:t>
             </a:r>
           </a:p>
         </p:txBody>
@@ -24492,7 +24873,7 @@
         <p:spPr>
           <a:xfrm>
             <a:off x="969264" y="365760"/>
-            <a:ext cx="7315200" cy="310896"/>
+            <a:ext cx="8229600" cy="310896"/>
           </a:xfrm>
           <a:prstGeom prst="rect">
             <a:avLst/>
@@ -24508,7 +24889,7 @@
           <a:p>
             <a:pPr algn="l"/>
             <a:r>
-              <a:rPr lang="ja-JP" sz="1250" b="1" spc="60" dirty="0">
+              <a:rPr lang="ja-JP" sz="1200" b="1" spc="60" dirty="0">
                 <a:solidFill>
                   <a:srgbClr val="FF3D8A"/>
                 </a:solidFill>
@@ -24519,7 +24900,7 @@
               <a:t>TIKTOK CASE 01  </a:t>
             </a:r>
             <a:r>
-              <a:rPr lang="ja-JP" sz="1100" b="1" spc="20" dirty="0">
+              <a:rPr lang="ja-JP" sz="1050" b="1" spc="20" dirty="0">
                 <a:solidFill>
                   <a:srgbClr val="1A1A1A"/>
                 </a:solidFill>
@@ -24540,8 +24921,8 @@
         </p:nvSpPr>
         <p:spPr>
           <a:xfrm>
-            <a:off x="585216" y="822960"/>
-            <a:ext cx="8229600" cy="457200"/>
+            <a:off x="585216" y="777240"/>
+            <a:ext cx="8229600" cy="502920"/>
           </a:xfrm>
           <a:prstGeom prst="rect">
             <a:avLst/>
@@ -24561,7 +24942,7 @@
               </a:lnSpc>
             </a:pPr>
             <a:r>
-              <a:rPr lang="ja-JP" sz="2200" b="1" dirty="0">
+              <a:rPr lang="ja-JP" sz="3300" b="1" dirty="0">
                 <a:solidFill>
                   <a:srgbClr val="1A1A1A"/>
                 </a:solidFill>
@@ -24582,8 +24963,8 @@
         </p:nvSpPr>
         <p:spPr>
           <a:xfrm>
-            <a:off x="585216" y="1554480"/>
-            <a:ext cx="146304" cy="146304"/>
+            <a:off x="585216" y="1581912"/>
+            <a:ext cx="182880" cy="182880"/>
           </a:xfrm>
           <a:prstGeom prst="rect">
             <a:avLst/>
@@ -24609,8 +24990,8 @@
         </p:nvSpPr>
         <p:spPr>
           <a:xfrm>
-            <a:off x="804672" y="1508760"/>
-            <a:ext cx="10801807" cy="256032"/>
+            <a:off x="877824" y="1481328"/>
+            <a:ext cx="10728655" cy="365760"/>
           </a:xfrm>
           <a:prstGeom prst="rect">
             <a:avLst/>
@@ -24626,7 +25007,7 @@
           <a:p>
             <a:pPr algn="l"/>
             <a:r>
-              <a:rPr lang="ja-JP" sz="1100" b="1" spc="30" dirty="0">
+              <a:rPr lang="ja-JP" sz="1000" b="1" spc="40" dirty="0">
                 <a:solidFill>
                   <a:srgbClr val="FF3D8A"/>
                 </a:solidFill>
@@ -24634,10 +25015,10 @@
                 <a:ea typeface="Montserrat"/>
                 <a:cs typeface="Montserrat"/>
               </a:rPr>
-              <a:t>STRUCTURE  </a:t>
-            </a:r>
-            <a:r>
-              <a:rPr lang="ja-JP" sz="1300" b="1" dirty="0">
+              <a:t>STRUCTURE   </a:t>
+            </a:r>
+            <a:r>
+              <a:rPr lang="ja-JP" sz="1650" b="1" dirty="0">
                 <a:solidFill>
                   <a:srgbClr val="1A1A1A"/>
                 </a:solidFill>
@@ -25844,8 +26225,8 @@
         </p:nvSpPr>
         <p:spPr>
           <a:xfrm>
-            <a:off x="585216" y="5449824"/>
-            <a:ext cx="146304" cy="146304"/>
+            <a:off x="585216" y="5477256"/>
+            <a:ext cx="182880" cy="182880"/>
           </a:xfrm>
           <a:prstGeom prst="rect">
             <a:avLst/>
@@ -25871,8 +26252,8 @@
         </p:nvSpPr>
         <p:spPr>
           <a:xfrm>
-            <a:off x="804672" y="5404104"/>
-            <a:ext cx="10801807" cy="256032"/>
+            <a:off x="877824" y="5376672"/>
+            <a:ext cx="10728655" cy="365760"/>
           </a:xfrm>
           <a:prstGeom prst="rect">
             <a:avLst/>
@@ -25888,7 +26269,7 @@
           <a:p>
             <a:pPr algn="l"/>
             <a:r>
-              <a:rPr lang="ja-JP" sz="1100" b="1" spc="30" dirty="0">
+              <a:rPr lang="ja-JP" sz="1000" b="1" spc="40" dirty="0">
                 <a:solidFill>
                   <a:srgbClr val="FF3D8A"/>
                 </a:solidFill>
@@ -25896,10 +26277,10 @@
                 <a:ea typeface="Montserrat"/>
                 <a:cs typeface="Montserrat"/>
               </a:rPr>
-              <a:t>EXAMPLES  </a:t>
-            </a:r>
-            <a:r>
-              <a:rPr lang="ja-JP" sz="1300" b="1" dirty="0">
+              <a:t>EXAMPLES   </a:t>
+            </a:r>
+            <a:r>
+              <a:rPr lang="ja-JP" sz="1650" b="1" dirty="0">
                 <a:solidFill>
                   <a:srgbClr val="1A1A1A"/>
                 </a:solidFill>
@@ -26236,7 +26617,7 @@
         <p:spPr>
           <a:xfrm>
             <a:off x="969264" y="365760"/>
-            <a:ext cx="7315200" cy="310896"/>
+            <a:ext cx="8229600" cy="310896"/>
           </a:xfrm>
           <a:prstGeom prst="rect">
             <a:avLst/>
@@ -26252,7 +26633,7 @@
           <a:p>
             <a:pPr algn="l"/>
             <a:r>
-              <a:rPr lang="ja-JP" sz="1250" b="1" spc="60" dirty="0">
+              <a:rPr lang="ja-JP" sz="1200" b="1" spc="60" dirty="0">
                 <a:solidFill>
                   <a:srgbClr val="00C2D1"/>
                 </a:solidFill>
@@ -26263,7 +26644,7 @@
               <a:t>TIKTOK CASE 02  </a:t>
             </a:r>
             <a:r>
-              <a:rPr lang="ja-JP" sz="1100" b="1" spc="20" dirty="0">
+              <a:rPr lang="ja-JP" sz="1050" b="1" spc="20" dirty="0">
                 <a:solidFill>
                   <a:srgbClr val="1A1A1A"/>
                 </a:solidFill>
@@ -26301,11 +26682,11 @@
           <a:p>
             <a:pPr algn="l">
               <a:lnSpc>
-                <a:spcPct val="120000"/>
+                <a:spcPct val="116000"/>
               </a:lnSpc>
             </a:pPr>
             <a:r>
-              <a:rPr lang="ja-JP" sz="2800" b="1" dirty="0">
+              <a:rPr lang="ja-JP" sz="3300" b="1" dirty="0">
                 <a:solidFill>
                   <a:srgbClr val="1A1A1A"/>
                 </a:solidFill>
@@ -26319,11 +26700,11 @@
           <a:p>
             <a:pPr algn="l">
               <a:lnSpc>
-                <a:spcPct val="120000"/>
+                <a:spcPct val="116000"/>
               </a:lnSpc>
             </a:pPr>
             <a:r>
-              <a:rPr lang="ja-JP" sz="2800" b="1" dirty="0">
+              <a:rPr lang="ja-JP" sz="3300" b="1" dirty="0">
                 <a:solidFill>
                   <a:srgbClr val="1A1A1A"/>
                 </a:solidFill>
@@ -26344,8 +26725,8 @@
         </p:nvSpPr>
         <p:spPr>
           <a:xfrm>
-            <a:off x="585216" y="2148840"/>
-            <a:ext cx="146304" cy="146304"/>
+            <a:off x="585216" y="2176272"/>
+            <a:ext cx="182880" cy="182880"/>
           </a:xfrm>
           <a:prstGeom prst="rect">
             <a:avLst/>
@@ -26371,8 +26752,8 @@
         </p:nvSpPr>
         <p:spPr>
           <a:xfrm>
-            <a:off x="804672" y="2103120"/>
-            <a:ext cx="5586984" cy="256032"/>
+            <a:off x="877824" y="2075688"/>
+            <a:ext cx="5513832" cy="365760"/>
           </a:xfrm>
           <a:prstGeom prst="rect">
             <a:avLst/>
@@ -26388,7 +26769,7 @@
           <a:p>
             <a:pPr algn="l"/>
             <a:r>
-              <a:rPr lang="ja-JP" sz="1100" b="1" spc="30" dirty="0">
+              <a:rPr lang="ja-JP" sz="1000" b="1" spc="40" dirty="0">
                 <a:solidFill>
                   <a:srgbClr val="00C2D1"/>
                 </a:solidFill>
@@ -26396,10 +26777,10 @@
                 <a:ea typeface="Montserrat"/>
                 <a:cs typeface="Montserrat"/>
               </a:rPr>
-              <a:t>ACCOUNT DESIGN  </a:t>
-            </a:r>
-            <a:r>
-              <a:rPr lang="ja-JP" sz="1300" b="1" dirty="0">
+              <a:t>ACCOUNT DESIGN   </a:t>
+            </a:r>
+            <a:r>
+              <a:rPr lang="ja-JP" sz="1650" b="1" dirty="0">
                 <a:solidFill>
                   <a:srgbClr val="1A1A1A"/>
                 </a:solidFill>
@@ -27198,8 +27579,8 @@
         </p:nvSpPr>
         <p:spPr>
           <a:xfrm>
-            <a:off x="585216" y="5029200"/>
-            <a:ext cx="146304" cy="146304"/>
+            <a:off x="585216" y="5056632"/>
+            <a:ext cx="182880" cy="182880"/>
           </a:xfrm>
           <a:prstGeom prst="rect">
             <a:avLst/>
@@ -27225,8 +27606,8 @@
         </p:nvSpPr>
         <p:spPr>
           <a:xfrm>
-            <a:off x="804672" y="4983480"/>
-            <a:ext cx="5586984" cy="256032"/>
+            <a:off x="877824" y="4956048"/>
+            <a:ext cx="5513832" cy="365760"/>
           </a:xfrm>
           <a:prstGeom prst="rect">
             <a:avLst/>
@@ -27242,7 +27623,7 @@
           <a:p>
             <a:pPr algn="l"/>
             <a:r>
-              <a:rPr lang="ja-JP" sz="1100" b="1" spc="30" dirty="0">
+              <a:rPr lang="ja-JP" sz="1000" b="1" spc="40" dirty="0">
                 <a:solidFill>
                   <a:srgbClr val="00C2D1"/>
                 </a:solidFill>
@@ -27250,10 +27631,10 @@
                 <a:ea typeface="Montserrat"/>
                 <a:cs typeface="Montserrat"/>
               </a:rPr>
-              <a:t>CONCEPT  </a:t>
-            </a:r>
-            <a:r>
-              <a:rPr lang="ja-JP" sz="1300" b="1" dirty="0">
+              <a:t>CONCEPT   </a:t>
+            </a:r>
+            <a:r>
+              <a:rPr lang="ja-JP" sz="1650" b="1" dirty="0">
                 <a:solidFill>
                   <a:srgbClr val="1A1A1A"/>
                 </a:solidFill>
@@ -28182,7 +28563,7 @@
         <p:spPr>
           <a:xfrm>
             <a:off x="969264" y="365760"/>
-            <a:ext cx="7315200" cy="310896"/>
+            <a:ext cx="8229600" cy="310896"/>
           </a:xfrm>
           <a:prstGeom prst="rect">
             <a:avLst/>
@@ -28198,7 +28579,7 @@
           <a:p>
             <a:pPr algn="l"/>
             <a:r>
-              <a:rPr lang="ja-JP" sz="1250" b="1" spc="60" dirty="0">
+              <a:rPr lang="ja-JP" sz="1200" b="1" spc="60" dirty="0">
                 <a:solidFill>
                   <a:srgbClr val="00C2D1"/>
                 </a:solidFill>
@@ -28209,7 +28590,7 @@
               <a:t>TIKTOK CASE 02  </a:t>
             </a:r>
             <a:r>
-              <a:rPr lang="ja-JP" sz="1100" b="1" spc="20" dirty="0">
+              <a:rPr lang="ja-JP" sz="1050" b="1" spc="20" dirty="0">
                 <a:solidFill>
                   <a:srgbClr val="1A1A1A"/>
                 </a:solidFill>
@@ -28230,8 +28611,8 @@
         </p:nvSpPr>
         <p:spPr>
           <a:xfrm>
-            <a:off x="585216" y="896112"/>
-            <a:ext cx="146304" cy="146304"/>
+            <a:off x="585216" y="868680"/>
+            <a:ext cx="182880" cy="182880"/>
           </a:xfrm>
           <a:prstGeom prst="rect">
             <a:avLst/>
@@ -28257,8 +28638,8 @@
         </p:nvSpPr>
         <p:spPr>
           <a:xfrm>
-            <a:off x="804672" y="850392"/>
-            <a:ext cx="10801807" cy="256032"/>
+            <a:off x="877824" y="768096"/>
+            <a:ext cx="10728655" cy="365760"/>
           </a:xfrm>
           <a:prstGeom prst="rect">
             <a:avLst/>
@@ -28274,7 +28655,7 @@
           <a:p>
             <a:pPr algn="l"/>
             <a:r>
-              <a:rPr lang="ja-JP" sz="1100" b="1" spc="30" dirty="0">
+              <a:rPr lang="ja-JP" sz="1000" b="1" spc="40" dirty="0">
                 <a:solidFill>
                   <a:srgbClr val="00C2D1"/>
                 </a:solidFill>
@@ -28282,10 +28663,10 @@
                 <a:ea typeface="Montserrat"/>
                 <a:cs typeface="Montserrat"/>
               </a:rPr>
-              <a:t>WORLDVIEW  </a:t>
-            </a:r>
-            <a:r>
-              <a:rPr lang="ja-JP" sz="1300" b="1" dirty="0">
+              <a:t>WORLDVIEW   </a:t>
+            </a:r>
+            <a:r>
+              <a:rPr lang="ja-JP" sz="1650" b="1" dirty="0">
                 <a:solidFill>
                   <a:srgbClr val="1A1A1A"/>
                 </a:solidFill>
@@ -28306,8 +28687,8 @@
         </p:nvSpPr>
         <p:spPr>
           <a:xfrm>
-            <a:off x="585216" y="1188720"/>
-            <a:ext cx="11021263" cy="777240"/>
+            <a:off x="585216" y="1133856"/>
+            <a:ext cx="11021263" cy="548640"/>
           </a:xfrm>
           <a:prstGeom prst="rect">
             <a:avLst/>
@@ -28327,7 +28708,7 @@
               </a:lnSpc>
             </a:pPr>
             <a:r>
-              <a:rPr lang="ja-JP" sz="1150" dirty="0">
+              <a:rPr lang="ja-JP" sz="1200" dirty="0">
                 <a:solidFill>
                   <a:srgbClr val="1A1A1A"/>
                 </a:solidFill>
@@ -28348,8 +28729,8 @@
         </p:nvSpPr>
         <p:spPr>
           <a:xfrm>
-            <a:off x="585216" y="2148840"/>
-            <a:ext cx="3564026" cy="2331720"/>
+            <a:off x="585216" y="1755648"/>
+            <a:ext cx="6300893" cy="3364992"/>
           </a:xfrm>
           <a:prstGeom prst="rect">
             <a:avLst/>
@@ -28378,8 +28759,8 @@
         </p:nvCxnSpPr>
         <p:spPr>
           <a:xfrm>
-            <a:off x="713232" y="4078224"/>
-            <a:ext cx="3307994" cy="914"/>
+            <a:off x="731520" y="4737872"/>
+            <a:ext cx="6008285" cy="914"/>
           </a:xfrm>
           <a:prstGeom prst="line">
             <a:avLst/>
@@ -28401,8 +28782,8 @@
         </p:nvSpPr>
         <p:spPr>
           <a:xfrm>
-            <a:off x="713232" y="2848356"/>
-            <a:ext cx="3307994" cy="839419"/>
+            <a:off x="731520" y="2765146"/>
+            <a:ext cx="6008285" cy="1467978"/>
           </a:xfrm>
           <a:prstGeom prst="rect">
             <a:avLst/>
@@ -28418,7 +28799,7 @@
           <a:p>
             <a:pPr algn="ctr"/>
             <a:r>
-              <a:rPr lang="ja-JP" sz="2000" b="1" spc="40" dirty="0">
+              <a:rPr lang="ja-JP" sz="2760" b="1" spc="40" dirty="0">
                 <a:solidFill>
                   <a:srgbClr val="00C2D1"/>
                 </a:solidFill>
@@ -28439,8 +28820,8 @@
         </p:nvSpPr>
         <p:spPr>
           <a:xfrm>
-            <a:off x="713232" y="4114800"/>
-            <a:ext cx="3307994" cy="292608"/>
+            <a:off x="731520" y="4756160"/>
+            <a:ext cx="6008285" cy="327904"/>
           </a:xfrm>
           <a:prstGeom prst="rect">
             <a:avLst/>
@@ -28456,7 +28837,7 @@
           <a:p>
             <a:pPr algn="ctr"/>
             <a:r>
-              <a:rPr lang="ja-JP" sz="950" dirty="0">
+              <a:rPr lang="ja-JP" sz="1159" dirty="0">
                 <a:solidFill>
                   <a:srgbClr val="1A1A1A"/>
                 </a:solidFill>
@@ -28477,8 +28858,8 @@
         </p:nvSpPr>
         <p:spPr>
           <a:xfrm>
-            <a:off x="4313834" y="2148840"/>
-            <a:ext cx="3564026" cy="2331720"/>
+            <a:off x="7068989" y="1755648"/>
+            <a:ext cx="4537491" cy="1591056"/>
           </a:xfrm>
           <a:prstGeom prst="rect">
             <a:avLst/>
@@ -28507,8 +28888,8 @@
         </p:nvCxnSpPr>
         <p:spPr>
           <a:xfrm>
-            <a:off x="4441850" y="4078224"/>
-            <a:ext cx="3307994" cy="914"/>
+            <a:off x="7215293" y="3035808"/>
+            <a:ext cx="4244883" cy="914"/>
           </a:xfrm>
           <a:prstGeom prst="line">
             <a:avLst/>
@@ -28530,8 +28911,8 @@
         </p:nvSpPr>
         <p:spPr>
           <a:xfrm>
-            <a:off x="4441850" y="2848356"/>
-            <a:ext cx="3307994" cy="839419"/>
+            <a:off x="7215293" y="2232965"/>
+            <a:ext cx="4244883" cy="564185"/>
           </a:xfrm>
           <a:prstGeom prst="rect">
             <a:avLst/>
@@ -28547,7 +28928,7 @@
           <a:p>
             <a:pPr algn="ctr"/>
             <a:r>
-              <a:rPr lang="ja-JP" sz="2000" b="1" spc="40" dirty="0">
+              <a:rPr lang="ja-JP" sz="1566" b="1" spc="40" dirty="0">
                 <a:solidFill>
                   <a:srgbClr val="00C2D1"/>
                 </a:solidFill>
@@ -28568,8 +28949,8 @@
         </p:nvSpPr>
         <p:spPr>
           <a:xfrm>
-            <a:off x="4441850" y="4114800"/>
-            <a:ext cx="3307994" cy="292608"/>
+            <a:off x="7215293" y="3054096"/>
+            <a:ext cx="4244883" cy="256032"/>
           </a:xfrm>
           <a:prstGeom prst="rect">
             <a:avLst/>
@@ -28585,7 +28966,7 @@
           <a:p>
             <a:pPr algn="ctr"/>
             <a:r>
-              <a:rPr lang="ja-JP" sz="950" dirty="0">
+              <a:rPr lang="ja-JP" sz="658" dirty="0">
                 <a:solidFill>
                   <a:srgbClr val="1A1A1A"/>
                 </a:solidFill>
@@ -28606,8 +28987,8 @@
         </p:nvSpPr>
         <p:spPr>
           <a:xfrm>
-            <a:off x="8042453" y="2148840"/>
-            <a:ext cx="3564026" cy="2331720"/>
+            <a:off x="7068989" y="3529584"/>
+            <a:ext cx="4537491" cy="1591056"/>
           </a:xfrm>
           <a:prstGeom prst="rect">
             <a:avLst/>
@@ -28636,8 +29017,8 @@
         </p:nvCxnSpPr>
         <p:spPr>
           <a:xfrm>
-            <a:off x="8170469" y="4078224"/>
-            <a:ext cx="3307994" cy="914"/>
+            <a:off x="7215293" y="4809744"/>
+            <a:ext cx="4244883" cy="914"/>
           </a:xfrm>
           <a:prstGeom prst="line">
             <a:avLst/>
@@ -28659,8 +29040,8 @@
         </p:nvSpPr>
         <p:spPr>
           <a:xfrm>
-            <a:off x="8170469" y="2848356"/>
-            <a:ext cx="3307994" cy="839419"/>
+            <a:off x="7215293" y="4006901"/>
+            <a:ext cx="4244883" cy="564185"/>
           </a:xfrm>
           <a:prstGeom prst="rect">
             <a:avLst/>
@@ -28676,7 +29057,7 @@
           <a:p>
             <a:pPr algn="ctr"/>
             <a:r>
-              <a:rPr lang="ja-JP" sz="2000" b="1" spc="40" dirty="0">
+              <a:rPr lang="ja-JP" sz="1566" b="1" spc="40" dirty="0">
                 <a:solidFill>
                   <a:srgbClr val="00C2D1"/>
                 </a:solidFill>
@@ -28697,8 +29078,8 @@
         </p:nvSpPr>
         <p:spPr>
           <a:xfrm>
-            <a:off x="8170469" y="4114800"/>
-            <a:ext cx="3307994" cy="292608"/>
+            <a:off x="7215293" y="4828032"/>
+            <a:ext cx="4244883" cy="256032"/>
           </a:xfrm>
           <a:prstGeom prst="rect">
             <a:avLst/>
@@ -28714,7 +29095,7 @@
           <a:p>
             <a:pPr algn="ctr"/>
             <a:r>
-              <a:rPr lang="ja-JP" sz="950" dirty="0">
+              <a:rPr lang="ja-JP" sz="658" dirty="0">
                 <a:solidFill>
                   <a:srgbClr val="1A1A1A"/>
                 </a:solidFill>
@@ -28735,8 +29116,8 @@
         </p:nvSpPr>
         <p:spPr>
           <a:xfrm>
-            <a:off x="585216" y="4828032"/>
-            <a:ext cx="146304" cy="146304"/>
+            <a:off x="585216" y="5349240"/>
+            <a:ext cx="182880" cy="182880"/>
           </a:xfrm>
           <a:prstGeom prst="rect">
             <a:avLst/>
@@ -28762,8 +29143,8 @@
         </p:nvSpPr>
         <p:spPr>
           <a:xfrm>
-            <a:off x="804672" y="4782312"/>
-            <a:ext cx="10801807" cy="256032"/>
+            <a:off x="877824" y="5248656"/>
+            <a:ext cx="10728655" cy="365760"/>
           </a:xfrm>
           <a:prstGeom prst="rect">
             <a:avLst/>
@@ -28779,7 +29160,7 @@
           <a:p>
             <a:pPr algn="l"/>
             <a:r>
-              <a:rPr lang="ja-JP" sz="1100" b="1" spc="30" dirty="0">
+              <a:rPr lang="ja-JP" sz="1000" b="1" spc="40" dirty="0">
                 <a:solidFill>
                   <a:srgbClr val="00C2D1"/>
                 </a:solidFill>
@@ -28787,10 +29168,10 @@
                 <a:ea typeface="Montserrat"/>
                 <a:cs typeface="Montserrat"/>
               </a:rPr>
-              <a:t>VALUE POINT  </a:t>
-            </a:r>
-            <a:r>
-              <a:rPr lang="ja-JP" sz="1300" b="1" dirty="0">
+              <a:t>VALUE POINT   </a:t>
+            </a:r>
+            <a:r>
+              <a:rPr lang="ja-JP" sz="1650" b="1" dirty="0">
                 <a:solidFill>
                   <a:srgbClr val="1A1A1A"/>
                 </a:solidFill>
@@ -28811,8 +29192,8 @@
         </p:nvSpPr>
         <p:spPr>
           <a:xfrm>
-            <a:off x="585216" y="5138928"/>
-            <a:ext cx="3142272" cy="420624"/>
+            <a:off x="585216" y="5614416"/>
+            <a:ext cx="2811634" cy="457200"/>
           </a:xfrm>
           <a:prstGeom prst="roundRect">
             <a:avLst>
@@ -28843,8 +29224,8 @@
         </p:nvSpPr>
         <p:spPr>
           <a:xfrm>
-            <a:off x="585216" y="5138928"/>
-            <a:ext cx="3142272" cy="420624"/>
+            <a:off x="585216" y="5614416"/>
+            <a:ext cx="2811634" cy="457200"/>
           </a:xfrm>
           <a:prstGeom prst="rect">
             <a:avLst/>
@@ -28881,7 +29262,7 @@
         </p:nvCxnSpPr>
         <p:spPr>
           <a:xfrm>
-            <a:off x="3800640" y="5349240"/>
+            <a:off x="3470002" y="5843016"/>
             <a:ext cx="384048" cy="914"/>
           </a:xfrm>
           <a:prstGeom prst="line">
@@ -28904,8 +29285,8 @@
         </p:nvSpPr>
         <p:spPr>
           <a:xfrm>
-            <a:off x="4276128" y="5138928"/>
-            <a:ext cx="3142272" cy="420624"/>
+            <a:off x="3945490" y="5614416"/>
+            <a:ext cx="2811634" cy="457200"/>
           </a:xfrm>
           <a:prstGeom prst="roundRect">
             <a:avLst>
@@ -28933,8 +29314,8 @@
         </p:nvSpPr>
         <p:spPr>
           <a:xfrm>
-            <a:off x="4276128" y="5138928"/>
-            <a:ext cx="3142272" cy="420624"/>
+            <a:off x="3945490" y="5614416"/>
+            <a:ext cx="2811634" cy="457200"/>
           </a:xfrm>
           <a:prstGeom prst="rect">
             <a:avLst/>
@@ -28971,19 +29352,19 @@
         </p:nvSpPr>
         <p:spPr>
           <a:xfrm>
-            <a:off x="8079675" y="5111496"/>
-            <a:ext cx="3526804" cy="548640"/>
-          </a:xfrm>
-          <a:prstGeom prst="rect">
-            <a:avLst/>
-          </a:prstGeom>
-          <a:noFill/>
-          <a:ln>
-            <a:noFill/>
-          </a:ln>
-        </p:spPr>
-        <p:txBody>
-          <a:bodyPr wrap="square" anchor="t" lIns="45720" rIns="45720" tIns="27432" bIns="27432"/>
+            <a:off x="7031443" y="5632704"/>
+            <a:ext cx="4575036" cy="457200"/>
+          </a:xfrm>
+          <a:prstGeom prst="rect">
+            <a:avLst/>
+          </a:prstGeom>
+          <a:noFill/>
+          <a:ln>
+            <a:noFill/>
+          </a:ln>
+        </p:spPr>
+        <p:txBody>
+          <a:bodyPr wrap="square" anchor="ctr" lIns="45720" rIns="45720" tIns="27432" bIns="27432"/>
           <a:lstStyle/>
           <a:p>
             <a:pPr algn="l">
@@ -28992,7 +29373,7 @@
               </a:lnSpc>
             </a:pPr>
             <a:r>
-              <a:rPr lang="ja-JP" sz="1000" dirty="0">
+              <a:rPr lang="ja-JP" sz="1050" dirty="0">
                 <a:solidFill>
                   <a:srgbClr val="1A1A1A"/>
                 </a:solidFill>
@@ -29203,7 +29584,7 @@
         <p:spPr>
           <a:xfrm>
             <a:off x="969264" y="365760"/>
-            <a:ext cx="7315200" cy="310896"/>
+            <a:ext cx="8229600" cy="310896"/>
           </a:xfrm>
           <a:prstGeom prst="rect">
             <a:avLst/>
@@ -29219,7 +29600,7 @@
           <a:p>
             <a:pPr algn="l"/>
             <a:r>
-              <a:rPr lang="ja-JP" sz="1250" b="1" spc="60" dirty="0">
+              <a:rPr lang="ja-JP" sz="1200" b="1" spc="60" dirty="0">
                 <a:solidFill>
                   <a:srgbClr val="00C2D1"/>
                 </a:solidFill>
@@ -29230,7 +29611,7 @@
               <a:t>TIKTOK CASE 02  </a:t>
             </a:r>
             <a:r>
-              <a:rPr lang="ja-JP" sz="1100" b="1" spc="20" dirty="0">
+              <a:rPr lang="ja-JP" sz="1050" b="1" spc="20" dirty="0">
                 <a:solidFill>
                   <a:srgbClr val="1A1A1A"/>
                 </a:solidFill>
@@ -29251,8 +29632,8 @@
         </p:nvSpPr>
         <p:spPr>
           <a:xfrm>
-            <a:off x="585216" y="822960"/>
-            <a:ext cx="8229600" cy="457200"/>
+            <a:off x="585216" y="777240"/>
+            <a:ext cx="8229600" cy="502920"/>
           </a:xfrm>
           <a:prstGeom prst="rect">
             <a:avLst/>
@@ -29272,7 +29653,7 @@
               </a:lnSpc>
             </a:pPr>
             <a:r>
-              <a:rPr lang="ja-JP" sz="2200" b="1" dirty="0">
+              <a:rPr lang="ja-JP" sz="3300" b="1" dirty="0">
                 <a:solidFill>
                   <a:srgbClr val="1A1A1A"/>
                 </a:solidFill>
@@ -29293,8 +29674,8 @@
         </p:nvSpPr>
         <p:spPr>
           <a:xfrm>
-            <a:off x="585216" y="1600200"/>
-            <a:ext cx="146304" cy="146304"/>
+            <a:off x="585216" y="1627632"/>
+            <a:ext cx="182880" cy="182880"/>
           </a:xfrm>
           <a:prstGeom prst="rect">
             <a:avLst/>
@@ -29320,8 +29701,8 @@
         </p:nvSpPr>
         <p:spPr>
           <a:xfrm>
-            <a:off x="804672" y="1554480"/>
-            <a:ext cx="4901184" cy="256032"/>
+            <a:off x="877824" y="1527048"/>
+            <a:ext cx="4828032" cy="365760"/>
           </a:xfrm>
           <a:prstGeom prst="rect">
             <a:avLst/>
@@ -29337,7 +29718,7 @@
           <a:p>
             <a:pPr algn="l"/>
             <a:r>
-              <a:rPr lang="ja-JP" sz="1100" b="1" spc="30" dirty="0">
+              <a:rPr lang="ja-JP" sz="1000" b="1" spc="40" dirty="0">
                 <a:solidFill>
                   <a:srgbClr val="00C2D1"/>
                 </a:solidFill>
@@ -29345,10 +29726,10 @@
                 <a:ea typeface="Montserrat"/>
                 <a:cs typeface="Montserrat"/>
               </a:rPr>
-              <a:t>MUST INCLUDE  </a:t>
-            </a:r>
-            <a:r>
-              <a:rPr lang="ja-JP" sz="1300" b="1" dirty="0">
+              <a:t>MUST INCLUDE   </a:t>
+            </a:r>
+            <a:r>
+              <a:rPr lang="ja-JP" sz="1650" b="1" dirty="0">
                 <a:solidFill>
                   <a:srgbClr val="1A1A1A"/>
                 </a:solidFill>
@@ -30314,8 +30695,8 @@
         </p:nvSpPr>
         <p:spPr>
           <a:xfrm>
-            <a:off x="5989320" y="1600200"/>
-            <a:ext cx="146304" cy="146304"/>
+            <a:off x="5989320" y="1627632"/>
+            <a:ext cx="182880" cy="182880"/>
           </a:xfrm>
           <a:prstGeom prst="rect">
             <a:avLst/>
@@ -30341,8 +30722,8 @@
         </p:nvSpPr>
         <p:spPr>
           <a:xfrm>
-            <a:off x="6208776" y="1554480"/>
-            <a:ext cx="5397703" cy="256032"/>
+            <a:off x="6281928" y="1527048"/>
+            <a:ext cx="5324551" cy="365760"/>
           </a:xfrm>
           <a:prstGeom prst="rect">
             <a:avLst/>
@@ -30358,7 +30739,7 @@
           <a:p>
             <a:pPr algn="l"/>
             <a:r>
-              <a:rPr lang="ja-JP" sz="1100" b="1" spc="30" dirty="0">
+              <a:rPr lang="ja-JP" sz="1000" b="1" spc="40" dirty="0">
                 <a:solidFill>
                   <a:srgbClr val="00C2D1"/>
                 </a:solidFill>
@@ -30366,10 +30747,10 @@
                 <a:ea typeface="Montserrat"/>
                 <a:cs typeface="Montserrat"/>
               </a:rPr>
-              <a:t>EXAMPLES  </a:t>
-            </a:r>
-            <a:r>
-              <a:rPr lang="ja-JP" sz="1300" b="1" dirty="0">
+              <a:t>EXAMPLES   </a:t>
+            </a:r>
+            <a:r>
+              <a:rPr lang="ja-JP" sz="1650" b="1" dirty="0">
                 <a:solidFill>
                   <a:srgbClr val="1A1A1A"/>
                 </a:solidFill>
@@ -30856,7 +31237,7 @@
         <p:spPr>
           <a:xfrm>
             <a:off x="969264" y="365760"/>
-            <a:ext cx="7315200" cy="310896"/>
+            <a:ext cx="8229600" cy="310896"/>
           </a:xfrm>
           <a:prstGeom prst="rect">
             <a:avLst/>
@@ -30872,7 +31253,7 @@
           <a:p>
             <a:pPr algn="l"/>
             <a:r>
-              <a:rPr lang="ja-JP" sz="1250" b="1" spc="60" dirty="0">
+              <a:rPr lang="ja-JP" sz="1200" b="1" spc="60" dirty="0">
                 <a:solidFill>
                   <a:srgbClr val="8A2BE2"/>
                 </a:solidFill>
@@ -30883,7 +31264,7 @@
               <a:t>TIKTOK CASE 03  </a:t>
             </a:r>
             <a:r>
-              <a:rPr lang="ja-JP" sz="1100" b="1" spc="20" dirty="0">
+              <a:rPr lang="ja-JP" sz="1050" b="1" spc="20" dirty="0">
                 <a:solidFill>
                   <a:srgbClr val="1A1A1A"/>
                 </a:solidFill>
@@ -30921,11 +31302,11 @@
           <a:p>
             <a:pPr algn="l">
               <a:lnSpc>
-                <a:spcPct val="120000"/>
+                <a:spcPct val="116000"/>
               </a:lnSpc>
             </a:pPr>
             <a:r>
-              <a:rPr lang="ja-JP" sz="2800" b="1" dirty="0">
+              <a:rPr lang="ja-JP" sz="3300" b="1" dirty="0">
                 <a:solidFill>
                   <a:srgbClr val="1A1A1A"/>
                 </a:solidFill>
@@ -30939,11 +31320,11 @@
           <a:p>
             <a:pPr algn="l">
               <a:lnSpc>
-                <a:spcPct val="120000"/>
+                <a:spcPct val="116000"/>
               </a:lnSpc>
             </a:pPr>
             <a:r>
-              <a:rPr lang="ja-JP" sz="2800" b="1" dirty="0">
+              <a:rPr lang="ja-JP" sz="3300" b="1" dirty="0">
                 <a:solidFill>
                   <a:srgbClr val="1A1A1A"/>
                 </a:solidFill>
@@ -30964,8 +31345,8 @@
         </p:nvSpPr>
         <p:spPr>
           <a:xfrm>
-            <a:off x="585216" y="2148840"/>
-            <a:ext cx="146304" cy="146304"/>
+            <a:off x="585216" y="2176272"/>
+            <a:ext cx="182880" cy="182880"/>
           </a:xfrm>
           <a:prstGeom prst="rect">
             <a:avLst/>
@@ -30991,8 +31372,8 @@
         </p:nvSpPr>
         <p:spPr>
           <a:xfrm>
-            <a:off x="804672" y="2103120"/>
-            <a:ext cx="5586984" cy="256032"/>
+            <a:off x="877824" y="2075688"/>
+            <a:ext cx="5513832" cy="365760"/>
           </a:xfrm>
           <a:prstGeom prst="rect">
             <a:avLst/>
@@ -31008,7 +31389,7 @@
           <a:p>
             <a:pPr algn="l"/>
             <a:r>
-              <a:rPr lang="ja-JP" sz="1100" b="1" spc="30" dirty="0">
+              <a:rPr lang="ja-JP" sz="1000" b="1" spc="40" dirty="0">
                 <a:solidFill>
                   <a:srgbClr val="8A2BE2"/>
                 </a:solidFill>
@@ -31016,10 +31397,10 @@
                 <a:ea typeface="Montserrat"/>
                 <a:cs typeface="Montserrat"/>
               </a:rPr>
-              <a:t>ACCOUNT DESIGN  </a:t>
-            </a:r>
-            <a:r>
-              <a:rPr lang="ja-JP" sz="1300" b="1" dirty="0">
+              <a:t>ACCOUNT DESIGN   </a:t>
+            </a:r>
+            <a:r>
+              <a:rPr lang="ja-JP" sz="1650" b="1" dirty="0">
                 <a:solidFill>
                   <a:srgbClr val="1A1A1A"/>
                 </a:solidFill>
@@ -31818,8 +32199,8 @@
         </p:nvSpPr>
         <p:spPr>
           <a:xfrm>
-            <a:off x="585216" y="5029200"/>
-            <a:ext cx="146304" cy="146304"/>
+            <a:off x="585216" y="5056632"/>
+            <a:ext cx="182880" cy="182880"/>
           </a:xfrm>
           <a:prstGeom prst="rect">
             <a:avLst/>
@@ -31845,8 +32226,8 @@
         </p:nvSpPr>
         <p:spPr>
           <a:xfrm>
-            <a:off x="804672" y="4983480"/>
-            <a:ext cx="5586984" cy="256032"/>
+            <a:off x="877824" y="4956048"/>
+            <a:ext cx="5513832" cy="365760"/>
           </a:xfrm>
           <a:prstGeom prst="rect">
             <a:avLst/>
@@ -31862,7 +32243,7 @@
           <a:p>
             <a:pPr algn="l"/>
             <a:r>
-              <a:rPr lang="ja-JP" sz="1100" b="1" spc="30" dirty="0">
+              <a:rPr lang="ja-JP" sz="1000" b="1" spc="40" dirty="0">
                 <a:solidFill>
                   <a:srgbClr val="8A2BE2"/>
                 </a:solidFill>
@@ -31870,10 +32251,10 @@
                 <a:ea typeface="Montserrat"/>
                 <a:cs typeface="Montserrat"/>
               </a:rPr>
-              <a:t>CONCEPT  </a:t>
-            </a:r>
-            <a:r>
-              <a:rPr lang="ja-JP" sz="1300" b="1" dirty="0">
+              <a:t>CONCEPT   </a:t>
+            </a:r>
+            <a:r>
+              <a:rPr lang="ja-JP" sz="1650" b="1" dirty="0">
                 <a:solidFill>
                   <a:srgbClr val="1A1A1A"/>
                 </a:solidFill>
